--- a/bajon-lunar-presentacion.pptx
+++ b/bajon-lunar-presentacion.pptx
@@ -14,9 +14,10 @@
     <p:sldId id="262" r:id="rId8"/>
     <p:sldId id="263" r:id="rId9"/>
     <p:sldId id="264" r:id="rId10"/>
+    <p:sldId id="265" r:id="rId11"/>
   </p:sldIdLst>
   <p:notesMasterIdLst>
-    <p:notesMasterId r:id="rId11"/>
+    <p:notesMasterId r:id="rId12"/>
   </p:notesMasterIdLst>
   <p:sldSz cx="12192000" cy="6858000"/>
   <p:notesSz cx="6858000" cy="12192000"/>
@@ -115,37 +116,38 @@
   <p:extLst>
     <p:ext uri="{521415D9-36F7-43E2-AB2F-B90AF26B5E84}">
       <p14:sectionLst xmlns:p14="http://schemas.microsoft.com/office/powerpoint/2010/main">
-        <p14:section name="Portada" id="{5e1d1715-989b-0302-b1dd-7fa7bd2c6cc9}">
+        <p14:section name="Portada" id="{4a260fa9-2a51-ddda-18e9-237c0b98fdf5}">
           <p14:sldIdLst>
             <p14:sldId id="256"/>
           </p14:sldIdLst>
         </p14:section>
-        <p14:section name="Nosotros" id="{4465e708-a241-4971-173e-eaf15e2b8eeb}">
+        <p14:section name="Nosotros" id="{2f2bbacf-dbe4-0dd5-31d7-c59b280d8e6e}">
           <p14:sldIdLst>
             <p14:sldId id="257"/>
           </p14:sldIdLst>
         </p14:section>
-        <p14:section name="Servicios" id="{1192dbc6-4f8d-bedd-1207-5deb02f7d29e}">
+        <p14:section name="Servicios" id="{c57521c4-765e-c194-2ed2-d2a2f63b738a}">
           <p14:sldIdLst>
             <p14:sldId id="258"/>
             <p14:sldId id="259"/>
           </p14:sldIdLst>
         </p14:section>
-        <p14:section name="Paquetes y precios" id="{b6d190ba-9061-324a-ec45-e83959badc03}">
+        <p14:section name="Paquetes y precios" id="{a2f8daeb-a81f-80b1-0c21-b9282766ee66}">
           <p14:sldIdLst>
             <p14:sldId id="260"/>
             <p14:sldId id="261"/>
+            <p14:sldId id="262"/>
           </p14:sldIdLst>
         </p14:section>
-        <p14:section name="Cómo cotizar" id="{1cc78281-e555-5b31-caad-80832c54e09a}">
+        <p14:section name="Cómo cotizar" id="{1fe2456d-232d-4845-70ee-95f5a0588056}">
           <p14:sldIdLst>
-            <p14:sldId id="262"/>
             <p14:sldId id="263"/>
+            <p14:sldId id="264"/>
           </p14:sldIdLst>
         </p14:section>
-        <p14:section name="Contacto" id="{1d32ad9e-51c1-ebe0-744f-3875f3071223}">
+        <p14:section name="Contacto" id="{884d79b2-8889-b0a3-6fa1-9ef943f34a52}">
           <p14:sldIdLst>
-            <p14:sldId id="264"/>
+            <p14:sldId id="265"/>
           </p14:sldIdLst>
         </p14:section>
       </p14:sectionLst>
@@ -594,6 +596,94 @@
 </p:notes>
 </file>
 
+<file path=ppt/notesSlides/notesSlide10.xml><?xml version="1.0" encoding="utf-8"?>
+<p:notes xmlns:a="http://schemas.openxmlformats.org/drawingml/2006/main" xmlns:r="http://schemas.openxmlformats.org/officeDocument/2006/relationships" xmlns:p="http://schemas.openxmlformats.org/presentationml/2006/main">
+  <p:cSld>
+    <p:spTree>
+      <p:nvGrpSpPr>
+        <p:cNvPr id="1" name=""/>
+        <p:cNvGrpSpPr/>
+        <p:nvPr/>
+      </p:nvGrpSpPr>
+      <p:grpSpPr>
+        <a:xfrm>
+          <a:off x="0" y="0"/>
+          <a:ext cx="0" cy="0"/>
+          <a:chOff x="0" y="0"/>
+          <a:chExt cx="0" cy="0"/>
+        </a:xfrm>
+      </p:grpSpPr>
+      <p:sp>
+        <p:nvSpPr>
+          <p:cNvPr id="2" name="Slide Image Placeholder 1"/>
+          <p:cNvSpPr>
+            <a:spLocks noGrp="1" noRot="1" noChangeAspect="1"/>
+          </p:cNvSpPr>
+          <p:nvPr>
+            <p:ph type="sldImg"/>
+          </p:nvPr>
+        </p:nvSpPr>
+        <p:spPr/>
+      </p:sp>
+      <p:sp>
+        <p:nvSpPr>
+          <p:cNvPr id="3" name="Notes Placeholder 2"/>
+          <p:cNvSpPr>
+            <a:spLocks noGrp="1"/>
+          </p:cNvSpPr>
+          <p:nvPr>
+            <p:ph type="body" idx="1"/>
+          </p:nvPr>
+        </p:nvSpPr>
+        <p:spPr/>
+        <p:txBody>
+          <a:bodyPr/>
+          <a:lstStyle/>
+          <a:p>
+            <a:r>
+              <a:rPr lang="en-US" dirty="0"/>
+              <a:t>Cierre con datos de contacto y códigos QR a la página y a WhatsApp.</a:t>
+            </a:r>
+            <a:endParaRPr lang="en-US" dirty="0"/>
+          </a:p>
+        </p:txBody>
+      </p:sp>
+      <p:sp>
+        <p:nvSpPr>
+          <p:cNvPr id="4" name="Slide Number Placeholder 3"/>
+          <p:cNvSpPr>
+            <a:spLocks noGrp="1"/>
+          </p:cNvSpPr>
+          <p:nvPr>
+            <p:ph type="sldNum" sz="quarter" idx="10"/>
+          </p:nvPr>
+        </p:nvSpPr>
+        <p:spPr/>
+        <p:txBody>
+          <a:bodyPr/>
+          <a:lstStyle/>
+          <a:p>
+            <a:fld id="{F7021451-1387-4CA6-816F-3879F97B5CBC}" type="slidenum">
+              <a:rPr lang="en-US"/>
+              <a:t>10</a:t>
+            </a:fld>
+            <a:endParaRPr lang="en-US"/>
+          </a:p>
+        </p:txBody>
+      </p:sp>
+    </p:spTree>
+    <p:extLst>
+      <p:ext uri="{BB962C8B-B14F-4D97-AF65-F5344CB8AC3E}">
+        <p14:creationId xmlns:p14="http://schemas.microsoft.com/office/powerpoint/2010/main" val="1024086991"/>
+      </p:ext>
+    </p:extLst>
+  </p:cSld>
+  <p:clrMapOvr>
+    <a:masterClrMapping/>
+  </p:clrMapOvr>
+</p:notes>
+</file>
+
 <file path=ppt/notesSlides/notesSlide2.xml><?xml version="1.0" encoding="utf-8"?>
 <p:notes xmlns:a="http://schemas.openxmlformats.org/drawingml/2006/main" xmlns:r="http://schemas.openxmlformats.org/officeDocument/2006/relationships" xmlns:p="http://schemas.openxmlformats.org/presentationml/2006/main">
   <p:cSld>
@@ -992,7 +1082,7 @@
           <a:p>
             <a:r>
               <a:rPr lang="en-US" dirty="0"/>
-              <a:t>Ejemplo: con gomitas, Cosmos Pack arranca en $1,800; con cantaritos, en $8,400. Los descuentos se aplican automáticamente en el cotizador.</a:t>
+              <a:t>Ejemplo: con gomitas, Cosmos Pack arranca en $2,400; con cantaritos, en $8,400. Los descuentos se aplican automáticamente en el cotizador.</a:t>
             </a:r>
             <a:endParaRPr lang="en-US" dirty="0"/>
           </a:p>
@@ -1080,7 +1170,7 @@
           <a:p>
             <a:r>
               <a:rPr lang="en-US" dirty="0"/>
-              <a:t>El cotizador está en la página web. Genera un PDF con folio y el cliente puede rastrear el estado con ese folio.</a:t>
+              <a:t>Regalos por paquete según la barra elegida, y recomendaciones para eventos pequeños y grandes.</a:t>
             </a:r>
             <a:endParaRPr lang="en-US" dirty="0"/>
           </a:p>
@@ -1168,7 +1258,7 @@
           <a:p>
             <a:r>
               <a:rPr lang="en-US" dirty="0"/>
-              <a:t>Resumen de los términos y condiciones publicados en la página web.</a:t>
+              <a:t>El cotizador está en la página web. Genera un PDF con folio y el cliente puede rastrear el estado con ese folio.</a:t>
             </a:r>
             <a:endParaRPr lang="en-US" dirty="0"/>
           </a:p>
@@ -1256,7 +1346,7 @@
           <a:p>
             <a:r>
               <a:rPr lang="en-US" dirty="0"/>
-              <a:t>Cierre con datos de contacto y códigos QR a la página y a WhatsApp.</a:t>
+              <a:t>Resumen de los términos y condiciones publicados en la página web.</a:t>
             </a:r>
             <a:endParaRPr lang="en-US" dirty="0"/>
           </a:p>
@@ -2292,6 +2382,612 @@
 </p:sld>
 </file>
 
+<file path=ppt/slides/slide10.xml><?xml version="1.0" encoding="utf-8"?>
+<p:sld xmlns:a="http://schemas.openxmlformats.org/drawingml/2006/main" xmlns:r="http://schemas.openxmlformats.org/officeDocument/2006/relationships" xmlns:p="http://schemas.openxmlformats.org/presentationml/2006/main">
+  <p:cSld name="Slide 10">
+    <p:spTree>
+      <p:nvGrpSpPr>
+        <p:cNvPr id="1" name=""/>
+        <p:cNvGrpSpPr/>
+        <p:nvPr/>
+      </p:nvGrpSpPr>
+      <p:grpSpPr>
+        <a:xfrm>
+          <a:off x="0" y="0"/>
+          <a:ext cx="0" cy="0"/>
+          <a:chOff x="0" y="0"/>
+          <a:chExt cx="0" cy="0"/>
+        </a:xfrm>
+      </p:grpSpPr>
+      <p:pic>
+        <p:nvPicPr>
+          <p:cNvPr id="2" name="Logo cierre" descr="/home/claude/assets/logo_720.png">    </p:cNvPr>
+          <p:cNvPicPr>
+            <a:picLocks noChangeAspect="1"/>
+          </p:cNvPicPr>
+          <p:nvPr/>
+        </p:nvPicPr>
+        <p:blipFill>
+          <a:blip r:embed="rId1"/>
+          <a:stretch>
+            <a:fillRect/>
+          </a:stretch>
+        </p:blipFill>
+        <p:spPr>
+          <a:xfrm>
+            <a:off x="731520" y="777240"/>
+            <a:ext cx="1828800" cy="1828800"/>
+          </a:xfrm>
+          <a:prstGeom prst="rect">
+            <a:avLst/>
+          </a:prstGeom>
+        </p:spPr>
+      </p:pic>
+      <p:sp>
+        <p:nvSpPr>
+          <p:cNvPr id="3" name="Cierre 1"/>
+          <p:cNvSpPr txBox="1"/>
+          <p:nvPr/>
+        </p:nvSpPr>
+        <p:spPr>
+          <a:xfrm>
+            <a:off x="731520" y="2788920"/>
+            <a:ext cx="6400800" cy="868680"/>
+          </a:xfrm>
+          <a:prstGeom prst="rect">
+            <a:avLst/>
+          </a:prstGeom>
+          <a:noFill/>
+          <a:ln/>
+        </p:spPr>
+        <p:txBody>
+          <a:bodyPr wrap="square" lIns="0" tIns="0" rIns="0" bIns="0" rtlCol="0" anchor="ctr"/>
+          <a:lstStyle/>
+          <a:p>
+            <a:pPr indent="0" marL="0">
+              <a:buNone/>
+            </a:pPr>
+            <a:r>
+              <a:rPr lang="en-US" sz="4800" dirty="0">
+                <a:solidFill>
+                  <a:schemeClr val="bg1"/>
+                </a:solidFill>
+                <a:latin typeface="Arial Black" pitchFamily="34" charset="0"/>
+                <a:ea typeface="Arial Black" pitchFamily="34" charset="-122"/>
+                <a:cs typeface="Arial Black" pitchFamily="34" charset="-120"/>
+              </a:rPr>
+              <a:t>¿LISTO PARA</a:t>
+            </a:r>
+            <a:endParaRPr lang="en-US" sz="4800" dirty="0"/>
+          </a:p>
+        </p:txBody>
+      </p:sp>
+      <p:sp>
+        <p:nvSpPr>
+          <p:cNvPr id="4" name="Cierre 2"/>
+          <p:cNvSpPr txBox="1"/>
+          <p:nvPr/>
+        </p:nvSpPr>
+        <p:spPr>
+          <a:xfrm>
+            <a:off x="731520" y="3566160"/>
+            <a:ext cx="6400800" cy="868680"/>
+          </a:xfrm>
+          <a:prstGeom prst="rect">
+            <a:avLst/>
+          </a:prstGeom>
+          <a:noFill/>
+          <a:ln/>
+        </p:spPr>
+        <p:txBody>
+          <a:bodyPr wrap="square" lIns="0" tIns="0" rIns="0" bIns="0" rtlCol="0" anchor="ctr"/>
+          <a:lstStyle/>
+          <a:p>
+            <a:pPr indent="0" marL="0">
+              <a:buNone/>
+            </a:pPr>
+            <a:r>
+              <a:rPr lang="en-US" sz="4800" dirty="0">
+                <a:solidFill>
+                  <a:schemeClr val="accent1"/>
+                </a:solidFill>
+                <a:latin typeface="Arial Black" pitchFamily="34" charset="0"/>
+                <a:ea typeface="Arial Black" pitchFamily="34" charset="-122"/>
+                <a:cs typeface="Arial Black" pitchFamily="34" charset="-120"/>
+              </a:rPr>
+              <a:t>EL BAJÓN?</a:t>
+            </a:r>
+            <a:endParaRPr lang="en-US" sz="4800" dirty="0"/>
+          </a:p>
+        </p:txBody>
+      </p:sp>
+      <p:pic>
+        <p:nvPicPr>
+          <p:cNvPr id="5" name="Image 1" descr="preencoded.png">    </p:cNvPr>
+          <p:cNvPicPr>
+            <a:picLocks noChangeAspect="1"/>
+          </p:cNvPicPr>
+          <p:nvPr/>
+        </p:nvPicPr>
+        <p:blipFill>
+          <a:blip r:embed="rId2"/>
+          <a:stretch>
+            <a:fillRect/>
+          </a:stretch>
+        </p:blipFill>
+        <p:spPr>
+          <a:xfrm>
+            <a:off x="731520" y="4681728"/>
+            <a:ext cx="274320" cy="274320"/>
+          </a:xfrm>
+          <a:prstGeom prst="rect">
+            <a:avLst/>
+          </a:prstGeom>
+        </p:spPr>
+      </p:pic>
+      <p:sp>
+        <p:nvSpPr>
+          <p:cNvPr id="6" name="Contacto 1">
+            <a:hlinkClick r:id="rId3" tooltip=""/>
+          </p:cNvPr>
+          <p:cNvSpPr txBox="1"/>
+          <p:nvPr/>
+        </p:nvSpPr>
+        <p:spPr>
+          <a:xfrm>
+            <a:off x="1143000" y="4617720"/>
+            <a:ext cx="5943600" cy="402336"/>
+          </a:xfrm>
+          <a:prstGeom prst="rect">
+            <a:avLst/>
+          </a:prstGeom>
+          <a:noFill/>
+          <a:ln/>
+        </p:spPr>
+        <p:txBody>
+          <a:bodyPr wrap="square" lIns="0" tIns="0" rIns="0" bIns="0" rtlCol="0" anchor="ctr"/>
+          <a:lstStyle/>
+          <a:p>
+            <a:pPr indent="0" marL="0">
+              <a:buNone/>
+            </a:pPr>
+            <a:r>
+              <a:rPr lang="en-US" sz="1600" u="sng" dirty="0">
+                <a:solidFill>
+                  <a:schemeClr val="bg1"/>
+                </a:solidFill>
+                <a:latin typeface="Calibri" pitchFamily="34" charset="0"/>
+                <a:ea typeface="Calibri" pitchFamily="34" charset="-122"/>
+                <a:cs typeface="Calibri" pitchFamily="34" charset="-120"/>
+                <a:hlinkClick r:id="rId3" invalidUrl="" action="" tgtFrame="" tooltip="" history="1" highlightClick="0" endSnd="0">
+                  <a:extLst>
+                    <a:ext uri="{A12FA001-AC4F-418D-AE19-62706E023703}">
+                      <ahyp:hlinkClr xmlns:ahyp="http://schemas.microsoft.com/office/drawing/2018/hyperlinkcolor" val="tx"/>
+                    </a:ext>
+                  </a:extLst>
+                </a:hlinkClick>
+              </a:rPr>
+              <a:t>WhatsApp: 55 7190 1664 · cotizaciones 24/7</a:t>
+            </a:r>
+            <a:endParaRPr lang="en-US" sz="1600" dirty="0"/>
+          </a:p>
+        </p:txBody>
+      </p:sp>
+      <p:pic>
+        <p:nvPicPr>
+          <p:cNvPr id="7" name="Image 2" descr="preencoded.png">    </p:cNvPr>
+          <p:cNvPicPr>
+            <a:picLocks noChangeAspect="1"/>
+          </p:cNvPicPr>
+          <p:nvPr/>
+        </p:nvPicPr>
+        <p:blipFill>
+          <a:blip r:embed="rId4"/>
+          <a:stretch>
+            <a:fillRect/>
+          </a:stretch>
+        </p:blipFill>
+        <p:spPr>
+          <a:xfrm>
+            <a:off x="731520" y="5138928"/>
+            <a:ext cx="274320" cy="274320"/>
+          </a:xfrm>
+          <a:prstGeom prst="rect">
+            <a:avLst/>
+          </a:prstGeom>
+        </p:spPr>
+      </p:pic>
+      <p:sp>
+        <p:nvSpPr>
+          <p:cNvPr id="8" name="Contacto 2"/>
+          <p:cNvSpPr txBox="1"/>
+          <p:nvPr/>
+        </p:nvSpPr>
+        <p:spPr>
+          <a:xfrm>
+            <a:off x="1143000" y="5074920"/>
+            <a:ext cx="5943600" cy="402336"/>
+          </a:xfrm>
+          <a:prstGeom prst="rect">
+            <a:avLst/>
+          </a:prstGeom>
+          <a:noFill/>
+          <a:ln/>
+        </p:spPr>
+        <p:txBody>
+          <a:bodyPr wrap="square" lIns="0" tIns="0" rIns="0" bIns="0" rtlCol="0" anchor="ctr"/>
+          <a:lstStyle/>
+          <a:p>
+            <a:pPr indent="0" marL="0">
+              <a:buNone/>
+            </a:pPr>
+            <a:r>
+              <a:rPr lang="en-US" sz="1600" dirty="0">
+                <a:solidFill>
+                  <a:schemeClr val="bg1"/>
+                </a:solidFill>
+                <a:latin typeface="Calibri" pitchFamily="34" charset="0"/>
+                <a:ea typeface="Calibri" pitchFamily="34" charset="-122"/>
+                <a:cs typeface="Calibri" pitchFamily="34" charset="-120"/>
+              </a:rPr>
+              <a:t>Instagram: @bajon_lunar</a:t>
+            </a:r>
+            <a:endParaRPr lang="en-US" sz="1600" dirty="0"/>
+          </a:p>
+        </p:txBody>
+      </p:sp>
+      <p:pic>
+        <p:nvPicPr>
+          <p:cNvPr id="9" name="Image 3" descr="preencoded.png">    </p:cNvPr>
+          <p:cNvPicPr>
+            <a:picLocks noChangeAspect="1"/>
+          </p:cNvPicPr>
+          <p:nvPr/>
+        </p:nvPicPr>
+        <p:blipFill>
+          <a:blip r:embed="rId5"/>
+          <a:stretch>
+            <a:fillRect/>
+          </a:stretch>
+        </p:blipFill>
+        <p:spPr>
+          <a:xfrm>
+            <a:off x="731520" y="5596128"/>
+            <a:ext cx="274320" cy="274320"/>
+          </a:xfrm>
+          <a:prstGeom prst="rect">
+            <a:avLst/>
+          </a:prstGeom>
+        </p:spPr>
+      </p:pic>
+      <p:sp>
+        <p:nvSpPr>
+          <p:cNvPr id="10" name="Contacto 3"/>
+          <p:cNvSpPr txBox="1"/>
+          <p:nvPr/>
+        </p:nvSpPr>
+        <p:spPr>
+          <a:xfrm>
+            <a:off x="1143000" y="5532120"/>
+            <a:ext cx="5943600" cy="402336"/>
+          </a:xfrm>
+          <a:prstGeom prst="rect">
+            <a:avLst/>
+          </a:prstGeom>
+          <a:noFill/>
+          <a:ln/>
+        </p:spPr>
+        <p:txBody>
+          <a:bodyPr wrap="square" lIns="0" tIns="0" rIns="0" bIns="0" rtlCol="0" anchor="ctr"/>
+          <a:lstStyle/>
+          <a:p>
+            <a:pPr indent="0" marL="0">
+              <a:buNone/>
+            </a:pPr>
+            <a:r>
+              <a:rPr lang="en-US" sz="1600" dirty="0">
+                <a:solidFill>
+                  <a:schemeClr val="bg1"/>
+                </a:solidFill>
+                <a:latin typeface="Calibri" pitchFamily="34" charset="0"/>
+                <a:ea typeface="Calibri" pitchFamily="34" charset="-122"/>
+                <a:cs typeface="Calibri" pitchFamily="34" charset="-120"/>
+              </a:rPr>
+              <a:t>Correo: bajonlunar@gmail.com</a:t>
+            </a:r>
+            <a:endParaRPr lang="en-US" sz="1600" dirty="0"/>
+          </a:p>
+        </p:txBody>
+      </p:sp>
+      <p:pic>
+        <p:nvPicPr>
+          <p:cNvPr id="11" name="Image 4" descr="preencoded.png">    </p:cNvPr>
+          <p:cNvPicPr>
+            <a:picLocks noChangeAspect="1"/>
+          </p:cNvPicPr>
+          <p:nvPr/>
+        </p:nvPicPr>
+        <p:blipFill>
+          <a:blip r:embed="rId6"/>
+          <a:stretch>
+            <a:fillRect/>
+          </a:stretch>
+        </p:blipFill>
+        <p:spPr>
+          <a:xfrm>
+            <a:off x="731520" y="6053328"/>
+            <a:ext cx="274320" cy="274320"/>
+          </a:xfrm>
+          <a:prstGeom prst="rect">
+            <a:avLst/>
+          </a:prstGeom>
+        </p:spPr>
+      </p:pic>
+      <p:sp>
+        <p:nvSpPr>
+          <p:cNvPr id="12" name="Contacto 4">
+            <a:hlinkClick r:id="rId7" tooltip=""/>
+          </p:cNvPr>
+          <p:cNvSpPr txBox="1"/>
+          <p:nvPr/>
+        </p:nvSpPr>
+        <p:spPr>
+          <a:xfrm>
+            <a:off x="1143000" y="5989320"/>
+            <a:ext cx="5943600" cy="402336"/>
+          </a:xfrm>
+          <a:prstGeom prst="rect">
+            <a:avLst/>
+          </a:prstGeom>
+          <a:noFill/>
+          <a:ln/>
+        </p:spPr>
+        <p:txBody>
+          <a:bodyPr wrap="square" lIns="0" tIns="0" rIns="0" bIns="0" rtlCol="0" anchor="ctr"/>
+          <a:lstStyle/>
+          <a:p>
+            <a:pPr indent="0" marL="0">
+              <a:buNone/>
+            </a:pPr>
+            <a:r>
+              <a:rPr lang="en-US" sz="1600" u="sng" dirty="0">
+                <a:solidFill>
+                  <a:schemeClr val="bg1"/>
+                </a:solidFill>
+                <a:latin typeface="Calibri" pitchFamily="34" charset="0"/>
+                <a:ea typeface="Calibri" pitchFamily="34" charset="-122"/>
+                <a:cs typeface="Calibri" pitchFamily="34" charset="-120"/>
+                <a:hlinkClick r:id="rId7" invalidUrl="" action="" tgtFrame="" tooltip="" history="1" highlightClick="0" endSnd="0">
+                  <a:extLst>
+                    <a:ext uri="{A12FA001-AC4F-418D-AE19-62706E023703}">
+                      <ahyp:hlinkClr xmlns:ahyp="http://schemas.microsoft.com/office/drawing/2018/hyperlinkcolor" val="tx"/>
+                    </a:ext>
+                  </a:extLst>
+                </a:hlinkClick>
+              </a:rPr>
+              <a:t>ingalejandrofh01-boop.github.io/Bajon-Lunar</a:t>
+            </a:r>
+            <a:endParaRPr lang="en-US" sz="1600" dirty="0"/>
+          </a:p>
+        </p:txBody>
+      </p:sp>
+      <p:sp>
+        <p:nvSpPr>
+          <p:cNvPr id="13" name="Fondo QR 1"/>
+          <p:cNvSpPr/>
+          <p:nvPr/>
+        </p:nvSpPr>
+        <p:spPr>
+          <a:xfrm>
+            <a:off x="7498080" y="2514600"/>
+            <a:ext cx="2011680" cy="2011680"/>
+          </a:xfrm>
+          <a:prstGeom prst="roundRect">
+            <a:avLst>
+              <a:gd name="adj" fmla="val 6364"/>
+            </a:avLst>
+          </a:prstGeom>
+          <a:solidFill>
+            <a:srgbClr val="FFFFFF"/>
+          </a:solidFill>
+          <a:ln/>
+        </p:spPr>
+      </p:sp>
+      <p:pic>
+        <p:nvPicPr>
+          <p:cNvPr id="14" name="QR 1" descr="/home/claude/assets/qr_site.png">    </p:cNvPr>
+          <p:cNvPicPr>
+            <a:picLocks noChangeAspect="1"/>
+          </p:cNvPicPr>
+          <p:nvPr/>
+        </p:nvPicPr>
+        <p:blipFill>
+          <a:blip r:embed="rId8"/>
+          <a:stretch>
+            <a:fillRect/>
+          </a:stretch>
+        </p:blipFill>
+        <p:spPr>
+          <a:xfrm>
+            <a:off x="7635240" y="2651760"/>
+            <a:ext cx="1737360" cy="1737360"/>
+          </a:xfrm>
+          <a:prstGeom prst="rect">
+            <a:avLst/>
+          </a:prstGeom>
+        </p:spPr>
+      </p:pic>
+      <p:sp>
+        <p:nvSpPr>
+          <p:cNvPr id="15" name="Texto QR 1"/>
+          <p:cNvSpPr txBox="1"/>
+          <p:nvPr/>
+        </p:nvSpPr>
+        <p:spPr>
+          <a:xfrm>
+            <a:off x="7406640" y="4663440"/>
+            <a:ext cx="2194560" cy="457200"/>
+          </a:xfrm>
+          <a:prstGeom prst="rect">
+            <a:avLst/>
+          </a:prstGeom>
+          <a:noFill/>
+          <a:ln/>
+        </p:spPr>
+        <p:txBody>
+          <a:bodyPr wrap="square" lIns="0" tIns="0" rIns="0" bIns="0" rtlCol="0" anchor="ctr"/>
+          <a:lstStyle/>
+          <a:p>
+            <a:pPr algn="ctr" indent="0" marL="0">
+              <a:buNone/>
+            </a:pPr>
+            <a:r>
+              <a:rPr lang="en-US" sz="1400" b="1" dirty="0">
+                <a:solidFill>
+                  <a:schemeClr val="bg1"/>
+                </a:solidFill>
+                <a:latin typeface="Calibri" pitchFamily="34" charset="0"/>
+                <a:ea typeface="Calibri" pitchFamily="34" charset="-122"/>
+                <a:cs typeface="Calibri" pitchFamily="34" charset="-120"/>
+              </a:rPr>
+              <a:t>Cotiza en línea</a:t>
+            </a:r>
+            <a:endParaRPr lang="en-US" sz="1400" dirty="0"/>
+          </a:p>
+        </p:txBody>
+      </p:sp>
+      <p:sp>
+        <p:nvSpPr>
+          <p:cNvPr id="16" name="Fondo QR 2"/>
+          <p:cNvSpPr/>
+          <p:nvPr/>
+        </p:nvSpPr>
+        <p:spPr>
+          <a:xfrm>
+            <a:off x="9784080" y="2514600"/>
+            <a:ext cx="2011680" cy="2011680"/>
+          </a:xfrm>
+          <a:prstGeom prst="roundRect">
+            <a:avLst>
+              <a:gd name="adj" fmla="val 6364"/>
+            </a:avLst>
+          </a:prstGeom>
+          <a:solidFill>
+            <a:srgbClr val="FFFFFF"/>
+          </a:solidFill>
+          <a:ln/>
+        </p:spPr>
+      </p:sp>
+      <p:pic>
+        <p:nvPicPr>
+          <p:cNvPr id="17" name="QR 2" descr="/home/claude/assets/qr_wa.png">    </p:cNvPr>
+          <p:cNvPicPr>
+            <a:picLocks noChangeAspect="1"/>
+          </p:cNvPicPr>
+          <p:nvPr/>
+        </p:nvPicPr>
+        <p:blipFill>
+          <a:blip r:embed="rId9"/>
+          <a:stretch>
+            <a:fillRect/>
+          </a:stretch>
+        </p:blipFill>
+        <p:spPr>
+          <a:xfrm>
+            <a:off x="9921240" y="2651760"/>
+            <a:ext cx="1737360" cy="1737360"/>
+          </a:xfrm>
+          <a:prstGeom prst="rect">
+            <a:avLst/>
+          </a:prstGeom>
+        </p:spPr>
+      </p:pic>
+      <p:sp>
+        <p:nvSpPr>
+          <p:cNvPr id="18" name="Texto QR 2"/>
+          <p:cNvSpPr txBox="1"/>
+          <p:nvPr/>
+        </p:nvSpPr>
+        <p:spPr>
+          <a:xfrm>
+            <a:off x="9692640" y="4663440"/>
+            <a:ext cx="2194560" cy="457200"/>
+          </a:xfrm>
+          <a:prstGeom prst="rect">
+            <a:avLst/>
+          </a:prstGeom>
+          <a:noFill/>
+          <a:ln/>
+        </p:spPr>
+        <p:txBody>
+          <a:bodyPr wrap="square" lIns="0" tIns="0" rIns="0" bIns="0" rtlCol="0" anchor="ctr"/>
+          <a:lstStyle/>
+          <a:p>
+            <a:pPr algn="ctr" indent="0" marL="0">
+              <a:buNone/>
+            </a:pPr>
+            <a:r>
+              <a:rPr lang="en-US" sz="1400" b="1" dirty="0">
+                <a:solidFill>
+                  <a:schemeClr val="bg1"/>
+                </a:solidFill>
+                <a:latin typeface="Calibri" pitchFamily="34" charset="0"/>
+                <a:ea typeface="Calibri" pitchFamily="34" charset="-122"/>
+                <a:cs typeface="Calibri" pitchFamily="34" charset="-120"/>
+              </a:rPr>
+              <a:t>Escríbenos por WhatsApp</a:t>
+            </a:r>
+            <a:endParaRPr lang="en-US" sz="1400" dirty="0"/>
+          </a:p>
+        </p:txBody>
+      </p:sp>
+      <p:sp>
+        <p:nvSpPr>
+          <p:cNvPr id="19" name="Invitación QR"/>
+          <p:cNvSpPr txBox="1"/>
+          <p:nvPr/>
+        </p:nvSpPr>
+        <p:spPr>
+          <a:xfrm>
+            <a:off x="7498080" y="1874520"/>
+            <a:ext cx="4297680" cy="457200"/>
+          </a:xfrm>
+          <a:prstGeom prst="rect">
+            <a:avLst/>
+          </a:prstGeom>
+          <a:noFill/>
+          <a:ln/>
+        </p:spPr>
+        <p:txBody>
+          <a:bodyPr wrap="square" lIns="0" tIns="0" rIns="0" bIns="0" rtlCol="0" anchor="ctr"/>
+          <a:lstStyle/>
+          <a:p>
+            <a:pPr algn="ctr" indent="0" marL="0">
+              <a:buNone/>
+            </a:pPr>
+            <a:r>
+              <a:rPr lang="en-US" sz="1800" i="1" dirty="0">
+                <a:solidFill>
+                  <a:schemeClr val="bg2"/>
+                </a:solidFill>
+                <a:latin typeface="Calibri" pitchFamily="34" charset="0"/>
+                <a:ea typeface="Calibri" pitchFamily="34" charset="-122"/>
+                <a:cs typeface="Calibri" pitchFamily="34" charset="-120"/>
+              </a:rPr>
+              <a:t>Escanea y arma tu paquete</a:t>
+            </a:r>
+            <a:endParaRPr lang="en-US" sz="1800" dirty="0"/>
+          </a:p>
+        </p:txBody>
+      </p:sp>
+    </p:spTree>
+  </p:cSld>
+  <p:clrMapOvr>
+    <a:masterClrMapping/>
+  </p:clrMapOvr>
+</p:sld>
+</file>
+
 <file path=ppt/slides/slide2.xml><?xml version="1.0" encoding="utf-8"?>
 <p:sld xmlns:a="http://schemas.openxmlformats.org/drawingml/2006/main" xmlns:r="http://schemas.openxmlformats.org/officeDocument/2006/relationships" xmlns:p="http://schemas.openxmlformats.org/presentationml/2006/main">
   <p:cSld name="Slide 2">
@@ -3657,7 +4353,7 @@
                 <a:ea typeface="Arial Black" pitchFamily="34" charset="-122"/>
                 <a:cs typeface="Arial Black" pitchFamily="34" charset="-120"/>
               </a:rPr>
-              <a:t>$90</a:t>
+              <a:t>$75</a:t>
             </a:r>
             <a:pPr indent="0" marL="0">
               <a:buNone/>
@@ -3671,7 +4367,7 @@
                 <a:ea typeface="Calibri" pitchFamily="34" charset="-122"/>
                 <a:cs typeface="Calibri" pitchFamily="34" charset="-120"/>
               </a:rPr>
-              <a:t>  por porción</a:t>
+              <a:t>  bowl 16 oz</a:t>
             </a:r>
             <a:endParaRPr lang="en-US" sz="2800" dirty="0"/>
           </a:p>
@@ -3710,7 +4406,7 @@
                 <a:ea typeface="Calibri" pitchFamily="34" charset="-122"/>
                 <a:cs typeface="Calibri" pitchFamily="34" charset="-120"/>
               </a:rPr>
-              <a:t>$115 con proteína</a:t>
+              <a:t>$99 con proteína</a:t>
             </a:r>
             <a:endParaRPr lang="en-US" sz="1200" dirty="0"/>
           </a:p>
@@ -3971,7 +4667,7 @@
                 <a:ea typeface="Arial Black" pitchFamily="34" charset="-122"/>
                 <a:cs typeface="Arial Black" pitchFamily="34" charset="-120"/>
               </a:rPr>
-              <a:t>$90</a:t>
+              <a:t>$60</a:t>
             </a:r>
             <a:pPr indent="0" marL="0">
               <a:buNone/>
@@ -4264,7 +4960,7 @@
                 <a:ea typeface="Arial Black" pitchFamily="34" charset="-122"/>
                 <a:cs typeface="Arial Black" pitchFamily="34" charset="-120"/>
               </a:rPr>
-              <a:t>$45</a:t>
+              <a:t>$60</a:t>
             </a:r>
             <a:pPr indent="0" marL="0">
               <a:buNone/>
@@ -4610,7 +5306,7 @@
                 <a:ea typeface="Calibri" pitchFamily="34" charset="-122"/>
                 <a:cs typeface="Calibri" pitchFamily="34" charset="-120"/>
               </a:rPr>
-              <a:t>Don Julio 70 $950 · Dobel $1,050</a:t>
+              <a:t>Tequila tradicional (Cuervo, Jimador)</a:t>
             </a:r>
             <a:endParaRPr lang="en-US" sz="1200" dirty="0"/>
           </a:p>
@@ -4653,7 +5349,7 @@
                 <a:ea typeface="Calibri" pitchFamily="34" charset="-122"/>
                 <a:cs typeface="Calibri" pitchFamily="34" charset="-120"/>
               </a:rPr>
-              <a:t>Tequila tradicional o premium</a:t>
+              <a:t>Don Julio 70: $950 por botella</a:t>
             </a:r>
             <a:endParaRPr lang="en-US" sz="1400" dirty="0"/>
           </a:p>
@@ -4674,7 +5370,7 @@
                 <a:ea typeface="Calibri" pitchFamily="34" charset="-122"/>
                 <a:cs typeface="Calibri" pitchFamily="34" charset="-120"/>
               </a:rPr>
-              <a:t>Escarchado incluido</a:t>
+              <a:t>Maestro Dobel Diamante: $1,050 por botella</a:t>
             </a:r>
             <a:endParaRPr lang="en-US" sz="1400" dirty="0"/>
           </a:p>
@@ -4695,28 +5391,7 @@
                 <a:ea typeface="Calibri" pitchFamily="34" charset="-122"/>
                 <a:cs typeface="Calibri" pitchFamily="34" charset="-120"/>
               </a:rPr>
-              <a:t>Fruta de temporada</a:t>
-            </a:r>
-            <a:endParaRPr lang="en-US" sz="1400" dirty="0"/>
-          </a:p>
-          <a:p>
-            <a:pPr marL="177800" indent="-177800">
-              <a:spcAft>
-                <a:spcPts val="900"/>
-              </a:spcAft>
-              <a:buSzPct val="100000"/>
-              <a:buChar char="•"/>
-            </a:pPr>
-            <a:r>
-              <a:rPr lang="en-US" sz="1400" dirty="0">
-                <a:solidFill>
-                  <a:schemeClr val="bg1"/>
-                </a:solidFill>
-                <a:latin typeface="Calibri" pitchFamily="34" charset="0"/>
-                <a:ea typeface="Calibri" pitchFamily="34" charset="-122"/>
-                <a:cs typeface="Calibri" pitchFamily="34" charset="-120"/>
-              </a:rPr>
-              <a:t>Cantarito de barro</a:t>
+              <a:t>Escarchado y fruta incluidos</a:t>
             </a:r>
             <a:endParaRPr lang="en-US" sz="1400" dirty="0"/>
           </a:p>
@@ -7687,7 +8362,7 @@
                           <a:ea typeface="Calibri" pitchFamily="34" charset="-122"/>
                           <a:cs typeface="Calibri" pitchFamily="34" charset="-120"/>
                         </a:rPr>
-                        <a:t>Maruchan</a:t>
+                        <a:t>Con proteína</a:t>
                       </a:r>
                       <a:endParaRPr lang="en-US" sz="1400" dirty="0">
                         <a:latin typeface="Calibri" charset="0"/>
@@ -7755,7 +8430,7 @@
                           <a:ea typeface="Calibri" pitchFamily="34" charset="-122"/>
                           <a:cs typeface="Calibri" pitchFamily="34" charset="-120"/>
                         </a:rPr>
-                        <a:t>Gomitas locas</a:t>
+                        <a:t>Maruchan o gomitas</a:t>
                       </a:r>
                       <a:endParaRPr lang="en-US" sz="1400" dirty="0">
                         <a:latin typeface="Calibri" charset="0"/>
@@ -7961,7 +8636,7 @@
                           <a:ea typeface="Calibri" pitchFamily="34" charset="-122"/>
                           <a:cs typeface="Calibri" pitchFamily="34" charset="-120"/>
                         </a:rPr>
-                        <a:t>$1,800</a:t>
+                        <a:t>$1,500</a:t>
                       </a:r>
                       <a:endParaRPr lang="en-US" sz="1600" dirty="0">
                         <a:latin typeface="Calibri" charset="0"/>
@@ -8029,7 +8704,7 @@
                           <a:ea typeface="Calibri" pitchFamily="34" charset="-122"/>
                           <a:cs typeface="Calibri" pitchFamily="34" charset="-120"/>
                         </a:rPr>
-                        <a:t>$1,800</a:t>
+                        <a:t>$1,980</a:t>
                       </a:r>
                       <a:endParaRPr lang="en-US" sz="1600" dirty="0">
                         <a:latin typeface="Calibri" charset="0"/>
@@ -8097,7 +8772,7 @@
                           <a:ea typeface="Calibri" pitchFamily="34" charset="-122"/>
                           <a:cs typeface="Calibri" pitchFamily="34" charset="-120"/>
                         </a:rPr>
-                        <a:t>$900</a:t>
+                        <a:t>$1,200</a:t>
                       </a:r>
                       <a:endParaRPr lang="en-US" sz="1600" dirty="0">
                         <a:latin typeface="Calibri" charset="0"/>
@@ -8303,7 +8978,7 @@
                           <a:ea typeface="Calibri" pitchFamily="34" charset="-122"/>
                           <a:cs typeface="Calibri" pitchFamily="34" charset="-120"/>
                         </a:rPr>
-                        <a:t>$3,600</a:t>
+                        <a:t>$3,000</a:t>
                       </a:r>
                       <a:endParaRPr lang="en-US" sz="1600" dirty="0">
                         <a:latin typeface="Calibri" charset="0"/>
@@ -8371,7 +9046,7 @@
                           <a:ea typeface="Calibri" pitchFamily="34" charset="-122"/>
                           <a:cs typeface="Calibri" pitchFamily="34" charset="-120"/>
                         </a:rPr>
-                        <a:t>$3,600</a:t>
+                        <a:t>$3,960</a:t>
                       </a:r>
                       <a:endParaRPr lang="en-US" sz="1600" dirty="0">
                         <a:latin typeface="Calibri" charset="0"/>
@@ -8439,7 +9114,7 @@
                           <a:ea typeface="Calibri" pitchFamily="34" charset="-122"/>
                           <a:cs typeface="Calibri" pitchFamily="34" charset="-120"/>
                         </a:rPr>
-                        <a:t>$1,800</a:t>
+                        <a:t>$2,400</a:t>
                       </a:r>
                       <a:endParaRPr lang="en-US" sz="1600" dirty="0">
                         <a:latin typeface="Calibri" charset="0"/>
@@ -8645,7 +9320,7 @@
                           <a:ea typeface="Calibri" pitchFamily="34" charset="-122"/>
                           <a:cs typeface="Calibri" pitchFamily="34" charset="-120"/>
                         </a:rPr>
-                        <a:t>$6,300</a:t>
+                        <a:t>$5,250</a:t>
                       </a:r>
                       <a:endParaRPr lang="en-US" sz="1600" dirty="0">
                         <a:latin typeface="Calibri" charset="0"/>
@@ -8713,7 +9388,7 @@
                           <a:ea typeface="Calibri" pitchFamily="34" charset="-122"/>
                           <a:cs typeface="Calibri" pitchFamily="34" charset="-120"/>
                         </a:rPr>
-                        <a:t>$6,300</a:t>
+                        <a:t>$6,930</a:t>
                       </a:r>
                       <a:endParaRPr lang="en-US" sz="1600" dirty="0">
                         <a:latin typeface="Calibri" charset="0"/>
@@ -8781,7 +9456,7 @@
                           <a:ea typeface="Calibri" pitchFamily="34" charset="-122"/>
                           <a:cs typeface="Calibri" pitchFamily="34" charset="-120"/>
                         </a:rPr>
-                        <a:t>$3,150</a:t>
+                        <a:t>$4,200</a:t>
                       </a:r>
                       <a:endParaRPr lang="en-US" sz="1600" dirty="0">
                         <a:latin typeface="Calibri" charset="0"/>
@@ -8987,7 +9662,7 @@
                           <a:ea typeface="Calibri" pitchFamily="34" charset="-122"/>
                           <a:cs typeface="Calibri" pitchFamily="34" charset="-120"/>
                         </a:rPr>
-                        <a:t>$9,900</a:t>
+                        <a:t>$8,250</a:t>
                       </a:r>
                       <a:endParaRPr lang="en-US" sz="1600" dirty="0">
                         <a:latin typeface="Calibri" charset="0"/>
@@ -9055,7 +9730,7 @@
                           <a:ea typeface="Calibri" pitchFamily="34" charset="-122"/>
                           <a:cs typeface="Calibri" pitchFamily="34" charset="-120"/>
                         </a:rPr>
-                        <a:t>$9,900</a:t>
+                        <a:t>$10,890</a:t>
                       </a:r>
                       <a:endParaRPr lang="en-US" sz="1600" dirty="0">
                         <a:latin typeface="Calibri" charset="0"/>
@@ -9123,7 +9798,7 @@
                           <a:ea typeface="Calibri" pitchFamily="34" charset="-122"/>
                           <a:cs typeface="Calibri" pitchFamily="34" charset="-120"/>
                         </a:rPr>
-                        <a:t>$4,950</a:t>
+                        <a:t>$6,600</a:t>
                       </a:r>
                       <a:endParaRPr lang="en-US" sz="1600" dirty="0">
                         <a:latin typeface="Calibri" charset="0"/>
@@ -9280,7 +9955,7 @@
                 <a:ea typeface="Calibri" pitchFamily="34" charset="-122"/>
                 <a:cs typeface="Calibri" pitchFamily="34" charset="-120"/>
               </a:rPr>
-              <a:t>Precio de arranque con el mínimo de personas del paquete y 1 porción por persona. En cantaritos incluye el servicio y las botellas mínimas de tequila tradicional (4, 8, 14 o 22). El total final se calcula en el cotizador.</a:t>
+              <a:t>Precio de arranque con el mínimo de personas y 1 porción por persona (chilaquiles: bowl de 16 oz). Cantaritos: precio por botella; incluye el servicio y las botellas mínimas de tequila tradicional a $450 (4, 8, 14 o 22).</a:t>
             </a:r>
             <a:endParaRPr lang="en-US" sz="1200" dirty="0"/>
           </a:p>
@@ -9870,7 +10545,7 @@
                   <a:schemeClr val="accent6"/>
                 </a:solidFill>
               </a:rPr>
-              <a:t>EN MENOS DE 5 MINUTOS</a:t>
+              <a:t>INCLUIDO SIN COSTO</a:t>
             </a:r>
             <a:endParaRPr lang="en-US" sz="1100" dirty="0"/>
           </a:p>
@@ -9911,26 +10586,1126 @@
                 <a:ea typeface="Arial Black" pitchFamily="34" charset="-122"/>
                 <a:cs typeface="Arial Black" pitchFamily="34" charset="-120"/>
               </a:rPr>
-              <a:t>Cómo cotizar con nosotros</a:t>
+              <a:t>Tus regalos y nuestras recomendaciones</a:t>
             </a:r>
             <a:endParaRPr lang="en-US" sz="3000" dirty="0"/>
           </a:p>
         </p:txBody>
       </p:sp>
-      <p:sp>
-        <p:nvSpPr>
-          <p:cNvPr id="4" name="Paso 1"/>
+      <p:graphicFrame>
+        <p:nvGraphicFramePr>
+          <p:cNvPr id="8" name="Tabla de regalos"/>
+          <p:cNvGraphicFramePr>
+            <a:graphicFrameLocks noGrp="1"/>
+          </p:cNvGraphicFramePr>
+          <p:nvPr>
+            <p:extLst>
+              <p:ext uri="{D42A27DB-BD31-4B8C-83A1-F6EECF244321}">
+                <p14:modId xmlns:p14="http://schemas.microsoft.com/office/powerpoint/2010/main" val="1579011935"/>
+              </p:ext>
+            </p:extLst>
+          </p:nvPr>
+        </p:nvGraphicFramePr>
+        <p:xfrm>
+          <a:off x="548640" y="1508760"/>
+          <a:ext cx="6766560" cy="914400"/>
+        </p:xfrm>
+        <a:graphic>
+          <a:graphicData uri="http://schemas.openxmlformats.org/drawingml/2006/table">
+            <a:tbl>
+              <a:tblPr/>
+              <a:tblGrid>
+                <a:gridCol w="1554480"/>
+                <a:gridCol w="2926080"/>
+                <a:gridCol w="2286000"/>
+              </a:tblGrid>
+              <a:tr h="438912">
+                <a:tc>
+                  <a:txBody>
+                    <a:bodyPr/>
+                    <a:lstStyle/>
+                    <a:p>
+                      <a:pPr indent="0" marL="0">
+                        <a:buNone/>
+                      </a:pPr>
+                      <a:r>
+                        <a:rPr lang="en-US" sz="1300" b="1" dirty="0">
+                          <a:solidFill>
+                            <a:srgbClr val="F0F0FA"/>
+                          </a:solidFill>
+                          <a:latin typeface="Calibri" pitchFamily="34" charset="0"/>
+                          <a:ea typeface="Calibri" pitchFamily="34" charset="-122"/>
+                          <a:cs typeface="Calibri" pitchFamily="34" charset="-120"/>
+                        </a:rPr>
+                        <a:t>Paquete</a:t>
+                      </a:r>
+                      <a:endParaRPr lang="en-US" sz="1300" dirty="0">
+                        <a:latin typeface="Calibri" charset="0"/>
+                        <a:ea typeface="Calibri" charset="0"/>
+                        <a:cs typeface="Calibri" charset="0"/>
+                      </a:endParaRPr>
+                    </a:p>
+                  </a:txBody>
+                  <a:tcPr marL="91440" marR="91440" marT="36576" marB="36576" anchor="ctr">
+                    <a:lnL w="9525" cap="flat" cmpd="sng" algn="ctr">
+                      <a:solidFill>
+                        <a:srgbClr val="252545"/>
+                      </a:solidFill>
+                      <a:prstDash val="solid"/>
+                      <a:round/>
+                      <a:headEnd type="none" w="med" len="med"/>
+                      <a:tailEnd type="none" w="med" len="med"/>
+                    </a:lnL>
+                    <a:lnR w="9525" cap="flat" cmpd="sng" algn="ctr">
+                      <a:solidFill>
+                        <a:srgbClr val="252545"/>
+                      </a:solidFill>
+                      <a:prstDash val="solid"/>
+                      <a:round/>
+                      <a:headEnd type="none" w="med" len="med"/>
+                      <a:tailEnd type="none" w="med" len="med"/>
+                    </a:lnR>
+                    <a:lnT w="9525" cap="flat" cmpd="sng" algn="ctr">
+                      <a:solidFill>
+                        <a:srgbClr val="252545"/>
+                      </a:solidFill>
+                      <a:prstDash val="solid"/>
+                      <a:round/>
+                      <a:headEnd type="none" w="med" len="med"/>
+                      <a:tailEnd type="none" w="med" len="med"/>
+                    </a:lnT>
+                    <a:lnB w="9525" cap="flat" cmpd="sng" algn="ctr">
+                      <a:solidFill>
+                        <a:srgbClr val="252545"/>
+                      </a:solidFill>
+                      <a:prstDash val="solid"/>
+                      <a:round/>
+                      <a:headEnd type="none" w="med" len="med"/>
+                      <a:tailEnd type="none" w="med" len="med"/>
+                    </a:lnB>
+                    <a:solidFill>
+                      <a:srgbClr val="1A3BFF"/>
+                    </a:solidFill>
+                  </a:tcPr>
+                </a:tc>
+                <a:tc>
+                  <a:txBody>
+                    <a:bodyPr/>
+                    <a:lstStyle/>
+                    <a:p>
+                      <a:pPr indent="0" marL="0">
+                        <a:buNone/>
+                      </a:pPr>
+                      <a:r>
+                        <a:rPr lang="en-US" sz="1300" b="1" dirty="0">
+                          <a:solidFill>
+                            <a:srgbClr val="F0F0FA"/>
+                          </a:solidFill>
+                          <a:latin typeface="Calibri" pitchFamily="34" charset="0"/>
+                          <a:ea typeface="Calibri" pitchFamily="34" charset="-122"/>
+                          <a:cs typeface="Calibri" pitchFamily="34" charset="-120"/>
+                        </a:rPr>
+                        <a:t>Con barra de comida</a:t>
+                      </a:r>
+                      <a:endParaRPr lang="en-US" sz="1300" dirty="0">
+                        <a:latin typeface="Calibri" charset="0"/>
+                        <a:ea typeface="Calibri" charset="0"/>
+                        <a:cs typeface="Calibri" charset="0"/>
+                      </a:endParaRPr>
+                    </a:p>
+                  </a:txBody>
+                  <a:tcPr marL="91440" marR="91440" marT="36576" marB="36576" anchor="ctr">
+                    <a:lnL w="9525" cap="flat" cmpd="sng" algn="ctr">
+                      <a:solidFill>
+                        <a:srgbClr val="252545"/>
+                      </a:solidFill>
+                      <a:prstDash val="solid"/>
+                      <a:round/>
+                      <a:headEnd type="none" w="med" len="med"/>
+                      <a:tailEnd type="none" w="med" len="med"/>
+                    </a:lnL>
+                    <a:lnR w="9525" cap="flat" cmpd="sng" algn="ctr">
+                      <a:solidFill>
+                        <a:srgbClr val="252545"/>
+                      </a:solidFill>
+                      <a:prstDash val="solid"/>
+                      <a:round/>
+                      <a:headEnd type="none" w="med" len="med"/>
+                      <a:tailEnd type="none" w="med" len="med"/>
+                    </a:lnR>
+                    <a:lnT w="9525" cap="flat" cmpd="sng" algn="ctr">
+                      <a:solidFill>
+                        <a:srgbClr val="252545"/>
+                      </a:solidFill>
+                      <a:prstDash val="solid"/>
+                      <a:round/>
+                      <a:headEnd type="none" w="med" len="med"/>
+                      <a:tailEnd type="none" w="med" len="med"/>
+                    </a:lnT>
+                    <a:lnB w="9525" cap="flat" cmpd="sng" algn="ctr">
+                      <a:solidFill>
+                        <a:srgbClr val="252545"/>
+                      </a:solidFill>
+                      <a:prstDash val="solid"/>
+                      <a:round/>
+                      <a:headEnd type="none" w="med" len="med"/>
+                      <a:tailEnd type="none" w="med" len="med"/>
+                    </a:lnB>
+                    <a:solidFill>
+                      <a:srgbClr val="1A3BFF"/>
+                    </a:solidFill>
+                  </a:tcPr>
+                </a:tc>
+                <a:tc>
+                  <a:txBody>
+                    <a:bodyPr/>
+                    <a:lstStyle/>
+                    <a:p>
+                      <a:pPr indent="0" marL="0">
+                        <a:buNone/>
+                      </a:pPr>
+                      <a:r>
+                        <a:rPr lang="en-US" sz="1300" b="1" dirty="0">
+                          <a:solidFill>
+                            <a:srgbClr val="F0F0FA"/>
+                          </a:solidFill>
+                          <a:latin typeface="Calibri" pitchFamily="34" charset="0"/>
+                          <a:ea typeface="Calibri" pitchFamily="34" charset="-122"/>
+                          <a:cs typeface="Calibri" pitchFamily="34" charset="-120"/>
+                        </a:rPr>
+                        <a:t>Con cantaritos</a:t>
+                      </a:r>
+                      <a:endParaRPr lang="en-US" sz="1300" dirty="0">
+                        <a:latin typeface="Calibri" charset="0"/>
+                        <a:ea typeface="Calibri" charset="0"/>
+                        <a:cs typeface="Calibri" charset="0"/>
+                      </a:endParaRPr>
+                    </a:p>
+                  </a:txBody>
+                  <a:tcPr marL="91440" marR="91440" marT="36576" marB="36576" anchor="ctr">
+                    <a:lnL w="9525" cap="flat" cmpd="sng" algn="ctr">
+                      <a:solidFill>
+                        <a:srgbClr val="252545"/>
+                      </a:solidFill>
+                      <a:prstDash val="solid"/>
+                      <a:round/>
+                      <a:headEnd type="none" w="med" len="med"/>
+                      <a:tailEnd type="none" w="med" len="med"/>
+                    </a:lnL>
+                    <a:lnR w="9525" cap="flat" cmpd="sng" algn="ctr">
+                      <a:solidFill>
+                        <a:srgbClr val="252545"/>
+                      </a:solidFill>
+                      <a:prstDash val="solid"/>
+                      <a:round/>
+                      <a:headEnd type="none" w="med" len="med"/>
+                      <a:tailEnd type="none" w="med" len="med"/>
+                    </a:lnR>
+                    <a:lnT w="9525" cap="flat" cmpd="sng" algn="ctr">
+                      <a:solidFill>
+                        <a:srgbClr val="252545"/>
+                      </a:solidFill>
+                      <a:prstDash val="solid"/>
+                      <a:round/>
+                      <a:headEnd type="none" w="med" len="med"/>
+                      <a:tailEnd type="none" w="med" len="med"/>
+                    </a:lnT>
+                    <a:lnB w="9525" cap="flat" cmpd="sng" algn="ctr">
+                      <a:solidFill>
+                        <a:srgbClr val="252545"/>
+                      </a:solidFill>
+                      <a:prstDash val="solid"/>
+                      <a:round/>
+                      <a:headEnd type="none" w="med" len="med"/>
+                      <a:tailEnd type="none" w="med" len="med"/>
+                    </a:lnB>
+                    <a:solidFill>
+                      <a:srgbClr val="1A3BFF"/>
+                    </a:solidFill>
+                  </a:tcPr>
+                </a:tc>
+              </a:tr>
+              <a:tr h="502920">
+                <a:tc>
+                  <a:txBody>
+                    <a:bodyPr/>
+                    <a:lstStyle/>
+                    <a:p>
+                      <a:pPr indent="0" marL="0">
+                        <a:buNone/>
+                      </a:pPr>
+                      <a:r>
+                        <a:rPr lang="en-US" sz="1250" b="1" dirty="0">
+                          <a:solidFill>
+                            <a:srgbClr val="F0F0FA"/>
+                          </a:solidFill>
+                          <a:latin typeface="Calibri" pitchFamily="34" charset="0"/>
+                          <a:ea typeface="Calibri" pitchFamily="34" charset="-122"/>
+                          <a:cs typeface="Calibri" pitchFamily="34" charset="-120"/>
+                        </a:rPr>
+                        <a:t>Nebula Mix</a:t>
+                      </a:r>
+                      <a:endParaRPr lang="en-US" sz="1250" dirty="0">
+                        <a:latin typeface="Calibri" charset="0"/>
+                        <a:ea typeface="Calibri" charset="0"/>
+                        <a:cs typeface="Calibri" charset="0"/>
+                      </a:endParaRPr>
+                    </a:p>
+                  </a:txBody>
+                  <a:tcPr marL="91440" marR="91440" marT="36576" marB="36576" anchor="ctr">
+                    <a:lnL w="9525" cap="flat" cmpd="sng" algn="ctr">
+                      <a:solidFill>
+                        <a:srgbClr val="252545"/>
+                      </a:solidFill>
+                      <a:prstDash val="solid"/>
+                      <a:round/>
+                      <a:headEnd type="none" w="med" len="med"/>
+                      <a:tailEnd type="none" w="med" len="med"/>
+                    </a:lnL>
+                    <a:lnR w="9525" cap="flat" cmpd="sng" algn="ctr">
+                      <a:solidFill>
+                        <a:srgbClr val="252545"/>
+                      </a:solidFill>
+                      <a:prstDash val="solid"/>
+                      <a:round/>
+                      <a:headEnd type="none" w="med" len="med"/>
+                      <a:tailEnd type="none" w="med" len="med"/>
+                    </a:lnR>
+                    <a:lnT w="9525" cap="flat" cmpd="sng" algn="ctr">
+                      <a:solidFill>
+                        <a:srgbClr val="252545"/>
+                      </a:solidFill>
+                      <a:prstDash val="solid"/>
+                      <a:round/>
+                      <a:headEnd type="none" w="med" len="med"/>
+                      <a:tailEnd type="none" w="med" len="med"/>
+                    </a:lnT>
+                    <a:lnB w="9525" cap="flat" cmpd="sng" algn="ctr">
+                      <a:solidFill>
+                        <a:srgbClr val="252545"/>
+                      </a:solidFill>
+                      <a:prstDash val="solid"/>
+                      <a:round/>
+                      <a:headEnd type="none" w="med" len="med"/>
+                      <a:tailEnd type="none" w="med" len="med"/>
+                    </a:lnB>
+                    <a:solidFill>
+                      <a:srgbClr val="0C0C1C"/>
+                    </a:solidFill>
+                  </a:tcPr>
+                </a:tc>
+                <a:tc>
+                  <a:txBody>
+                    <a:bodyPr/>
+                    <a:lstStyle/>
+                    <a:p>
+                      <a:pPr indent="0" marL="0">
+                        <a:buNone/>
+                      </a:pPr>
+                      <a:r>
+                        <a:rPr lang="en-US" sz="1250" dirty="0">
+                          <a:solidFill>
+                            <a:srgbClr val="F0F0FA"/>
+                          </a:solidFill>
+                          <a:latin typeface="Calibri" pitchFamily="34" charset="0"/>
+                          <a:ea typeface="Calibri" pitchFamily="34" charset="-122"/>
+                          <a:cs typeface="Calibri" pitchFamily="34" charset="-120"/>
+                        </a:rPr>
+                        <a:t>1 vitrolero 20L</a:t>
+                      </a:r>
+                      <a:endParaRPr lang="en-US" sz="1250" dirty="0">
+                        <a:latin typeface="Calibri" charset="0"/>
+                        <a:ea typeface="Calibri" charset="0"/>
+                        <a:cs typeface="Calibri" charset="0"/>
+                      </a:endParaRPr>
+                    </a:p>
+                  </a:txBody>
+                  <a:tcPr marL="91440" marR="91440" marT="36576" marB="36576" anchor="ctr">
+                    <a:lnL w="9525" cap="flat" cmpd="sng" algn="ctr">
+                      <a:solidFill>
+                        <a:srgbClr val="252545"/>
+                      </a:solidFill>
+                      <a:prstDash val="solid"/>
+                      <a:round/>
+                      <a:headEnd type="none" w="med" len="med"/>
+                      <a:tailEnd type="none" w="med" len="med"/>
+                    </a:lnL>
+                    <a:lnR w="9525" cap="flat" cmpd="sng" algn="ctr">
+                      <a:solidFill>
+                        <a:srgbClr val="252545"/>
+                      </a:solidFill>
+                      <a:prstDash val="solid"/>
+                      <a:round/>
+                      <a:headEnd type="none" w="med" len="med"/>
+                      <a:tailEnd type="none" w="med" len="med"/>
+                    </a:lnR>
+                    <a:lnT w="9525" cap="flat" cmpd="sng" algn="ctr">
+                      <a:solidFill>
+                        <a:srgbClr val="252545"/>
+                      </a:solidFill>
+                      <a:prstDash val="solid"/>
+                      <a:round/>
+                      <a:headEnd type="none" w="med" len="med"/>
+                      <a:tailEnd type="none" w="med" len="med"/>
+                    </a:lnT>
+                    <a:lnB w="9525" cap="flat" cmpd="sng" algn="ctr">
+                      <a:solidFill>
+                        <a:srgbClr val="252545"/>
+                      </a:solidFill>
+                      <a:prstDash val="solid"/>
+                      <a:round/>
+                      <a:headEnd type="none" w="med" len="med"/>
+                      <a:tailEnd type="none" w="med" len="med"/>
+                    </a:lnB>
+                    <a:solidFill>
+                      <a:srgbClr val="0C0C1C"/>
+                    </a:solidFill>
+                  </a:tcPr>
+                </a:tc>
+                <a:tc>
+                  <a:txBody>
+                    <a:bodyPr/>
+                    <a:lstStyle/>
+                    <a:p>
+                      <a:pPr indent="0" marL="0">
+                        <a:buNone/>
+                      </a:pPr>
+                      <a:r>
+                        <a:rPr lang="en-US" sz="1250" dirty="0">
+                          <a:solidFill>
+                            <a:srgbClr val="F0F0FA"/>
+                          </a:solidFill>
+                          <a:latin typeface="Calibri" pitchFamily="34" charset="0"/>
+                          <a:ea typeface="Calibri" pitchFamily="34" charset="-122"/>
+                          <a:cs typeface="Calibri" pitchFamily="34" charset="-120"/>
+                        </a:rPr>
+                        <a:t>Sin botella de cortesía</a:t>
+                      </a:r>
+                      <a:endParaRPr lang="en-US" sz="1250" dirty="0">
+                        <a:latin typeface="Calibri" charset="0"/>
+                        <a:ea typeface="Calibri" charset="0"/>
+                        <a:cs typeface="Calibri" charset="0"/>
+                      </a:endParaRPr>
+                    </a:p>
+                  </a:txBody>
+                  <a:tcPr marL="91440" marR="91440" marT="36576" marB="36576" anchor="ctr">
+                    <a:lnL w="9525" cap="flat" cmpd="sng" algn="ctr">
+                      <a:solidFill>
+                        <a:srgbClr val="252545"/>
+                      </a:solidFill>
+                      <a:prstDash val="solid"/>
+                      <a:round/>
+                      <a:headEnd type="none" w="med" len="med"/>
+                      <a:tailEnd type="none" w="med" len="med"/>
+                    </a:lnL>
+                    <a:lnR w="9525" cap="flat" cmpd="sng" algn="ctr">
+                      <a:solidFill>
+                        <a:srgbClr val="252545"/>
+                      </a:solidFill>
+                      <a:prstDash val="solid"/>
+                      <a:round/>
+                      <a:headEnd type="none" w="med" len="med"/>
+                      <a:tailEnd type="none" w="med" len="med"/>
+                    </a:lnR>
+                    <a:lnT w="9525" cap="flat" cmpd="sng" algn="ctr">
+                      <a:solidFill>
+                        <a:srgbClr val="252545"/>
+                      </a:solidFill>
+                      <a:prstDash val="solid"/>
+                      <a:round/>
+                      <a:headEnd type="none" w="med" len="med"/>
+                      <a:tailEnd type="none" w="med" len="med"/>
+                    </a:lnT>
+                    <a:lnB w="9525" cap="flat" cmpd="sng" algn="ctr">
+                      <a:solidFill>
+                        <a:srgbClr val="252545"/>
+                      </a:solidFill>
+                      <a:prstDash val="solid"/>
+                      <a:round/>
+                      <a:headEnd type="none" w="med" len="med"/>
+                      <a:tailEnd type="none" w="med" len="med"/>
+                    </a:lnB>
+                    <a:solidFill>
+                      <a:srgbClr val="0C0C1C"/>
+                    </a:solidFill>
+                  </a:tcPr>
+                </a:tc>
+              </a:tr>
+              <a:tr h="502920">
+                <a:tc>
+                  <a:txBody>
+                    <a:bodyPr/>
+                    <a:lstStyle/>
+                    <a:p>
+                      <a:pPr indent="0" marL="0">
+                        <a:buNone/>
+                      </a:pPr>
+                      <a:r>
+                        <a:rPr lang="en-US" sz="1250" b="1" dirty="0">
+                          <a:solidFill>
+                            <a:srgbClr val="F0F0FA"/>
+                          </a:solidFill>
+                          <a:latin typeface="Calibri" pitchFamily="34" charset="0"/>
+                          <a:ea typeface="Calibri" pitchFamily="34" charset="-122"/>
+                          <a:cs typeface="Calibri" pitchFamily="34" charset="-120"/>
+                        </a:rPr>
+                        <a:t>Cosmos Pack</a:t>
+                      </a:r>
+                      <a:endParaRPr lang="en-US" sz="1250" dirty="0">
+                        <a:latin typeface="Calibri" charset="0"/>
+                        <a:ea typeface="Calibri" charset="0"/>
+                        <a:cs typeface="Calibri" charset="0"/>
+                      </a:endParaRPr>
+                    </a:p>
+                  </a:txBody>
+                  <a:tcPr marL="91440" marR="91440" marT="36576" marB="36576" anchor="ctr">
+                    <a:lnL w="9525" cap="flat" cmpd="sng" algn="ctr">
+                      <a:solidFill>
+                        <a:srgbClr val="252545"/>
+                      </a:solidFill>
+                      <a:prstDash val="solid"/>
+                      <a:round/>
+                      <a:headEnd type="none" w="med" len="med"/>
+                      <a:tailEnd type="none" w="med" len="med"/>
+                    </a:lnL>
+                    <a:lnR w="9525" cap="flat" cmpd="sng" algn="ctr">
+                      <a:solidFill>
+                        <a:srgbClr val="252545"/>
+                      </a:solidFill>
+                      <a:prstDash val="solid"/>
+                      <a:round/>
+                      <a:headEnd type="none" w="med" len="med"/>
+                      <a:tailEnd type="none" w="med" len="med"/>
+                    </a:lnR>
+                    <a:lnT w="9525" cap="flat" cmpd="sng" algn="ctr">
+                      <a:solidFill>
+                        <a:srgbClr val="252545"/>
+                      </a:solidFill>
+                      <a:prstDash val="solid"/>
+                      <a:round/>
+                      <a:headEnd type="none" w="med" len="med"/>
+                      <a:tailEnd type="none" w="med" len="med"/>
+                    </a:lnT>
+                    <a:lnB w="9525" cap="flat" cmpd="sng" algn="ctr">
+                      <a:solidFill>
+                        <a:srgbClr val="252545"/>
+                      </a:solidFill>
+                      <a:prstDash val="solid"/>
+                      <a:round/>
+                      <a:headEnd type="none" w="med" len="med"/>
+                      <a:tailEnd type="none" w="med" len="med"/>
+                    </a:lnB>
+                    <a:solidFill>
+                      <a:srgbClr val="12122A"/>
+                    </a:solidFill>
+                  </a:tcPr>
+                </a:tc>
+                <a:tc>
+                  <a:txBody>
+                    <a:bodyPr/>
+                    <a:lstStyle/>
+                    <a:p>
+                      <a:pPr indent="0" marL="0">
+                        <a:buNone/>
+                      </a:pPr>
+                      <a:r>
+                        <a:rPr lang="en-US" sz="1250" dirty="0">
+                          <a:solidFill>
+                            <a:srgbClr val="F0F0FA"/>
+                          </a:solidFill>
+                          <a:latin typeface="Calibri" pitchFamily="34" charset="0"/>
+                          <a:ea typeface="Calibri" pitchFamily="34" charset="-122"/>
+                          <a:cs typeface="Calibri" pitchFamily="34" charset="-120"/>
+                        </a:rPr>
+                        <a:t>2 vitroleros 20L</a:t>
+                      </a:r>
+                      <a:endParaRPr lang="en-US" sz="1250" dirty="0">
+                        <a:latin typeface="Calibri" charset="0"/>
+                        <a:ea typeface="Calibri" charset="0"/>
+                        <a:cs typeface="Calibri" charset="0"/>
+                      </a:endParaRPr>
+                    </a:p>
+                  </a:txBody>
+                  <a:tcPr marL="91440" marR="91440" marT="36576" marB="36576" anchor="ctr">
+                    <a:lnL w="9525" cap="flat" cmpd="sng" algn="ctr">
+                      <a:solidFill>
+                        <a:srgbClr val="252545"/>
+                      </a:solidFill>
+                      <a:prstDash val="solid"/>
+                      <a:round/>
+                      <a:headEnd type="none" w="med" len="med"/>
+                      <a:tailEnd type="none" w="med" len="med"/>
+                    </a:lnL>
+                    <a:lnR w="9525" cap="flat" cmpd="sng" algn="ctr">
+                      <a:solidFill>
+                        <a:srgbClr val="252545"/>
+                      </a:solidFill>
+                      <a:prstDash val="solid"/>
+                      <a:round/>
+                      <a:headEnd type="none" w="med" len="med"/>
+                      <a:tailEnd type="none" w="med" len="med"/>
+                    </a:lnR>
+                    <a:lnT w="9525" cap="flat" cmpd="sng" algn="ctr">
+                      <a:solidFill>
+                        <a:srgbClr val="252545"/>
+                      </a:solidFill>
+                      <a:prstDash val="solid"/>
+                      <a:round/>
+                      <a:headEnd type="none" w="med" len="med"/>
+                      <a:tailEnd type="none" w="med" len="med"/>
+                    </a:lnT>
+                    <a:lnB w="9525" cap="flat" cmpd="sng" algn="ctr">
+                      <a:solidFill>
+                        <a:srgbClr val="252545"/>
+                      </a:solidFill>
+                      <a:prstDash val="solid"/>
+                      <a:round/>
+                      <a:headEnd type="none" w="med" len="med"/>
+                      <a:tailEnd type="none" w="med" len="med"/>
+                    </a:lnB>
+                    <a:solidFill>
+                      <a:srgbClr val="12122A"/>
+                    </a:solidFill>
+                  </a:tcPr>
+                </a:tc>
+                <a:tc>
+                  <a:txBody>
+                    <a:bodyPr/>
+                    <a:lstStyle/>
+                    <a:p>
+                      <a:pPr indent="0" marL="0">
+                        <a:buNone/>
+                      </a:pPr>
+                      <a:r>
+                        <a:rPr lang="en-US" sz="1250" dirty="0">
+                          <a:solidFill>
+                            <a:srgbClr val="F0F0FA"/>
+                          </a:solidFill>
+                          <a:latin typeface="Calibri" pitchFamily="34" charset="0"/>
+                          <a:ea typeface="Calibri" pitchFamily="34" charset="-122"/>
+                          <a:cs typeface="Calibri" pitchFamily="34" charset="-120"/>
+                        </a:rPr>
+                        <a:t>1 botella tradicional</a:t>
+                      </a:r>
+                      <a:endParaRPr lang="en-US" sz="1250" dirty="0">
+                        <a:latin typeface="Calibri" charset="0"/>
+                        <a:ea typeface="Calibri" charset="0"/>
+                        <a:cs typeface="Calibri" charset="0"/>
+                      </a:endParaRPr>
+                    </a:p>
+                  </a:txBody>
+                  <a:tcPr marL="91440" marR="91440" marT="36576" marB="36576" anchor="ctr">
+                    <a:lnL w="9525" cap="flat" cmpd="sng" algn="ctr">
+                      <a:solidFill>
+                        <a:srgbClr val="252545"/>
+                      </a:solidFill>
+                      <a:prstDash val="solid"/>
+                      <a:round/>
+                      <a:headEnd type="none" w="med" len="med"/>
+                      <a:tailEnd type="none" w="med" len="med"/>
+                    </a:lnL>
+                    <a:lnR w="9525" cap="flat" cmpd="sng" algn="ctr">
+                      <a:solidFill>
+                        <a:srgbClr val="252545"/>
+                      </a:solidFill>
+                      <a:prstDash val="solid"/>
+                      <a:round/>
+                      <a:headEnd type="none" w="med" len="med"/>
+                      <a:tailEnd type="none" w="med" len="med"/>
+                    </a:lnR>
+                    <a:lnT w="9525" cap="flat" cmpd="sng" algn="ctr">
+                      <a:solidFill>
+                        <a:srgbClr val="252545"/>
+                      </a:solidFill>
+                      <a:prstDash val="solid"/>
+                      <a:round/>
+                      <a:headEnd type="none" w="med" len="med"/>
+                      <a:tailEnd type="none" w="med" len="med"/>
+                    </a:lnT>
+                    <a:lnB w="9525" cap="flat" cmpd="sng" algn="ctr">
+                      <a:solidFill>
+                        <a:srgbClr val="252545"/>
+                      </a:solidFill>
+                      <a:prstDash val="solid"/>
+                      <a:round/>
+                      <a:headEnd type="none" w="med" len="med"/>
+                      <a:tailEnd type="none" w="med" len="med"/>
+                    </a:lnB>
+                    <a:solidFill>
+                      <a:srgbClr val="12122A"/>
+                    </a:solidFill>
+                  </a:tcPr>
+                </a:tc>
+              </a:tr>
+              <a:tr h="502920">
+                <a:tc>
+                  <a:txBody>
+                    <a:bodyPr/>
+                    <a:lstStyle/>
+                    <a:p>
+                      <a:pPr indent="0" marL="0">
+                        <a:buNone/>
+                      </a:pPr>
+                      <a:r>
+                        <a:rPr lang="en-US" sz="1250" b="1" dirty="0">
+                          <a:solidFill>
+                            <a:srgbClr val="F0F0FA"/>
+                          </a:solidFill>
+                          <a:latin typeface="Calibri" pitchFamily="34" charset="0"/>
+                          <a:ea typeface="Calibri" pitchFamily="34" charset="-122"/>
+                          <a:cs typeface="Calibri" pitchFamily="34" charset="-120"/>
+                        </a:rPr>
+                        <a:t>After Moon</a:t>
+                      </a:r>
+                      <a:endParaRPr lang="en-US" sz="1250" dirty="0">
+                        <a:latin typeface="Calibri" charset="0"/>
+                        <a:ea typeface="Calibri" charset="0"/>
+                        <a:cs typeface="Calibri" charset="0"/>
+                      </a:endParaRPr>
+                    </a:p>
+                  </a:txBody>
+                  <a:tcPr marL="91440" marR="91440" marT="36576" marB="36576" anchor="ctr">
+                    <a:lnL w="9525" cap="flat" cmpd="sng" algn="ctr">
+                      <a:solidFill>
+                        <a:srgbClr val="252545"/>
+                      </a:solidFill>
+                      <a:prstDash val="solid"/>
+                      <a:round/>
+                      <a:headEnd type="none" w="med" len="med"/>
+                      <a:tailEnd type="none" w="med" len="med"/>
+                    </a:lnL>
+                    <a:lnR w="9525" cap="flat" cmpd="sng" algn="ctr">
+                      <a:solidFill>
+                        <a:srgbClr val="252545"/>
+                      </a:solidFill>
+                      <a:prstDash val="solid"/>
+                      <a:round/>
+                      <a:headEnd type="none" w="med" len="med"/>
+                      <a:tailEnd type="none" w="med" len="med"/>
+                    </a:lnR>
+                    <a:lnT w="9525" cap="flat" cmpd="sng" algn="ctr">
+                      <a:solidFill>
+                        <a:srgbClr val="252545"/>
+                      </a:solidFill>
+                      <a:prstDash val="solid"/>
+                      <a:round/>
+                      <a:headEnd type="none" w="med" len="med"/>
+                      <a:tailEnd type="none" w="med" len="med"/>
+                    </a:lnT>
+                    <a:lnB w="9525" cap="flat" cmpd="sng" algn="ctr">
+                      <a:solidFill>
+                        <a:srgbClr val="252545"/>
+                      </a:solidFill>
+                      <a:prstDash val="solid"/>
+                      <a:round/>
+                      <a:headEnd type="none" w="med" len="med"/>
+                      <a:tailEnd type="none" w="med" len="med"/>
+                    </a:lnB>
+                    <a:solidFill>
+                      <a:srgbClr val="0C0C1C"/>
+                    </a:solidFill>
+                  </a:tcPr>
+                </a:tc>
+                <a:tc>
+                  <a:txBody>
+                    <a:bodyPr/>
+                    <a:lstStyle/>
+                    <a:p>
+                      <a:pPr indent="0" marL="0">
+                        <a:buNone/>
+                      </a:pPr>
+                      <a:r>
+                        <a:rPr lang="en-US" sz="1250" dirty="0">
+                          <a:solidFill>
+                            <a:srgbClr val="F0F0FA"/>
+                          </a:solidFill>
+                          <a:latin typeface="Calibri" pitchFamily="34" charset="0"/>
+                          <a:ea typeface="Calibri" pitchFamily="34" charset="-122"/>
+                          <a:cs typeface="Calibri" pitchFamily="34" charset="-120"/>
+                        </a:rPr>
+                        <a:t>2 vitroleros 20L</a:t>
+                      </a:r>
+                      <a:endParaRPr lang="en-US" sz="1250" dirty="0">
+                        <a:latin typeface="Calibri" charset="0"/>
+                        <a:ea typeface="Calibri" charset="0"/>
+                        <a:cs typeface="Calibri" charset="0"/>
+                      </a:endParaRPr>
+                    </a:p>
+                  </a:txBody>
+                  <a:tcPr marL="91440" marR="91440" marT="36576" marB="36576" anchor="ctr">
+                    <a:lnL w="9525" cap="flat" cmpd="sng" algn="ctr">
+                      <a:solidFill>
+                        <a:srgbClr val="252545"/>
+                      </a:solidFill>
+                      <a:prstDash val="solid"/>
+                      <a:round/>
+                      <a:headEnd type="none" w="med" len="med"/>
+                      <a:tailEnd type="none" w="med" len="med"/>
+                    </a:lnL>
+                    <a:lnR w="9525" cap="flat" cmpd="sng" algn="ctr">
+                      <a:solidFill>
+                        <a:srgbClr val="252545"/>
+                      </a:solidFill>
+                      <a:prstDash val="solid"/>
+                      <a:round/>
+                      <a:headEnd type="none" w="med" len="med"/>
+                      <a:tailEnd type="none" w="med" len="med"/>
+                    </a:lnR>
+                    <a:lnT w="9525" cap="flat" cmpd="sng" algn="ctr">
+                      <a:solidFill>
+                        <a:srgbClr val="252545"/>
+                      </a:solidFill>
+                      <a:prstDash val="solid"/>
+                      <a:round/>
+                      <a:headEnd type="none" w="med" len="med"/>
+                      <a:tailEnd type="none" w="med" len="med"/>
+                    </a:lnT>
+                    <a:lnB w="9525" cap="flat" cmpd="sng" algn="ctr">
+                      <a:solidFill>
+                        <a:srgbClr val="252545"/>
+                      </a:solidFill>
+                      <a:prstDash val="solid"/>
+                      <a:round/>
+                      <a:headEnd type="none" w="med" len="med"/>
+                      <a:tailEnd type="none" w="med" len="med"/>
+                    </a:lnB>
+                    <a:solidFill>
+                      <a:srgbClr val="0C0C1C"/>
+                    </a:solidFill>
+                  </a:tcPr>
+                </a:tc>
+                <a:tc>
+                  <a:txBody>
+                    <a:bodyPr/>
+                    <a:lstStyle/>
+                    <a:p>
+                      <a:pPr indent="0" marL="0">
+                        <a:buNone/>
+                      </a:pPr>
+                      <a:r>
+                        <a:rPr lang="en-US" sz="1250" dirty="0">
+                          <a:solidFill>
+                            <a:srgbClr val="F0F0FA"/>
+                          </a:solidFill>
+                          <a:latin typeface="Calibri" pitchFamily="34" charset="0"/>
+                          <a:ea typeface="Calibri" pitchFamily="34" charset="-122"/>
+                          <a:cs typeface="Calibri" pitchFamily="34" charset="-120"/>
+                        </a:rPr>
+                        <a:t>2 botellas tradicionales</a:t>
+                      </a:r>
+                      <a:endParaRPr lang="en-US" sz="1250" dirty="0">
+                        <a:latin typeface="Calibri" charset="0"/>
+                        <a:ea typeface="Calibri" charset="0"/>
+                        <a:cs typeface="Calibri" charset="0"/>
+                      </a:endParaRPr>
+                    </a:p>
+                  </a:txBody>
+                  <a:tcPr marL="91440" marR="91440" marT="36576" marB="36576" anchor="ctr">
+                    <a:lnL w="9525" cap="flat" cmpd="sng" algn="ctr">
+                      <a:solidFill>
+                        <a:srgbClr val="252545"/>
+                      </a:solidFill>
+                      <a:prstDash val="solid"/>
+                      <a:round/>
+                      <a:headEnd type="none" w="med" len="med"/>
+                      <a:tailEnd type="none" w="med" len="med"/>
+                    </a:lnL>
+                    <a:lnR w="9525" cap="flat" cmpd="sng" algn="ctr">
+                      <a:solidFill>
+                        <a:srgbClr val="252545"/>
+                      </a:solidFill>
+                      <a:prstDash val="solid"/>
+                      <a:round/>
+                      <a:headEnd type="none" w="med" len="med"/>
+                      <a:tailEnd type="none" w="med" len="med"/>
+                    </a:lnR>
+                    <a:lnT w="9525" cap="flat" cmpd="sng" algn="ctr">
+                      <a:solidFill>
+                        <a:srgbClr val="252545"/>
+                      </a:solidFill>
+                      <a:prstDash val="solid"/>
+                      <a:round/>
+                      <a:headEnd type="none" w="med" len="med"/>
+                      <a:tailEnd type="none" w="med" len="med"/>
+                    </a:lnT>
+                    <a:lnB w="9525" cap="flat" cmpd="sng" algn="ctr">
+                      <a:solidFill>
+                        <a:srgbClr val="252545"/>
+                      </a:solidFill>
+                      <a:prstDash val="solid"/>
+                      <a:round/>
+                      <a:headEnd type="none" w="med" len="med"/>
+                      <a:tailEnd type="none" w="med" len="med"/>
+                    </a:lnB>
+                    <a:solidFill>
+                      <a:srgbClr val="0C0C1C"/>
+                    </a:solidFill>
+                  </a:tcPr>
+                </a:tc>
+              </a:tr>
+              <a:tr h="777240">
+                <a:tc>
+                  <a:txBody>
+                    <a:bodyPr/>
+                    <a:lstStyle/>
+                    <a:p>
+                      <a:pPr indent="0" marL="0">
+                        <a:buNone/>
+                      </a:pPr>
+                      <a:r>
+                        <a:rPr lang="en-US" sz="1250" b="1" dirty="0">
+                          <a:solidFill>
+                            <a:srgbClr val="C8A96E"/>
+                          </a:solidFill>
+                          <a:latin typeface="Calibri" pitchFamily="34" charset="0"/>
+                          <a:ea typeface="Calibri" pitchFamily="34" charset="-122"/>
+                          <a:cs typeface="Calibri" pitchFamily="34" charset="-120"/>
+                        </a:rPr>
+                        <a:t>Moonlight</a:t>
+                      </a:r>
+                      <a:endParaRPr lang="en-US" sz="1250" dirty="0">
+                        <a:latin typeface="Calibri" charset="0"/>
+                        <a:ea typeface="Calibri" charset="0"/>
+                        <a:cs typeface="Calibri" charset="0"/>
+                      </a:endParaRPr>
+                    </a:p>
+                  </a:txBody>
+                  <a:tcPr marL="91440" marR="91440" marT="36576" marB="36576" anchor="ctr">
+                    <a:lnL w="9525" cap="flat" cmpd="sng" algn="ctr">
+                      <a:solidFill>
+                        <a:srgbClr val="252545"/>
+                      </a:solidFill>
+                      <a:prstDash val="solid"/>
+                      <a:round/>
+                      <a:headEnd type="none" w="med" len="med"/>
+                      <a:tailEnd type="none" w="med" len="med"/>
+                    </a:lnL>
+                    <a:lnR w="9525" cap="flat" cmpd="sng" algn="ctr">
+                      <a:solidFill>
+                        <a:srgbClr val="252545"/>
+                      </a:solidFill>
+                      <a:prstDash val="solid"/>
+                      <a:round/>
+                      <a:headEnd type="none" w="med" len="med"/>
+                      <a:tailEnd type="none" w="med" len="med"/>
+                    </a:lnR>
+                    <a:lnT w="9525" cap="flat" cmpd="sng" algn="ctr">
+                      <a:solidFill>
+                        <a:srgbClr val="252545"/>
+                      </a:solidFill>
+                      <a:prstDash val="solid"/>
+                      <a:round/>
+                      <a:headEnd type="none" w="med" len="med"/>
+                      <a:tailEnd type="none" w="med" len="med"/>
+                    </a:lnT>
+                    <a:lnB w="9525" cap="flat" cmpd="sng" algn="ctr">
+                      <a:solidFill>
+                        <a:srgbClr val="252545"/>
+                      </a:solidFill>
+                      <a:prstDash val="solid"/>
+                      <a:round/>
+                      <a:headEnd type="none" w="med" len="med"/>
+                      <a:tailEnd type="none" w="med" len="med"/>
+                    </a:lnB>
+                    <a:solidFill>
+                      <a:srgbClr val="12122A"/>
+                    </a:solidFill>
+                  </a:tcPr>
+                </a:tc>
+                <a:tc>
+                  <a:txBody>
+                    <a:bodyPr/>
+                    <a:lstStyle/>
+                    <a:p>
+                      <a:pPr indent="0" marL="0">
+                        <a:buNone/>
+                      </a:pPr>
+                      <a:r>
+                        <a:rPr lang="en-US" sz="1250" dirty="0">
+                          <a:solidFill>
+                            <a:srgbClr val="C8A96E"/>
+                          </a:solidFill>
+                          <a:latin typeface="Calibri" pitchFamily="34" charset="0"/>
+                          <a:ea typeface="Calibri" pitchFamily="34" charset="-122"/>
+                          <a:cs typeface="Calibri" pitchFamily="34" charset="-120"/>
+                        </a:rPr>
+                        <a:t>3 vitroleros 20L o café (chilaquiles) · dulces + 3 vitroleros 15L</a:t>
+                      </a:r>
+                      <a:endParaRPr lang="en-US" sz="1250" dirty="0">
+                        <a:latin typeface="Calibri" charset="0"/>
+                        <a:ea typeface="Calibri" charset="0"/>
+                        <a:cs typeface="Calibri" charset="0"/>
+                      </a:endParaRPr>
+                    </a:p>
+                  </a:txBody>
+                  <a:tcPr marL="91440" marR="91440" marT="36576" marB="36576" anchor="ctr">
+                    <a:lnL w="9525" cap="flat" cmpd="sng" algn="ctr">
+                      <a:solidFill>
+                        <a:srgbClr val="252545"/>
+                      </a:solidFill>
+                      <a:prstDash val="solid"/>
+                      <a:round/>
+                      <a:headEnd type="none" w="med" len="med"/>
+                      <a:tailEnd type="none" w="med" len="med"/>
+                    </a:lnL>
+                    <a:lnR w="9525" cap="flat" cmpd="sng" algn="ctr">
+                      <a:solidFill>
+                        <a:srgbClr val="252545"/>
+                      </a:solidFill>
+                      <a:prstDash val="solid"/>
+                      <a:round/>
+                      <a:headEnd type="none" w="med" len="med"/>
+                      <a:tailEnd type="none" w="med" len="med"/>
+                    </a:lnR>
+                    <a:lnT w="9525" cap="flat" cmpd="sng" algn="ctr">
+                      <a:solidFill>
+                        <a:srgbClr val="252545"/>
+                      </a:solidFill>
+                      <a:prstDash val="solid"/>
+                      <a:round/>
+                      <a:headEnd type="none" w="med" len="med"/>
+                      <a:tailEnd type="none" w="med" len="med"/>
+                    </a:lnT>
+                    <a:lnB w="9525" cap="flat" cmpd="sng" algn="ctr">
+                      <a:solidFill>
+                        <a:srgbClr val="252545"/>
+                      </a:solidFill>
+                      <a:prstDash val="solid"/>
+                      <a:round/>
+                      <a:headEnd type="none" w="med" len="med"/>
+                      <a:tailEnd type="none" w="med" len="med"/>
+                    </a:lnB>
+                    <a:solidFill>
+                      <a:srgbClr val="12122A"/>
+                    </a:solidFill>
+                  </a:tcPr>
+                </a:tc>
+                <a:tc>
+                  <a:txBody>
+                    <a:bodyPr/>
+                    <a:lstStyle/>
+                    <a:p>
+                      <a:pPr indent="0" marL="0">
+                        <a:buNone/>
+                      </a:pPr>
+                      <a:r>
+                        <a:rPr lang="en-US" sz="1250" dirty="0">
+                          <a:solidFill>
+                            <a:srgbClr val="C8A96E"/>
+                          </a:solidFill>
+                          <a:latin typeface="Calibri" pitchFamily="34" charset="0"/>
+                          <a:ea typeface="Calibri" pitchFamily="34" charset="-122"/>
+                          <a:cs typeface="Calibri" pitchFamily="34" charset="-120"/>
+                        </a:rPr>
+                        <a:t>3 botellas + bolsa gigante de papas</a:t>
+                      </a:r>
+                      <a:endParaRPr lang="en-US" sz="1250" dirty="0">
+                        <a:latin typeface="Calibri" charset="0"/>
+                        <a:ea typeface="Calibri" charset="0"/>
+                        <a:cs typeface="Calibri" charset="0"/>
+                      </a:endParaRPr>
+                    </a:p>
+                  </a:txBody>
+                  <a:tcPr marL="91440" marR="91440" marT="36576" marB="36576" anchor="ctr">
+                    <a:lnL w="9525" cap="flat" cmpd="sng" algn="ctr">
+                      <a:solidFill>
+                        <a:srgbClr val="252545"/>
+                      </a:solidFill>
+                      <a:prstDash val="solid"/>
+                      <a:round/>
+                      <a:headEnd type="none" w="med" len="med"/>
+                      <a:tailEnd type="none" w="med" len="med"/>
+                    </a:lnL>
+                    <a:lnR w="9525" cap="flat" cmpd="sng" algn="ctr">
+                      <a:solidFill>
+                        <a:srgbClr val="252545"/>
+                      </a:solidFill>
+                      <a:prstDash val="solid"/>
+                      <a:round/>
+                      <a:headEnd type="none" w="med" len="med"/>
+                      <a:tailEnd type="none" w="med" len="med"/>
+                    </a:lnR>
+                    <a:lnT w="9525" cap="flat" cmpd="sng" algn="ctr">
+                      <a:solidFill>
+                        <a:srgbClr val="252545"/>
+                      </a:solidFill>
+                      <a:prstDash val="solid"/>
+                      <a:round/>
+                      <a:headEnd type="none" w="med" len="med"/>
+                      <a:tailEnd type="none" w="med" len="med"/>
+                    </a:lnT>
+                    <a:lnB w="9525" cap="flat" cmpd="sng" algn="ctr">
+                      <a:solidFill>
+                        <a:srgbClr val="252545"/>
+                      </a:solidFill>
+                      <a:prstDash val="solid"/>
+                      <a:round/>
+                      <a:headEnd type="none" w="med" len="med"/>
+                      <a:tailEnd type="none" w="med" len="med"/>
+                    </a:lnB>
+                    <a:solidFill>
+                      <a:srgbClr val="12122A"/>
+                    </a:solidFill>
+                  </a:tcPr>
+                </a:tc>
+              </a:tr>
+            </a:tbl>
+          </a:graphicData>
+        </a:graphic>
+      </p:graphicFrame>
+      <p:sp>
+        <p:nvSpPr>
+          <p:cNvPr id="5" name="Nota regalos"/>
+          <p:cNvSpPr txBox="1"/>
+          <p:nvPr/>
+        </p:nvSpPr>
+        <p:spPr>
+          <a:xfrm>
+            <a:off x="548640" y="4526280"/>
+            <a:ext cx="6766560" cy="822960"/>
+          </a:xfrm>
+          <a:prstGeom prst="rect">
+            <a:avLst/>
+          </a:prstGeom>
+          <a:noFill/>
+          <a:ln/>
+        </p:spPr>
+        <p:txBody>
+          <a:bodyPr wrap="square" lIns="0" tIns="0" rIns="0" bIns="0" rtlCol="0" anchor="t"/>
+          <a:lstStyle/>
+          <a:p>
+            <a:pPr indent="0" marL="0">
+              <a:buNone/>
+            </a:pPr>
+            <a:r>
+              <a:rPr lang="en-US" sz="1200" i="1" dirty="0">
+                <a:solidFill>
+                  <a:schemeClr val="bg2"/>
+                </a:solidFill>
+                <a:latin typeface="Calibri" pitchFamily="34" charset="0"/>
+                <a:ea typeface="Calibri" pitchFamily="34" charset="-122"/>
+                <a:cs typeface="Calibri" pitchFamily="34" charset="-120"/>
+              </a:rPr>
+              <a:t>Más 1 vitrolero 20L de regalo por cada 50 invitados. Sabores: Jamaica, limón u horchata. Los vitroleros extra que pidas se cobran aparte. La experiencia Bajón Lunar va incluida en todos los paquetes.</a:t>
+            </a:r>
+            <a:endParaRPr lang="en-US" sz="1200" dirty="0"/>
+          </a:p>
+        </p:txBody>
+      </p:sp>
+      <p:sp>
+        <p:nvSpPr>
+          <p:cNvPr id="6" name="Recomendación 1"/>
           <p:cNvSpPr/>
           <p:nvPr/>
         </p:nvSpPr>
         <p:spPr>
           <a:xfrm>
-            <a:off x="548640" y="1554480"/>
-            <a:ext cx="2514600" cy="2834640"/>
+            <a:off x="7635240" y="1508760"/>
+            <a:ext cx="3977640" cy="2148840"/>
           </a:xfrm>
           <a:prstGeom prst="roundRect">
             <a:avLst>
-              <a:gd name="adj" fmla="val 5091"/>
+              <a:gd name="adj" fmla="val 5957"/>
             </a:avLst>
           </a:prstGeom>
           <a:solidFill>
@@ -9950,53 +11725,14 @@
       </p:sp>
       <p:sp>
         <p:nvSpPr>
-          <p:cNvPr id="5" name="Número paso 1"/>
-          <p:cNvSpPr txBox="1"/>
-          <p:nvPr/>
-        </p:nvSpPr>
-        <p:spPr>
-          <a:xfrm>
-            <a:off x="804672" y="1783080"/>
-            <a:ext cx="1097280" cy="685800"/>
-          </a:xfrm>
-          <a:prstGeom prst="rect">
-            <a:avLst/>
-          </a:prstGeom>
-          <a:noFill/>
-          <a:ln/>
-        </p:spPr>
-        <p:txBody>
-          <a:bodyPr wrap="square" lIns="0" tIns="0" rIns="0" bIns="0" rtlCol="0" anchor="ctr"/>
-          <a:lstStyle/>
-          <a:p>
-            <a:pPr indent="0" marL="0">
-              <a:buNone/>
-            </a:pPr>
-            <a:r>
-              <a:rPr lang="en-US" sz="3600" dirty="0">
-                <a:solidFill>
-                  <a:schemeClr val="accent1"/>
-                </a:solidFill>
-                <a:latin typeface="Arial Black" pitchFamily="34" charset="0"/>
-                <a:ea typeface="Arial Black" pitchFamily="34" charset="-122"/>
-                <a:cs typeface="Arial Black" pitchFamily="34" charset="-120"/>
-              </a:rPr>
-              <a:t>01</a:t>
-            </a:r>
-            <a:endParaRPr lang="en-US" sz="3600" dirty="0"/>
-          </a:p>
-        </p:txBody>
-      </p:sp>
-      <p:sp>
-        <p:nvSpPr>
-          <p:cNvPr id="6" name="Paso 1 círculo"/>
+          <p:cNvPr id="7" name="Recomendación 1 círculo"/>
           <p:cNvSpPr/>
           <p:nvPr/>
         </p:nvSpPr>
         <p:spPr>
           <a:xfrm>
-            <a:off x="2240280" y="1810512"/>
-            <a:ext cx="566928" cy="566928"/>
+            <a:off x="7863840" y="1709928"/>
+            <a:ext cx="502920" cy="502920"/>
           </a:xfrm>
           <a:prstGeom prst="ellipse">
             <a:avLst/>
@@ -10009,7 +11745,7 @@
       </p:sp>
       <p:pic>
         <p:nvPicPr>
-          <p:cNvPr id="7" name="Paso 1 ícono" descr="preencoded.png">    </p:cNvPr>
+          <p:cNvPr id="8" name="Recomendación 1 ícono" descr="preencoded.png">    </p:cNvPr>
           <p:cNvPicPr>
             <a:picLocks noChangeAspect="1"/>
           </p:cNvPicPr>
@@ -10023,8 +11759,8 @@
         </p:blipFill>
         <p:spPr>
           <a:xfrm>
-            <a:off x="2387681" y="1957913"/>
-            <a:ext cx="272125" cy="272125"/>
+            <a:off x="7994599" y="1840687"/>
+            <a:ext cx="241402" cy="241402"/>
           </a:xfrm>
           <a:prstGeom prst="rect">
             <a:avLst/>
@@ -10033,14 +11769,14 @@
       </p:pic>
       <p:sp>
         <p:nvSpPr>
-          <p:cNvPr id="8" name="Título paso 1"/>
+          <p:cNvPr id="9" name="Título rec 1"/>
           <p:cNvSpPr txBox="1"/>
           <p:nvPr/>
         </p:nvSpPr>
         <p:spPr>
           <a:xfrm>
-            <a:off x="804672" y="2651760"/>
-            <a:ext cx="2057400" cy="457200"/>
+            <a:off x="8503920" y="1709928"/>
+            <a:ext cx="3017520" cy="502920"/>
           </a:xfrm>
           <a:prstGeom prst="rect">
             <a:avLst/>
@@ -10056,7 +11792,7 @@
               <a:buNone/>
             </a:pPr>
             <a:r>
-              <a:rPr lang="en-US" sz="1800" b="1" dirty="0">
+              <a:rPr lang="en-US" sz="1500" b="1" dirty="0">
                 <a:solidFill>
                   <a:schemeClr val="bg1"/>
                 </a:solidFill>
@@ -10064,22 +11800,22 @@
                 <a:ea typeface="Calibri" pitchFamily="34" charset="-122"/>
                 <a:cs typeface="Calibri" pitchFamily="34" charset="-120"/>
               </a:rPr>
-              <a:t>Elige tu barra</a:t>
-            </a:r>
-            <a:endParaRPr lang="en-US" sz="1800" dirty="0"/>
-          </a:p>
-        </p:txBody>
-      </p:sp>
-      <p:sp>
-        <p:nvSpPr>
-          <p:cNvPr id="9" name="Desc paso 1"/>
+              <a:t>Eventos pequeños · 20 a 60</a:t>
+            </a:r>
+            <a:endParaRPr lang="en-US" sz="1500" dirty="0"/>
+          </a:p>
+        </p:txBody>
+      </p:sp>
+      <p:sp>
+        <p:nvSpPr>
+          <p:cNvPr id="10" name="Lista rec 1"/>
           <p:cNvSpPr txBox="1"/>
           <p:nvPr/>
         </p:nvSpPr>
         <p:spPr>
           <a:xfrm>
-            <a:off x="804672" y="3154680"/>
-            <a:ext cx="2057400" cy="1463040"/>
+            <a:off x="7863840" y="2331720"/>
+            <a:ext cx="3611880" cy="1234440"/>
           </a:xfrm>
           <a:prstGeom prst="rect">
             <a:avLst/>
@@ -10091,62 +11827,84 @@
           <a:bodyPr wrap="square" lIns="0" tIns="0" rIns="0" bIns="0" rtlCol="0" anchor="t"/>
           <a:lstStyle/>
           <a:p>
-            <a:pPr indent="0" marL="0">
-              <a:buNone/>
-            </a:pPr>
-            <a:r>
-              <a:rPr lang="en-US" sz="1400" dirty="0">
-                <a:solidFill>
-                  <a:schemeClr val="bg2"/>
+            <a:pPr marL="177800" indent="-177800">
+              <a:spcAft>
+                <a:spcPts val="500"/>
+              </a:spcAft>
+              <a:buSzPct val="100000"/>
+              <a:buChar char="•"/>
+            </a:pPr>
+            <a:r>
+              <a:rPr lang="en-US" sz="1250" dirty="0">
+                <a:solidFill>
+                  <a:schemeClr val="bg1"/>
                 </a:solidFill>
                 <a:latin typeface="Calibri" pitchFamily="34" charset="0"/>
                 <a:ea typeface="Calibri" pitchFamily="34" charset="-122"/>
                 <a:cs typeface="Calibri" pitchFamily="34" charset="-120"/>
               </a:rPr>
-              <a:t>Chilaquiles, maruchan, gomitas o cantaritos. Los precios se ajustan solos.</a:t>
-            </a:r>
-            <a:endParaRPr lang="en-US" sz="1400" dirty="0"/>
-          </a:p>
-        </p:txBody>
-      </p:sp>
-      <p:pic>
-        <p:nvPicPr>
-          <p:cNvPr id="10" name="Flecha 1" descr="preencoded.png">    </p:cNvPr>
-          <p:cNvPicPr>
-            <a:picLocks noChangeAspect="1"/>
-          </p:cNvPicPr>
-          <p:nvPr/>
-        </p:nvPicPr>
-        <p:blipFill>
-          <a:blip r:embed="rId2"/>
-          <a:stretch>
-            <a:fillRect/>
-          </a:stretch>
-        </p:blipFill>
-        <p:spPr>
-          <a:xfrm>
-            <a:off x="3099816" y="3017520"/>
-            <a:ext cx="237744" cy="237744"/>
-          </a:xfrm>
-          <a:prstGeom prst="rect">
-            <a:avLst/>
-          </a:prstGeom>
-        </p:spPr>
-      </p:pic>
-      <p:sp>
-        <p:nvSpPr>
-          <p:cNvPr id="11" name="Paso 2"/>
+              <a:t>Nebula Mix o Cosmos Pack</a:t>
+            </a:r>
+            <a:endParaRPr lang="en-US" sz="1250" dirty="0"/>
+          </a:p>
+          <a:p>
+            <a:pPr marL="177800" indent="-177800">
+              <a:spcAft>
+                <a:spcPts val="500"/>
+              </a:spcAft>
+              <a:buSzPct val="100000"/>
+              <a:buChar char="•"/>
+            </a:pPr>
+            <a:r>
+              <a:rPr lang="en-US" sz="1250" dirty="0">
+                <a:solidFill>
+                  <a:schemeClr val="bg1"/>
+                </a:solidFill>
+                <a:latin typeface="Calibri" pitchFamily="34" charset="0"/>
+                <a:ea typeface="Calibri" pitchFamily="34" charset="-122"/>
+                <a:cs typeface="Calibri" pitchFamily="34" charset="-120"/>
+              </a:rPr>
+              <a:t>Una barra basta: chilaquiles como cena o gomitas para botanear</a:t>
+            </a:r>
+            <a:endParaRPr lang="en-US" sz="1250" dirty="0"/>
+          </a:p>
+          <a:p>
+            <a:pPr marL="177800" indent="-177800">
+              <a:spcAft>
+                <a:spcPts val="500"/>
+              </a:spcAft>
+              <a:buSzPct val="100000"/>
+              <a:buChar char="•"/>
+            </a:pPr>
+            <a:r>
+              <a:rPr lang="en-US" sz="1250" dirty="0">
+                <a:solidFill>
+                  <a:schemeClr val="bg1"/>
+                </a:solidFill>
+                <a:latin typeface="Calibri" pitchFamily="34" charset="0"/>
+                <a:ea typeface="Calibri" pitchFamily="34" charset="-122"/>
+                <a:cs typeface="Calibri" pitchFamily="34" charset="-120"/>
+              </a:rPr>
+              <a:t>1 porción por persona</a:t>
+            </a:r>
+            <a:endParaRPr lang="en-US" sz="1250" dirty="0"/>
+          </a:p>
+        </p:txBody>
+      </p:sp>
+      <p:sp>
+        <p:nvSpPr>
+          <p:cNvPr id="11" name="Recomendación 2"/>
           <p:cNvSpPr/>
           <p:nvPr/>
         </p:nvSpPr>
         <p:spPr>
           <a:xfrm>
-            <a:off x="3364992" y="1554480"/>
-            <a:ext cx="2514600" cy="2834640"/>
+            <a:off x="7635240" y="3840480"/>
+            <a:ext cx="3977640" cy="2148840"/>
           </a:xfrm>
           <a:prstGeom prst="roundRect">
             <a:avLst>
-              <a:gd name="adj" fmla="val 5091"/>
+              <a:gd name="adj" fmla="val 5957"/>
             </a:avLst>
           </a:prstGeom>
           <a:solidFill>
@@ -10166,53 +11924,14 @@
       </p:sp>
       <p:sp>
         <p:nvSpPr>
-          <p:cNvPr id="12" name="Número paso 2"/>
-          <p:cNvSpPr txBox="1"/>
-          <p:nvPr/>
-        </p:nvSpPr>
-        <p:spPr>
-          <a:xfrm>
-            <a:off x="3621024" y="1783080"/>
-            <a:ext cx="1097280" cy="685800"/>
-          </a:xfrm>
-          <a:prstGeom prst="rect">
-            <a:avLst/>
-          </a:prstGeom>
-          <a:noFill/>
-          <a:ln/>
-        </p:spPr>
-        <p:txBody>
-          <a:bodyPr wrap="square" lIns="0" tIns="0" rIns="0" bIns="0" rtlCol="0" anchor="ctr"/>
-          <a:lstStyle/>
-          <a:p>
-            <a:pPr indent="0" marL="0">
-              <a:buNone/>
-            </a:pPr>
-            <a:r>
-              <a:rPr lang="en-US" sz="3600" dirty="0">
-                <a:solidFill>
-                  <a:schemeClr val="accent1"/>
-                </a:solidFill>
-                <a:latin typeface="Arial Black" pitchFamily="34" charset="0"/>
-                <a:ea typeface="Arial Black" pitchFamily="34" charset="-122"/>
-                <a:cs typeface="Arial Black" pitchFamily="34" charset="-120"/>
-              </a:rPr>
-              <a:t>02</a:t>
-            </a:r>
-            <a:endParaRPr lang="en-US" sz="3600" dirty="0"/>
-          </a:p>
-        </p:txBody>
-      </p:sp>
-      <p:sp>
-        <p:nvSpPr>
-          <p:cNvPr id="13" name="Paso 2 círculo"/>
+          <p:cNvPr id="12" name="Recomendación 2 círculo"/>
           <p:cNvSpPr/>
           <p:nvPr/>
         </p:nvSpPr>
         <p:spPr>
           <a:xfrm>
-            <a:off x="5056632" y="1810512"/>
-            <a:ext cx="566928" cy="566928"/>
+            <a:off x="7863840" y="4041648"/>
+            <a:ext cx="502920" cy="502920"/>
           </a:xfrm>
           <a:prstGeom prst="ellipse">
             <a:avLst/>
@@ -10225,22 +11944,22 @@
       </p:sp>
       <p:pic>
         <p:nvPicPr>
-          <p:cNvPr id="14" name="Paso 2 ícono" descr="preencoded.png">    </p:cNvPr>
+          <p:cNvPr id="13" name="Recomendación 2 ícono" descr="preencoded.png">    </p:cNvPr>
           <p:cNvPicPr>
             <a:picLocks noChangeAspect="1"/>
           </p:cNvPicPr>
           <p:nvPr/>
         </p:nvPicPr>
         <p:blipFill>
-          <a:blip r:embed="rId3"/>
+          <a:blip r:embed="rId2"/>
           <a:stretch>
             <a:fillRect/>
           </a:stretch>
         </p:blipFill>
         <p:spPr>
           <a:xfrm>
-            <a:off x="5204033" y="1957913"/>
-            <a:ext cx="272125" cy="272125"/>
+            <a:off x="7994599" y="4172407"/>
+            <a:ext cx="241402" cy="241402"/>
           </a:xfrm>
           <a:prstGeom prst="rect">
             <a:avLst/>
@@ -10249,14 +11968,14 @@
       </p:pic>
       <p:sp>
         <p:nvSpPr>
-          <p:cNvPr id="15" name="Título paso 2"/>
+          <p:cNvPr id="14" name="Título rec 2"/>
           <p:cNvSpPr txBox="1"/>
           <p:nvPr/>
         </p:nvSpPr>
         <p:spPr>
           <a:xfrm>
-            <a:off x="3621024" y="2651760"/>
-            <a:ext cx="2057400" cy="457200"/>
+            <a:off x="8503920" y="4041648"/>
+            <a:ext cx="3017520" cy="502920"/>
           </a:xfrm>
           <a:prstGeom prst="rect">
             <a:avLst/>
@@ -10272,7 +11991,7 @@
               <a:buNone/>
             </a:pPr>
             <a:r>
-              <a:rPr lang="en-US" sz="1800" b="1" dirty="0">
+              <a:rPr lang="en-US" sz="1500" b="1" dirty="0">
                 <a:solidFill>
                   <a:schemeClr val="bg1"/>
                 </a:solidFill>
@@ -10280,22 +11999,22 @@
                 <a:ea typeface="Calibri" pitchFamily="34" charset="-122"/>
                 <a:cs typeface="Calibri" pitchFamily="34" charset="-120"/>
               </a:rPr>
-              <a:t>Elige tu paquete</a:t>
-            </a:r>
-            <a:endParaRPr lang="en-US" sz="1800" dirty="0"/>
-          </a:p>
-        </p:txBody>
-      </p:sp>
-      <p:sp>
-        <p:nvSpPr>
-          <p:cNvPr id="16" name="Desc paso 2"/>
+              <a:t>Eventos grandes · 70 o más</a:t>
+            </a:r>
+            <a:endParaRPr lang="en-US" sz="1500" dirty="0"/>
+          </a:p>
+        </p:txBody>
+      </p:sp>
+      <p:sp>
+        <p:nvSpPr>
+          <p:cNvPr id="15" name="Lista rec 2"/>
           <p:cNvSpPr txBox="1"/>
           <p:nvPr/>
         </p:nvSpPr>
         <p:spPr>
           <a:xfrm>
-            <a:off x="3621024" y="3154680"/>
-            <a:ext cx="2057400" cy="1463040"/>
+            <a:off x="7863840" y="4663440"/>
+            <a:ext cx="3611880" cy="1234440"/>
           </a:xfrm>
           <a:prstGeom prst="rect">
             <a:avLst/>
@@ -10307,188 +12026,36 @@
           <a:bodyPr wrap="square" lIns="0" tIns="0" rIns="0" bIns="0" rtlCol="0" anchor="t"/>
           <a:lstStyle/>
           <a:p>
-            <a:pPr indent="0" marL="0">
-              <a:buNone/>
-            </a:pPr>
-            <a:r>
-              <a:rPr lang="en-US" sz="1400" dirty="0">
-                <a:solidFill>
-                  <a:schemeClr val="bg2"/>
+            <a:pPr marL="177800" indent="-177800">
+              <a:spcAft>
+                <a:spcPts val="500"/>
+              </a:spcAft>
+              <a:buSzPct val="100000"/>
+              <a:buChar char="•"/>
+            </a:pPr>
+            <a:r>
+              <a:rPr lang="en-US" sz="1250" dirty="0">
+                <a:solidFill>
+                  <a:schemeClr val="bg1"/>
                 </a:solidFill>
                 <a:latin typeface="Calibri" pitchFamily="34" charset="0"/>
                 <a:ea typeface="Calibri" pitchFamily="34" charset="-122"/>
                 <a:cs typeface="Calibri" pitchFamily="34" charset="-120"/>
               </a:rPr>
-              <a:t>Ajusta personas, porciones, sabores, proteínas, tequila y extras.</a:t>
-            </a:r>
-            <a:endParaRPr lang="en-US" sz="1400" dirty="0"/>
-          </a:p>
-        </p:txBody>
-      </p:sp>
-      <p:pic>
-        <p:nvPicPr>
-          <p:cNvPr id="17" name="Flecha 2" descr="preencoded.png">    </p:cNvPr>
-          <p:cNvPicPr>
-            <a:picLocks noChangeAspect="1"/>
-          </p:cNvPicPr>
-          <p:nvPr/>
-        </p:nvPicPr>
-        <p:blipFill>
-          <a:blip r:embed="rId4"/>
-          <a:stretch>
-            <a:fillRect/>
-          </a:stretch>
-        </p:blipFill>
-        <p:spPr>
-          <a:xfrm>
-            <a:off x="5916168" y="3017520"/>
-            <a:ext cx="237744" cy="237744"/>
-          </a:xfrm>
-          <a:prstGeom prst="rect">
-            <a:avLst/>
-          </a:prstGeom>
-        </p:spPr>
-      </p:pic>
-      <p:sp>
-        <p:nvSpPr>
-          <p:cNvPr id="18" name="Paso 3"/>
-          <p:cNvSpPr/>
-          <p:nvPr/>
-        </p:nvSpPr>
-        <p:spPr>
-          <a:xfrm>
-            <a:off x="6181344" y="1554480"/>
-            <a:ext cx="2514600" cy="2834640"/>
-          </a:xfrm>
-          <a:prstGeom prst="roundRect">
-            <a:avLst>
-              <a:gd name="adj" fmla="val 5091"/>
-            </a:avLst>
-          </a:prstGeom>
-          <a:solidFill>
-            <a:schemeClr val="tx2">
-              <a:alpha val="82000"/>
-            </a:schemeClr>
-          </a:solidFill>
-          <a:ln w="12700">
-            <a:solidFill>
-              <a:schemeClr val="accent1">
-                <a:alpha val="55000"/>
-              </a:schemeClr>
-            </a:solidFill>
-            <a:prstDash val="solid"/>
-          </a:ln>
-        </p:spPr>
-      </p:sp>
-      <p:sp>
-        <p:nvSpPr>
-          <p:cNvPr id="19" name="Número paso 3"/>
-          <p:cNvSpPr txBox="1"/>
-          <p:nvPr/>
-        </p:nvSpPr>
-        <p:spPr>
-          <a:xfrm>
-            <a:off x="6437376" y="1783080"/>
-            <a:ext cx="1097280" cy="685800"/>
-          </a:xfrm>
-          <a:prstGeom prst="rect">
-            <a:avLst/>
-          </a:prstGeom>
-          <a:noFill/>
-          <a:ln/>
-        </p:spPr>
-        <p:txBody>
-          <a:bodyPr wrap="square" lIns="0" tIns="0" rIns="0" bIns="0" rtlCol="0" anchor="ctr"/>
-          <a:lstStyle/>
-          <a:p>
-            <a:pPr indent="0" marL="0">
-              <a:buNone/>
-            </a:pPr>
-            <a:r>
-              <a:rPr lang="en-US" sz="3600" dirty="0">
-                <a:solidFill>
-                  <a:schemeClr val="accent1"/>
-                </a:solidFill>
-                <a:latin typeface="Arial Black" pitchFamily="34" charset="0"/>
-                <a:ea typeface="Arial Black" pitchFamily="34" charset="-122"/>
-                <a:cs typeface="Arial Black" pitchFamily="34" charset="-120"/>
-              </a:rPr>
-              <a:t>03</a:t>
-            </a:r>
-            <a:endParaRPr lang="en-US" sz="3600" dirty="0"/>
-          </a:p>
-        </p:txBody>
-      </p:sp>
-      <p:sp>
-        <p:nvSpPr>
-          <p:cNvPr id="20" name="Paso 3 círculo"/>
-          <p:cNvSpPr/>
-          <p:nvPr/>
-        </p:nvSpPr>
-        <p:spPr>
-          <a:xfrm>
-            <a:off x="7872984" y="1810512"/>
-            <a:ext cx="566928" cy="566928"/>
-          </a:xfrm>
-          <a:prstGeom prst="ellipse">
-            <a:avLst/>
-          </a:prstGeom>
-          <a:solidFill>
-            <a:schemeClr val="accent1"/>
-          </a:solidFill>
-          <a:ln/>
-        </p:spPr>
-      </p:sp>
-      <p:pic>
-        <p:nvPicPr>
-          <p:cNvPr id="21" name="Paso 3 ícono" descr="preencoded.png">    </p:cNvPr>
-          <p:cNvPicPr>
-            <a:picLocks noChangeAspect="1"/>
-          </p:cNvPicPr>
-          <p:nvPr/>
-        </p:nvPicPr>
-        <p:blipFill>
-          <a:blip r:embed="rId5"/>
-          <a:stretch>
-            <a:fillRect/>
-          </a:stretch>
-        </p:blipFill>
-        <p:spPr>
-          <a:xfrm>
-            <a:off x="8020385" y="1957913"/>
-            <a:ext cx="272125" cy="272125"/>
-          </a:xfrm>
-          <a:prstGeom prst="rect">
-            <a:avLst/>
-          </a:prstGeom>
-        </p:spPr>
-      </p:pic>
-      <p:sp>
-        <p:nvSpPr>
-          <p:cNvPr id="22" name="Título paso 3"/>
-          <p:cNvSpPr txBox="1"/>
-          <p:nvPr/>
-        </p:nvSpPr>
-        <p:spPr>
-          <a:xfrm>
-            <a:off x="6437376" y="2651760"/>
-            <a:ext cx="2057400" cy="457200"/>
-          </a:xfrm>
-          <a:prstGeom prst="rect">
-            <a:avLst/>
-          </a:prstGeom>
-          <a:noFill/>
-          <a:ln/>
-        </p:spPr>
-        <p:txBody>
-          <a:bodyPr wrap="square" lIns="0" tIns="0" rIns="0" bIns="0" rtlCol="0" anchor="ctr"/>
-          <a:lstStyle/>
-          <a:p>
-            <a:pPr indent="0" marL="0">
-              <a:buNone/>
-            </a:pPr>
-            <a:r>
-              <a:rPr lang="en-US" sz="1800" b="1" dirty="0">
+              <a:t>After Moon o Moonlight</a:t>
+            </a:r>
+            <a:endParaRPr lang="en-US" sz="1250" dirty="0"/>
+          </a:p>
+          <a:p>
+            <a:pPr marL="177800" indent="-177800">
+              <a:spcAft>
+                <a:spcPts val="500"/>
+              </a:spcAft>
+              <a:buSzPct val="100000"/>
+              <a:buChar char="•"/>
+            </a:pPr>
+            <a:r>
+              <a:rPr lang="en-US" sz="1250" dirty="0">
                 <a:solidFill>
                   <a:schemeClr val="bg1"/>
                 </a:solidFill>
@@ -10496,392 +12063,30 @@
                 <a:ea typeface="Calibri" pitchFamily="34" charset="-122"/>
                 <a:cs typeface="Calibri" pitchFamily="34" charset="-120"/>
               </a:rPr>
-              <a:t>Fecha y datos</a:t>
-            </a:r>
-            <a:endParaRPr lang="en-US" sz="1800" dirty="0"/>
-          </a:p>
-        </p:txBody>
-      </p:sp>
-      <p:sp>
-        <p:nvSpPr>
-          <p:cNvPr id="23" name="Desc paso 3"/>
-          <p:cNvSpPr txBox="1"/>
-          <p:nvPr/>
-        </p:nvSpPr>
-        <p:spPr>
-          <a:xfrm>
-            <a:off x="6437376" y="3154680"/>
-            <a:ext cx="2057400" cy="1463040"/>
-          </a:xfrm>
-          <a:prstGeom prst="rect">
-            <a:avLst/>
-          </a:prstGeom>
-          <a:noFill/>
-          <a:ln/>
-        </p:spPr>
-        <p:txBody>
-          <a:bodyPr wrap="square" lIns="0" tIns="0" rIns="0" bIns="0" rtlCol="0" anchor="t"/>
-          <a:lstStyle/>
-          <a:p>
-            <a:pPr indent="0" marL="0">
-              <a:buNone/>
-            </a:pPr>
-            <a:r>
-              <a:rPr lang="en-US" sz="1400" dirty="0">
-                <a:solidFill>
-                  <a:schemeClr val="bg2"/>
+              <a:t>Combina comida + cantaritos (barra adicional: consumo + $500)</a:t>
+            </a:r>
+            <a:endParaRPr lang="en-US" sz="1250" dirty="0"/>
+          </a:p>
+          <a:p>
+            <a:pPr marL="177800" indent="-177800">
+              <a:spcAft>
+                <a:spcPts val="500"/>
+              </a:spcAft>
+              <a:buSzPct val="100000"/>
+              <a:buChar char="•"/>
+            </a:pPr>
+            <a:r>
+              <a:rPr lang="en-US" sz="1250" dirty="0">
+                <a:solidFill>
+                  <a:schemeClr val="bg1"/>
                 </a:solidFill>
                 <a:latin typeface="Calibri" pitchFamily="34" charset="0"/>
                 <a:ea typeface="Calibri" pitchFamily="34" charset="-122"/>
                 <a:cs typeface="Calibri" pitchFamily="34" charset="-120"/>
               </a:rPr>
-              <a:t>El calendario te muestra los días disponibles: viernes, sábado y domingo.</a:t>
-            </a:r>
-            <a:endParaRPr lang="en-US" sz="1400" dirty="0"/>
-          </a:p>
-        </p:txBody>
-      </p:sp>
-      <p:pic>
-        <p:nvPicPr>
-          <p:cNvPr id="24" name="Flecha 3" descr="preencoded.png">    </p:cNvPr>
-          <p:cNvPicPr>
-            <a:picLocks noChangeAspect="1"/>
-          </p:cNvPicPr>
-          <p:nvPr/>
-        </p:nvPicPr>
-        <p:blipFill>
-          <a:blip r:embed="rId6"/>
-          <a:stretch>
-            <a:fillRect/>
-          </a:stretch>
-        </p:blipFill>
-        <p:spPr>
-          <a:xfrm>
-            <a:off x="8732520" y="3017520"/>
-            <a:ext cx="237744" cy="237744"/>
-          </a:xfrm>
-          <a:prstGeom prst="rect">
-            <a:avLst/>
-          </a:prstGeom>
-        </p:spPr>
-      </p:pic>
-      <p:sp>
-        <p:nvSpPr>
-          <p:cNvPr id="25" name="Paso 4"/>
-          <p:cNvSpPr/>
-          <p:nvPr/>
-        </p:nvSpPr>
-        <p:spPr>
-          <a:xfrm>
-            <a:off x="8997696" y="1554480"/>
-            <a:ext cx="2514600" cy="2834640"/>
-          </a:xfrm>
-          <a:prstGeom prst="roundRect">
-            <a:avLst>
-              <a:gd name="adj" fmla="val 5091"/>
-            </a:avLst>
-          </a:prstGeom>
-          <a:solidFill>
-            <a:schemeClr val="tx2">
-              <a:alpha val="82000"/>
-            </a:schemeClr>
-          </a:solidFill>
-          <a:ln w="12700">
-            <a:solidFill>
-              <a:schemeClr val="accent1">
-                <a:alpha val="55000"/>
-              </a:schemeClr>
-            </a:solidFill>
-            <a:prstDash val="solid"/>
-          </a:ln>
-        </p:spPr>
-      </p:sp>
-      <p:sp>
-        <p:nvSpPr>
-          <p:cNvPr id="26" name="Número paso 4"/>
-          <p:cNvSpPr txBox="1"/>
-          <p:nvPr/>
-        </p:nvSpPr>
-        <p:spPr>
-          <a:xfrm>
-            <a:off x="9253728" y="1783080"/>
-            <a:ext cx="1097280" cy="685800"/>
-          </a:xfrm>
-          <a:prstGeom prst="rect">
-            <a:avLst/>
-          </a:prstGeom>
-          <a:noFill/>
-          <a:ln/>
-        </p:spPr>
-        <p:txBody>
-          <a:bodyPr wrap="square" lIns="0" tIns="0" rIns="0" bIns="0" rtlCol="0" anchor="ctr"/>
-          <a:lstStyle/>
-          <a:p>
-            <a:pPr indent="0" marL="0">
-              <a:buNone/>
-            </a:pPr>
-            <a:r>
-              <a:rPr lang="en-US" sz="3600" dirty="0">
-                <a:solidFill>
-                  <a:schemeClr val="accent1"/>
-                </a:solidFill>
-                <a:latin typeface="Arial Black" pitchFamily="34" charset="0"/>
-                <a:ea typeface="Arial Black" pitchFamily="34" charset="-122"/>
-                <a:cs typeface="Arial Black" pitchFamily="34" charset="-120"/>
-              </a:rPr>
-              <a:t>04</a:t>
-            </a:r>
-            <a:endParaRPr lang="en-US" sz="3600" dirty="0"/>
-          </a:p>
-        </p:txBody>
-      </p:sp>
-      <p:sp>
-        <p:nvSpPr>
-          <p:cNvPr id="27" name="Paso 4 círculo"/>
-          <p:cNvSpPr/>
-          <p:nvPr/>
-        </p:nvSpPr>
-        <p:spPr>
-          <a:xfrm>
-            <a:off x="10689336" y="1810512"/>
-            <a:ext cx="566928" cy="566928"/>
-          </a:xfrm>
-          <a:prstGeom prst="ellipse">
-            <a:avLst/>
-          </a:prstGeom>
-          <a:solidFill>
-            <a:schemeClr val="accent1"/>
-          </a:solidFill>
-          <a:ln/>
-        </p:spPr>
-      </p:sp>
-      <p:pic>
-        <p:nvPicPr>
-          <p:cNvPr id="28" name="Paso 4 ícono" descr="preencoded.png">    </p:cNvPr>
-          <p:cNvPicPr>
-            <a:picLocks noChangeAspect="1"/>
-          </p:cNvPicPr>
-          <p:nvPr/>
-        </p:nvPicPr>
-        <p:blipFill>
-          <a:blip r:embed="rId7"/>
-          <a:stretch>
-            <a:fillRect/>
-          </a:stretch>
-        </p:blipFill>
-        <p:spPr>
-          <a:xfrm>
-            <a:off x="10836737" y="1957913"/>
-            <a:ext cx="272125" cy="272125"/>
-          </a:xfrm>
-          <a:prstGeom prst="rect">
-            <a:avLst/>
-          </a:prstGeom>
-        </p:spPr>
-      </p:pic>
-      <p:sp>
-        <p:nvSpPr>
-          <p:cNvPr id="29" name="Título paso 4"/>
-          <p:cNvSpPr txBox="1"/>
-          <p:nvPr/>
-        </p:nvSpPr>
-        <p:spPr>
-          <a:xfrm>
-            <a:off x="9253728" y="2651760"/>
-            <a:ext cx="2057400" cy="457200"/>
-          </a:xfrm>
-          <a:prstGeom prst="rect">
-            <a:avLst/>
-          </a:prstGeom>
-          <a:noFill/>
-          <a:ln/>
-        </p:spPr>
-        <p:txBody>
-          <a:bodyPr wrap="square" lIns="0" tIns="0" rIns="0" bIns="0" rtlCol="0" anchor="ctr"/>
-          <a:lstStyle/>
-          <a:p>
-            <a:pPr indent="0" marL="0">
-              <a:buNone/>
-            </a:pPr>
-            <a:r>
-              <a:rPr lang="en-US" sz="1800" b="1" dirty="0">
-                <a:solidFill>
-                  <a:schemeClr val="bg1"/>
-                </a:solidFill>
-                <a:latin typeface="Calibri" pitchFamily="34" charset="0"/>
-                <a:ea typeface="Calibri" pitchFamily="34" charset="-122"/>
-                <a:cs typeface="Calibri" pitchFamily="34" charset="-120"/>
-              </a:rPr>
-              <a:t>Recibe tu PDF</a:t>
-            </a:r>
-            <a:endParaRPr lang="en-US" sz="1800" dirty="0"/>
-          </a:p>
-        </p:txBody>
-      </p:sp>
-      <p:sp>
-        <p:nvSpPr>
-          <p:cNvPr id="30" name="Desc paso 4"/>
-          <p:cNvSpPr txBox="1"/>
-          <p:nvPr/>
-        </p:nvSpPr>
-        <p:spPr>
-          <a:xfrm>
-            <a:off x="9253728" y="3154680"/>
-            <a:ext cx="2057400" cy="1463040"/>
-          </a:xfrm>
-          <a:prstGeom prst="rect">
-            <a:avLst/>
-          </a:prstGeom>
-          <a:noFill/>
-          <a:ln/>
-        </p:spPr>
-        <p:txBody>
-          <a:bodyPr wrap="square" lIns="0" tIns="0" rIns="0" bIns="0" rtlCol="0" anchor="t"/>
-          <a:lstStyle/>
-          <a:p>
-            <a:pPr indent="0" marL="0">
-              <a:buNone/>
-            </a:pPr>
-            <a:r>
-              <a:rPr lang="en-US" sz="1400" dirty="0">
-                <a:solidFill>
-                  <a:schemeClr val="bg2"/>
-                </a:solidFill>
-                <a:latin typeface="Calibri" pitchFamily="34" charset="0"/>
-                <a:ea typeface="Calibri" pitchFamily="34" charset="-122"/>
-                <a:cs typeface="Calibri" pitchFamily="34" charset="-120"/>
-              </a:rPr>
-              <a:t>Te llega tu cotización con folio. Síguela en "Rastrea tu cotización".</a:t>
-            </a:r>
-            <a:endParaRPr lang="en-US" sz="1400" dirty="0"/>
-          </a:p>
-        </p:txBody>
-      </p:sp>
-      <p:sp>
-        <p:nvSpPr>
-          <p:cNvPr id="31" name="Aparta tu fecha"/>
-          <p:cNvSpPr/>
-          <p:nvPr/>
-        </p:nvSpPr>
-        <p:spPr>
-          <a:xfrm>
-            <a:off x="548640" y="4709160"/>
-            <a:ext cx="11064240" cy="1005840"/>
-          </a:xfrm>
-          <a:prstGeom prst="roundRect">
-            <a:avLst>
-              <a:gd name="adj" fmla="val 12727"/>
-            </a:avLst>
-          </a:prstGeom>
-          <a:solidFill>
-            <a:schemeClr val="accent1">
-              <a:alpha val="30000"/>
-            </a:schemeClr>
-          </a:solidFill>
-          <a:ln w="12700">
-            <a:solidFill>
-              <a:schemeClr val="accent1">
-                <a:alpha val="80000"/>
-              </a:schemeClr>
-            </a:solidFill>
-            <a:prstDash val="solid"/>
-          </a:ln>
-        </p:spPr>
-      </p:sp>
-      <p:sp>
-        <p:nvSpPr>
-          <p:cNvPr id="32" name="Aparta círculo"/>
-          <p:cNvSpPr/>
-          <p:nvPr/>
-        </p:nvSpPr>
-        <p:spPr>
-          <a:xfrm>
-            <a:off x="777240" y="4910328"/>
-            <a:ext cx="594360" cy="594360"/>
-          </a:xfrm>
-          <a:prstGeom prst="ellipse">
-            <a:avLst/>
-          </a:prstGeom>
-          <a:solidFill>
-            <a:schemeClr val="bg1"/>
-          </a:solidFill>
-          <a:ln/>
-        </p:spPr>
-      </p:sp>
-      <p:pic>
-        <p:nvPicPr>
-          <p:cNvPr id="33" name="Aparta ícono" descr="preencoded.png">    </p:cNvPr>
-          <p:cNvPicPr>
-            <a:picLocks noChangeAspect="1"/>
-          </p:cNvPicPr>
-          <p:nvPr/>
-        </p:nvPicPr>
-        <p:blipFill>
-          <a:blip r:embed="rId8"/>
-          <a:stretch>
-            <a:fillRect/>
-          </a:stretch>
-        </p:blipFill>
-        <p:spPr>
-          <a:xfrm>
-            <a:off x="931774" y="5064862"/>
-            <a:ext cx="285293" cy="285293"/>
-          </a:xfrm>
-          <a:prstGeom prst="rect">
-            <a:avLst/>
-          </a:prstGeom>
-        </p:spPr>
-      </p:pic>
-      <p:sp>
-        <p:nvSpPr>
-          <p:cNvPr id="34" name="Texto aparta"/>
-          <p:cNvSpPr txBox="1"/>
-          <p:nvPr/>
-        </p:nvSpPr>
-        <p:spPr>
-          <a:xfrm>
-            <a:off x="1600200" y="4709160"/>
-            <a:ext cx="9784080" cy="1005840"/>
-          </a:xfrm>
-          <a:prstGeom prst="rect">
-            <a:avLst/>
-          </a:prstGeom>
-          <a:noFill/>
-          <a:ln/>
-        </p:spPr>
-        <p:txBody>
-          <a:bodyPr wrap="square" lIns="0" tIns="0" rIns="0" bIns="0" rtlCol="0" anchor="ctr"/>
-          <a:lstStyle/>
-          <a:p>
-            <a:pPr indent="0" marL="0">
-              <a:buNone/>
-            </a:pPr>
-            <a:r>
-              <a:rPr lang="en-US" sz="1600" b="1" dirty="0">
-                <a:solidFill>
-                  <a:schemeClr val="bg1"/>
-                </a:solidFill>
-                <a:latin typeface="Calibri" pitchFamily="34" charset="0"/>
-                <a:ea typeface="Calibri" pitchFamily="34" charset="-122"/>
-                <a:cs typeface="Calibri" pitchFamily="34" charset="-120"/>
-              </a:rPr>
-              <a:t>Aparta tu fecha con el 50% de anticipo. </a:t>
-            </a:r>
-            <a:pPr indent="0" marL="0">
-              <a:buNone/>
-            </a:pPr>
-            <a:r>
-              <a:rPr lang="en-US" sz="1600" dirty="0">
-                <a:solidFill>
-                  <a:schemeClr val="bg1"/>
-                </a:solidFill>
-                <a:latin typeface="Calibri" pitchFamily="34" charset="0"/>
-                <a:ea typeface="Calibri" pitchFamily="34" charset="-122"/>
-                <a:cs typeface="Calibri" pitchFamily="34" charset="-120"/>
-              </a:rPr>
-              <a:t>El resto se liquida el día del evento. Cotiza en la web o por WhatsApp al 55 7190 1664.</a:t>
-            </a:r>
-            <a:endParaRPr lang="en-US" sz="1600" dirty="0"/>
+              <a:t>¿Fiesta larga o after? 2 porciones por persona</a:t>
+            </a:r>
+            <a:endParaRPr lang="en-US" sz="1250" dirty="0"/>
           </a:p>
         </p:txBody>
       </p:sp>
@@ -10987,7 +12192,7 @@
                   <a:schemeClr val="accent6"/>
                 </a:solidFill>
               </a:rPr>
-              <a:t>ANTES DE RESERVAR</a:t>
+              <a:t>EN MENOS DE 5 MINUTOS</a:t>
             </a:r>
             <a:endParaRPr lang="en-US" sz="1100" dirty="0"/>
           </a:p>
@@ -11028,7 +12233,7 @@
                 <a:ea typeface="Arial Black" pitchFamily="34" charset="-122"/>
                 <a:cs typeface="Arial Black" pitchFamily="34" charset="-120"/>
               </a:rPr>
-              <a:t>Lo que tienes que saber</a:t>
+              <a:t>Cómo cotizar con nosotros</a:t>
             </a:r>
             <a:endParaRPr lang="en-US" sz="3000" dirty="0"/>
           </a:p>
@@ -11036,506 +12241,18 @@
       </p:sp>
       <p:sp>
         <p:nvSpPr>
-          <p:cNvPr id="4" name="Condición 1 círculo"/>
+          <p:cNvPr id="4" name="Paso 1"/>
           <p:cNvSpPr/>
           <p:nvPr/>
         </p:nvSpPr>
         <p:spPr>
           <a:xfrm>
-            <a:off x="548640" y="1600200"/>
-            <a:ext cx="566928" cy="566928"/>
-          </a:xfrm>
-          <a:prstGeom prst="ellipse">
-            <a:avLst/>
-          </a:prstGeom>
-          <a:solidFill>
-            <a:schemeClr val="accent1"/>
-          </a:solidFill>
-          <a:ln/>
-        </p:spPr>
-      </p:sp>
-      <p:pic>
-        <p:nvPicPr>
-          <p:cNvPr id="5" name="Condición 1 ícono" descr="preencoded.png">    </p:cNvPr>
-          <p:cNvPicPr>
-            <a:picLocks noChangeAspect="1"/>
-          </p:cNvPicPr>
-          <p:nvPr/>
-        </p:nvPicPr>
-        <p:blipFill>
-          <a:blip r:embed="rId1"/>
-          <a:stretch>
-            <a:fillRect/>
-          </a:stretch>
-        </p:blipFill>
-        <p:spPr>
-          <a:xfrm>
-            <a:off x="696041" y="1747601"/>
-            <a:ext cx="272125" cy="272125"/>
-          </a:xfrm>
-          <a:prstGeom prst="rect">
-            <a:avLst/>
-          </a:prstGeom>
-        </p:spPr>
-      </p:pic>
-      <p:sp>
-        <p:nvSpPr>
-          <p:cNvPr id="6" name="Título cond 1"/>
-          <p:cNvSpPr txBox="1"/>
-          <p:nvPr/>
-        </p:nvSpPr>
-        <p:spPr>
-          <a:xfrm>
-            <a:off x="1325880" y="1508760"/>
-            <a:ext cx="4754880" cy="384048"/>
-          </a:xfrm>
-          <a:prstGeom prst="rect">
-            <a:avLst/>
-          </a:prstGeom>
-          <a:noFill/>
-          <a:ln/>
-        </p:spPr>
-        <p:txBody>
-          <a:bodyPr wrap="square" lIns="0" tIns="0" rIns="0" bIns="0" rtlCol="0" anchor="ctr"/>
-          <a:lstStyle/>
-          <a:p>
-            <a:pPr indent="0" marL="0">
-              <a:buNone/>
-            </a:pPr>
-            <a:r>
-              <a:rPr lang="en-US" sz="1700" b="1" dirty="0">
-                <a:solidFill>
-                  <a:schemeClr val="bg1"/>
-                </a:solidFill>
-                <a:latin typeface="Calibri" pitchFamily="34" charset="0"/>
-                <a:ea typeface="Calibri" pitchFamily="34" charset="-122"/>
-                <a:cs typeface="Calibri" pitchFamily="34" charset="-120"/>
-              </a:rPr>
-              <a:t>Días de servicio</a:t>
-            </a:r>
-            <a:endParaRPr lang="en-US" sz="1700" dirty="0"/>
-          </a:p>
-        </p:txBody>
-      </p:sp>
-      <p:sp>
-        <p:nvSpPr>
-          <p:cNvPr id="7" name="Desc cond 1"/>
-          <p:cNvSpPr txBox="1"/>
-          <p:nvPr/>
-        </p:nvSpPr>
-        <p:spPr>
-          <a:xfrm>
-            <a:off x="1325880" y="1892808"/>
-            <a:ext cx="4754880" cy="594360"/>
-          </a:xfrm>
-          <a:prstGeom prst="rect">
-            <a:avLst/>
-          </a:prstGeom>
-          <a:noFill/>
-          <a:ln/>
-        </p:spPr>
-        <p:txBody>
-          <a:bodyPr wrap="square" lIns="0" tIns="0" rIns="0" bIns="0" rtlCol="0" anchor="t"/>
-          <a:lstStyle/>
-          <a:p>
-            <a:pPr indent="0" marL="0">
-              <a:buNone/>
-            </a:pPr>
-            <a:r>
-              <a:rPr lang="en-US" sz="1400" dirty="0">
-                <a:solidFill>
-                  <a:schemeClr val="bg2"/>
-                </a:solidFill>
-                <a:latin typeface="Calibri" pitchFamily="34" charset="0"/>
-                <a:ea typeface="Calibri" pitchFamily="34" charset="-122"/>
-                <a:cs typeface="Calibri" pitchFamily="34" charset="-120"/>
-              </a:rPr>
-              <a:t>Viernes desde las 8 PM, sábado a cualquier hora y domingo hasta las 4 AM.</a:t>
-            </a:r>
-            <a:endParaRPr lang="en-US" sz="1400" dirty="0"/>
-          </a:p>
-        </p:txBody>
-      </p:sp>
-      <p:sp>
-        <p:nvSpPr>
-          <p:cNvPr id="8" name="Condición 2 círculo"/>
-          <p:cNvSpPr/>
-          <p:nvPr/>
-        </p:nvSpPr>
-        <p:spPr>
-          <a:xfrm>
-            <a:off x="548640" y="2715768"/>
-            <a:ext cx="566928" cy="566928"/>
-          </a:xfrm>
-          <a:prstGeom prst="ellipse">
-            <a:avLst/>
-          </a:prstGeom>
-          <a:solidFill>
-            <a:schemeClr val="accent1"/>
-          </a:solidFill>
-          <a:ln/>
-        </p:spPr>
-      </p:sp>
-      <p:pic>
-        <p:nvPicPr>
-          <p:cNvPr id="9" name="Condición 2 ícono" descr="preencoded.png">    </p:cNvPr>
-          <p:cNvPicPr>
-            <a:picLocks noChangeAspect="1"/>
-          </p:cNvPicPr>
-          <p:nvPr/>
-        </p:nvPicPr>
-        <p:blipFill>
-          <a:blip r:embed="rId2"/>
-          <a:stretch>
-            <a:fillRect/>
-          </a:stretch>
-        </p:blipFill>
-        <p:spPr>
-          <a:xfrm>
-            <a:off x="696041" y="2863169"/>
-            <a:ext cx="272125" cy="272125"/>
-          </a:xfrm>
-          <a:prstGeom prst="rect">
-            <a:avLst/>
-          </a:prstGeom>
-        </p:spPr>
-      </p:pic>
-      <p:sp>
-        <p:nvSpPr>
-          <p:cNvPr id="10" name="Título cond 2"/>
-          <p:cNvSpPr txBox="1"/>
-          <p:nvPr/>
-        </p:nvSpPr>
-        <p:spPr>
-          <a:xfrm>
-            <a:off x="1325880" y="2624328"/>
-            <a:ext cx="4754880" cy="384048"/>
-          </a:xfrm>
-          <a:prstGeom prst="rect">
-            <a:avLst/>
-          </a:prstGeom>
-          <a:noFill/>
-          <a:ln/>
-        </p:spPr>
-        <p:txBody>
-          <a:bodyPr wrap="square" lIns="0" tIns="0" rIns="0" bIns="0" rtlCol="0" anchor="ctr"/>
-          <a:lstStyle/>
-          <a:p>
-            <a:pPr indent="0" marL="0">
-              <a:buNone/>
-            </a:pPr>
-            <a:r>
-              <a:rPr lang="en-US" sz="1700" b="1" dirty="0">
-                <a:solidFill>
-                  <a:schemeClr val="bg1"/>
-                </a:solidFill>
-                <a:latin typeface="Calibri" pitchFamily="34" charset="0"/>
-                <a:ea typeface="Calibri" pitchFamily="34" charset="-122"/>
-                <a:cs typeface="Calibri" pitchFamily="34" charset="-120"/>
-              </a:rPr>
-              <a:t>Anticipación</a:t>
-            </a:r>
-            <a:endParaRPr lang="en-US" sz="1700" dirty="0"/>
-          </a:p>
-        </p:txBody>
-      </p:sp>
-      <p:sp>
-        <p:nvSpPr>
-          <p:cNvPr id="11" name="Desc cond 2"/>
-          <p:cNvSpPr txBox="1"/>
-          <p:nvPr/>
-        </p:nvSpPr>
-        <p:spPr>
-          <a:xfrm>
-            <a:off x="1325880" y="3008376"/>
-            <a:ext cx="4754880" cy="594360"/>
-          </a:xfrm>
-          <a:prstGeom prst="rect">
-            <a:avLst/>
-          </a:prstGeom>
-          <a:noFill/>
-          <a:ln/>
-        </p:spPr>
-        <p:txBody>
-          <a:bodyPr wrap="square" lIns="0" tIns="0" rIns="0" bIns="0" rtlCol="0" anchor="t"/>
-          <a:lstStyle/>
-          <a:p>
-            <a:pPr indent="0" marL="0">
-              <a:buNone/>
-            </a:pPr>
-            <a:r>
-              <a:rPr lang="en-US" sz="1400" dirty="0">
-                <a:solidFill>
-                  <a:schemeClr val="bg2"/>
-                </a:solidFill>
-                <a:latin typeface="Calibri" pitchFamily="34" charset="0"/>
-                <a:ea typeface="Calibri" pitchFamily="34" charset="-122"/>
-                <a:cs typeface="Calibri" pitchFamily="34" charset="-120"/>
-              </a:rPr>
-              <a:t>Reserva con mínimo 3 días de anticipación. Fechas sujetas a disponibilidad.</a:t>
-            </a:r>
-            <a:endParaRPr lang="en-US" sz="1400" dirty="0"/>
-          </a:p>
-        </p:txBody>
-      </p:sp>
-      <p:sp>
-        <p:nvSpPr>
-          <p:cNvPr id="12" name="Condición 3 círculo"/>
-          <p:cNvSpPr/>
-          <p:nvPr/>
-        </p:nvSpPr>
-        <p:spPr>
-          <a:xfrm>
-            <a:off x="548640" y="3831336"/>
-            <a:ext cx="566928" cy="566928"/>
-          </a:xfrm>
-          <a:prstGeom prst="ellipse">
-            <a:avLst/>
-          </a:prstGeom>
-          <a:solidFill>
-            <a:schemeClr val="accent1"/>
-          </a:solidFill>
-          <a:ln/>
-        </p:spPr>
-      </p:sp>
-      <p:pic>
-        <p:nvPicPr>
-          <p:cNvPr id="13" name="Condición 3 ícono" descr="preencoded.png">    </p:cNvPr>
-          <p:cNvPicPr>
-            <a:picLocks noChangeAspect="1"/>
-          </p:cNvPicPr>
-          <p:nvPr/>
-        </p:nvPicPr>
-        <p:blipFill>
-          <a:blip r:embed="rId3"/>
-          <a:stretch>
-            <a:fillRect/>
-          </a:stretch>
-        </p:blipFill>
-        <p:spPr>
-          <a:xfrm>
-            <a:off x="696041" y="3978737"/>
-            <a:ext cx="272125" cy="272125"/>
-          </a:xfrm>
-          <a:prstGeom prst="rect">
-            <a:avLst/>
-          </a:prstGeom>
-        </p:spPr>
-      </p:pic>
-      <p:sp>
-        <p:nvSpPr>
-          <p:cNvPr id="14" name="Título cond 3"/>
-          <p:cNvSpPr txBox="1"/>
-          <p:nvPr/>
-        </p:nvSpPr>
-        <p:spPr>
-          <a:xfrm>
-            <a:off x="1325880" y="3739896"/>
-            <a:ext cx="4754880" cy="384048"/>
-          </a:xfrm>
-          <a:prstGeom prst="rect">
-            <a:avLst/>
-          </a:prstGeom>
-          <a:noFill/>
-          <a:ln/>
-        </p:spPr>
-        <p:txBody>
-          <a:bodyPr wrap="square" lIns="0" tIns="0" rIns="0" bIns="0" rtlCol="0" anchor="ctr"/>
-          <a:lstStyle/>
-          <a:p>
-            <a:pPr indent="0" marL="0">
-              <a:buNone/>
-            </a:pPr>
-            <a:r>
-              <a:rPr lang="en-US" sz="1700" b="1" dirty="0">
-                <a:solidFill>
-                  <a:schemeClr val="bg1"/>
-                </a:solidFill>
-                <a:latin typeface="Calibri" pitchFamily="34" charset="0"/>
-                <a:ea typeface="Calibri" pitchFamily="34" charset="-122"/>
-                <a:cs typeface="Calibri" pitchFamily="34" charset="-120"/>
-              </a:rPr>
-              <a:t>Zona de servicio</a:t>
-            </a:r>
-            <a:endParaRPr lang="en-US" sz="1700" dirty="0"/>
-          </a:p>
-        </p:txBody>
-      </p:sp>
-      <p:sp>
-        <p:nvSpPr>
-          <p:cNvPr id="15" name="Desc cond 3"/>
-          <p:cNvSpPr txBox="1"/>
-          <p:nvPr/>
-        </p:nvSpPr>
-        <p:spPr>
-          <a:xfrm>
-            <a:off x="1325880" y="4123944"/>
-            <a:ext cx="4754880" cy="594360"/>
-          </a:xfrm>
-          <a:prstGeom prst="rect">
-            <a:avLst/>
-          </a:prstGeom>
-          <a:noFill/>
-          <a:ln/>
-        </p:spPr>
-        <p:txBody>
-          <a:bodyPr wrap="square" lIns="0" tIns="0" rIns="0" bIns="0" rtlCol="0" anchor="t"/>
-          <a:lstStyle/>
-          <a:p>
-            <a:pPr indent="0" marL="0">
-              <a:buNone/>
-            </a:pPr>
-            <a:r>
-              <a:rPr lang="en-US" sz="1400" dirty="0">
-                <a:solidFill>
-                  <a:schemeClr val="bg2"/>
-                </a:solidFill>
-                <a:latin typeface="Calibri" pitchFamily="34" charset="0"/>
-                <a:ea typeface="Calibri" pitchFamily="34" charset="-122"/>
-                <a:cs typeface="Calibri" pitchFamily="34" charset="-120"/>
-              </a:rPr>
-              <a:t>Toda la CDMX y el Estado de México. Otras zonas por WhatsApp, con costo de traslado.</a:t>
-            </a:r>
-            <a:endParaRPr lang="en-US" sz="1400" dirty="0"/>
-          </a:p>
-        </p:txBody>
-      </p:sp>
-      <p:sp>
-        <p:nvSpPr>
-          <p:cNvPr id="16" name="Condición 4 círculo"/>
-          <p:cNvSpPr/>
-          <p:nvPr/>
-        </p:nvSpPr>
-        <p:spPr>
-          <a:xfrm>
-            <a:off x="548640" y="4946904"/>
-            <a:ext cx="566928" cy="566928"/>
-          </a:xfrm>
-          <a:prstGeom prst="ellipse">
-            <a:avLst/>
-          </a:prstGeom>
-          <a:solidFill>
-            <a:schemeClr val="accent1"/>
-          </a:solidFill>
-          <a:ln/>
-        </p:spPr>
-      </p:sp>
-      <p:pic>
-        <p:nvPicPr>
-          <p:cNvPr id="17" name="Condición 4 ícono" descr="preencoded.png">    </p:cNvPr>
-          <p:cNvPicPr>
-            <a:picLocks noChangeAspect="1"/>
-          </p:cNvPicPr>
-          <p:nvPr/>
-        </p:nvPicPr>
-        <p:blipFill>
-          <a:blip r:embed="rId4"/>
-          <a:stretch>
-            <a:fillRect/>
-          </a:stretch>
-        </p:blipFill>
-        <p:spPr>
-          <a:xfrm>
-            <a:off x="696041" y="5094305"/>
-            <a:ext cx="272125" cy="272125"/>
-          </a:xfrm>
-          <a:prstGeom prst="rect">
-            <a:avLst/>
-          </a:prstGeom>
-        </p:spPr>
-      </p:pic>
-      <p:sp>
-        <p:nvSpPr>
-          <p:cNvPr id="18" name="Título cond 4"/>
-          <p:cNvSpPr txBox="1"/>
-          <p:nvPr/>
-        </p:nvSpPr>
-        <p:spPr>
-          <a:xfrm>
-            <a:off x="1325880" y="4855464"/>
-            <a:ext cx="4754880" cy="384048"/>
-          </a:xfrm>
-          <a:prstGeom prst="rect">
-            <a:avLst/>
-          </a:prstGeom>
-          <a:noFill/>
-          <a:ln/>
-        </p:spPr>
-        <p:txBody>
-          <a:bodyPr wrap="square" lIns="0" tIns="0" rIns="0" bIns="0" rtlCol="0" anchor="ctr"/>
-          <a:lstStyle/>
-          <a:p>
-            <a:pPr indent="0" marL="0">
-              <a:buNone/>
-            </a:pPr>
-            <a:r>
-              <a:rPr lang="en-US" sz="1700" b="1" dirty="0">
-                <a:solidFill>
-                  <a:schemeClr val="bg1"/>
-                </a:solidFill>
-                <a:latin typeface="Calibri" pitchFamily="34" charset="0"/>
-                <a:ea typeface="Calibri" pitchFamily="34" charset="-122"/>
-                <a:cs typeface="Calibri" pitchFamily="34" charset="-120"/>
-              </a:rPr>
-              <a:t>Facturación</a:t>
-            </a:r>
-            <a:endParaRPr lang="en-US" sz="1700" dirty="0"/>
-          </a:p>
-        </p:txBody>
-      </p:sp>
-      <p:sp>
-        <p:nvSpPr>
-          <p:cNvPr id="19" name="Desc cond 4"/>
-          <p:cNvSpPr txBox="1"/>
-          <p:nvPr/>
-        </p:nvSpPr>
-        <p:spPr>
-          <a:xfrm>
-            <a:off x="1325880" y="5239512"/>
-            <a:ext cx="4754880" cy="594360"/>
-          </a:xfrm>
-          <a:prstGeom prst="rect">
-            <a:avLst/>
-          </a:prstGeom>
-          <a:noFill/>
-          <a:ln/>
-        </p:spPr>
-        <p:txBody>
-          <a:bodyPr wrap="square" lIns="0" tIns="0" rIns="0" bIns="0" rtlCol="0" anchor="t"/>
-          <a:lstStyle/>
-          <a:p>
-            <a:pPr indent="0" marL="0">
-              <a:buNone/>
-            </a:pPr>
-            <a:r>
-              <a:rPr lang="en-US" sz="1400" dirty="0">
-                <a:solidFill>
-                  <a:schemeClr val="bg2"/>
-                </a:solidFill>
-                <a:latin typeface="Calibri" pitchFamily="34" charset="0"/>
-                <a:ea typeface="Calibri" pitchFamily="34" charset="-122"/>
-                <a:cs typeface="Calibri" pitchFamily="34" charset="-120"/>
-              </a:rPr>
-              <a:t>Emitimos factura (CFDI). Comparte tus datos fiscales al cotizar.</a:t>
-            </a:r>
-            <a:endParaRPr lang="en-US" sz="1400" dirty="0"/>
-          </a:p>
-        </p:txBody>
-      </p:sp>
-      <p:sp>
-        <p:nvSpPr>
-          <p:cNvPr id="20" name="Cancelaciones"/>
-          <p:cNvSpPr/>
-          <p:nvPr/>
-        </p:nvSpPr>
-        <p:spPr>
-          <a:xfrm>
-            <a:off x="6583680" y="1508760"/>
-            <a:ext cx="5029200" cy="4434840"/>
+            <a:off x="548640" y="1554480"/>
+            <a:ext cx="2514600" cy="2834640"/>
           </a:xfrm>
           <a:prstGeom prst="roundRect">
             <a:avLst>
-              <a:gd name="adj" fmla="val 2887"/>
+              <a:gd name="adj" fmla="val 5091"/>
             </a:avLst>
           </a:prstGeom>
           <a:solidFill>
@@ -11555,14 +12272,14 @@
       </p:sp>
       <p:sp>
         <p:nvSpPr>
-          <p:cNvPr id="21" name="Título cancelaciones"/>
+          <p:cNvPr id="5" name="Número paso 1"/>
           <p:cNvSpPr txBox="1"/>
           <p:nvPr/>
         </p:nvSpPr>
         <p:spPr>
           <a:xfrm>
-            <a:off x="6858000" y="1737360"/>
-            <a:ext cx="4480560" cy="411480"/>
+            <a:off x="804672" y="1783080"/>
+            <a:ext cx="1097280" cy="685800"/>
           </a:xfrm>
           <a:prstGeom prst="rect">
             <a:avLst/>
@@ -11578,54 +12295,74 @@
               <a:buNone/>
             </a:pPr>
             <a:r>
-              <a:rPr lang="en-US" sz="1600" dirty="0">
-                <a:solidFill>
-                  <a:schemeClr val="bg1"/>
+              <a:rPr lang="en-US" sz="3600" dirty="0">
+                <a:solidFill>
+                  <a:schemeClr val="accent1"/>
                 </a:solidFill>
                 <a:latin typeface="Arial Black" pitchFamily="34" charset="0"/>
                 <a:ea typeface="Arial Black" pitchFamily="34" charset="-122"/>
                 <a:cs typeface="Arial Black" pitchFamily="34" charset="-120"/>
               </a:rPr>
-              <a:t>CANCELACIONES</a:t>
-            </a:r>
-            <a:endParaRPr lang="en-US" sz="1600" dirty="0"/>
-          </a:p>
-        </p:txBody>
-      </p:sp>
-      <p:sp>
-        <p:nvSpPr>
-          <p:cNvPr id="22" name="Fila canc 1"/>
+              <a:t>01</a:t>
+            </a:r>
+            <a:endParaRPr lang="en-US" sz="3600" dirty="0"/>
+          </a:p>
+        </p:txBody>
+      </p:sp>
+      <p:sp>
+        <p:nvSpPr>
+          <p:cNvPr id="6" name="Paso 1 círculo"/>
           <p:cNvSpPr/>
           <p:nvPr/>
         </p:nvSpPr>
         <p:spPr>
           <a:xfrm>
-            <a:off x="6858000" y="2331720"/>
-            <a:ext cx="4480560" cy="621792"/>
-          </a:xfrm>
-          <a:prstGeom prst="roundRect">
-            <a:avLst>
-              <a:gd name="adj" fmla="val 14706"/>
-            </a:avLst>
+            <a:off x="2240280" y="1810512"/>
+            <a:ext cx="566928" cy="566928"/>
+          </a:xfrm>
+          <a:prstGeom prst="ellipse">
+            <a:avLst/>
           </a:prstGeom>
           <a:solidFill>
-            <a:schemeClr val="bg1">
-              <a:alpha val="6000"/>
-            </a:schemeClr>
+            <a:schemeClr val="accent1"/>
           </a:solidFill>
           <a:ln/>
         </p:spPr>
       </p:sp>
-      <p:sp>
-        <p:nvSpPr>
-          <p:cNvPr id="23" name="Plazo 1"/>
+      <p:pic>
+        <p:nvPicPr>
+          <p:cNvPr id="7" name="Paso 1 ícono" descr="preencoded.png">    </p:cNvPr>
+          <p:cNvPicPr>
+            <a:picLocks noChangeAspect="1"/>
+          </p:cNvPicPr>
+          <p:nvPr/>
+        </p:nvPicPr>
+        <p:blipFill>
+          <a:blip r:embed="rId1"/>
+          <a:stretch>
+            <a:fillRect/>
+          </a:stretch>
+        </p:blipFill>
+        <p:spPr>
+          <a:xfrm>
+            <a:off x="2387681" y="1957913"/>
+            <a:ext cx="272125" cy="272125"/>
+          </a:xfrm>
+          <a:prstGeom prst="rect">
+            <a:avLst/>
+          </a:prstGeom>
+        </p:spPr>
+      </p:pic>
+      <p:sp>
+        <p:nvSpPr>
+          <p:cNvPr id="8" name="Título paso 1"/>
           <p:cNvSpPr txBox="1"/>
           <p:nvPr/>
         </p:nvSpPr>
         <p:spPr>
           <a:xfrm>
-            <a:off x="7040880" y="2331720"/>
-            <a:ext cx="2286000" cy="621792"/>
+            <a:off x="804672" y="2651760"/>
+            <a:ext cx="2057400" cy="457200"/>
           </a:xfrm>
           <a:prstGeom prst="rect">
             <a:avLst/>
@@ -11641,7 +12378,7 @@
               <a:buNone/>
             </a:pPr>
             <a:r>
-              <a:rPr lang="en-US" sz="1400" dirty="0">
+              <a:rPr lang="en-US" sz="1800" b="1" dirty="0">
                 <a:solidFill>
                   <a:schemeClr val="bg1"/>
                 </a:solidFill>
@@ -11649,22 +12386,22 @@
                 <a:ea typeface="Calibri" pitchFamily="34" charset="-122"/>
                 <a:cs typeface="Calibri" pitchFamily="34" charset="-120"/>
               </a:rPr>
-              <a:t>7 días o más</a:t>
-            </a:r>
-            <a:endParaRPr lang="en-US" sz="1400" dirty="0"/>
-          </a:p>
-        </p:txBody>
-      </p:sp>
-      <p:sp>
-        <p:nvSpPr>
-          <p:cNvPr id="24" name="Reembolso 1"/>
+              <a:t>Elige tu barra</a:t>
+            </a:r>
+            <a:endParaRPr lang="en-US" sz="1800" dirty="0"/>
+          </a:p>
+        </p:txBody>
+      </p:sp>
+      <p:sp>
+        <p:nvSpPr>
+          <p:cNvPr id="9" name="Desc paso 1"/>
           <p:cNvSpPr txBox="1"/>
           <p:nvPr/>
         </p:nvSpPr>
         <p:spPr>
           <a:xfrm>
-            <a:off x="9235440" y="2331720"/>
-            <a:ext cx="1965960" cy="621792"/>
+            <a:off x="804672" y="3154680"/>
+            <a:ext cx="2057400" cy="1463040"/>
           </a:xfrm>
           <a:prstGeom prst="rect">
             <a:avLst/>
@@ -11673,61 +12410,92 @@
           <a:ln/>
         </p:spPr>
         <p:txBody>
-          <a:bodyPr wrap="square" lIns="0" tIns="0" rIns="0" bIns="0" rtlCol="0" anchor="ctr"/>
-          <a:lstStyle/>
-          <a:p>
-            <a:pPr algn="r" indent="0" marL="0">
+          <a:bodyPr wrap="square" lIns="0" tIns="0" rIns="0" bIns="0" rtlCol="0" anchor="t"/>
+          <a:lstStyle/>
+          <a:p>
+            <a:pPr indent="0" marL="0">
               <a:buNone/>
             </a:pPr>
             <a:r>
-              <a:rPr lang="en-US" sz="1400" b="1" dirty="0">
-                <a:solidFill>
-                  <a:schemeClr val="accent4"/>
+              <a:rPr lang="en-US" sz="1400" dirty="0">
+                <a:solidFill>
+                  <a:schemeClr val="bg2"/>
                 </a:solidFill>
                 <a:latin typeface="Calibri" pitchFamily="34" charset="0"/>
                 <a:ea typeface="Calibri" pitchFamily="34" charset="-122"/>
                 <a:cs typeface="Calibri" pitchFamily="34" charset="-120"/>
               </a:rPr>
-              <a:t>70% del anticipo</a:t>
+              <a:t>Chilaquiles, maruchan, gomitas o cantaritos. Los precios se ajustan solos.</a:t>
             </a:r>
             <a:endParaRPr lang="en-US" sz="1400" dirty="0"/>
           </a:p>
         </p:txBody>
       </p:sp>
-      <p:sp>
-        <p:nvSpPr>
-          <p:cNvPr id="25" name="Fila canc 2"/>
+      <p:pic>
+        <p:nvPicPr>
+          <p:cNvPr id="10" name="Flecha 1" descr="preencoded.png">    </p:cNvPr>
+          <p:cNvPicPr>
+            <a:picLocks noChangeAspect="1"/>
+          </p:cNvPicPr>
+          <p:nvPr/>
+        </p:nvPicPr>
+        <p:blipFill>
+          <a:blip r:embed="rId2"/>
+          <a:stretch>
+            <a:fillRect/>
+          </a:stretch>
+        </p:blipFill>
+        <p:spPr>
+          <a:xfrm>
+            <a:off x="3099816" y="3017520"/>
+            <a:ext cx="237744" cy="237744"/>
+          </a:xfrm>
+          <a:prstGeom prst="rect">
+            <a:avLst/>
+          </a:prstGeom>
+        </p:spPr>
+      </p:pic>
+      <p:sp>
+        <p:nvSpPr>
+          <p:cNvPr id="11" name="Paso 2"/>
           <p:cNvSpPr/>
           <p:nvPr/>
         </p:nvSpPr>
         <p:spPr>
           <a:xfrm>
-            <a:off x="6858000" y="3081528"/>
-            <a:ext cx="4480560" cy="621792"/>
+            <a:off x="3364992" y="1554480"/>
+            <a:ext cx="2514600" cy="2834640"/>
           </a:xfrm>
           <a:prstGeom prst="roundRect">
             <a:avLst>
-              <a:gd name="adj" fmla="val 14706"/>
+              <a:gd name="adj" fmla="val 5091"/>
             </a:avLst>
           </a:prstGeom>
           <a:solidFill>
-            <a:schemeClr val="bg1">
-              <a:alpha val="6000"/>
+            <a:schemeClr val="tx2">
+              <a:alpha val="82000"/>
             </a:schemeClr>
           </a:solidFill>
-          <a:ln/>
-        </p:spPr>
-      </p:sp>
-      <p:sp>
-        <p:nvSpPr>
-          <p:cNvPr id="26" name="Plazo 2"/>
+          <a:ln w="12700">
+            <a:solidFill>
+              <a:schemeClr val="accent1">
+                <a:alpha val="55000"/>
+              </a:schemeClr>
+            </a:solidFill>
+            <a:prstDash val="solid"/>
+          </a:ln>
+        </p:spPr>
+      </p:sp>
+      <p:sp>
+        <p:nvSpPr>
+          <p:cNvPr id="12" name="Número paso 2"/>
           <p:cNvSpPr txBox="1"/>
           <p:nvPr/>
         </p:nvSpPr>
         <p:spPr>
           <a:xfrm>
-            <a:off x="7040880" y="3081528"/>
-            <a:ext cx="2286000" cy="621792"/>
+            <a:off x="3621024" y="1783080"/>
+            <a:ext cx="1097280" cy="685800"/>
           </a:xfrm>
           <a:prstGeom prst="rect">
             <a:avLst/>
@@ -11743,7 +12511,90 @@
               <a:buNone/>
             </a:pPr>
             <a:r>
-              <a:rPr lang="en-US" sz="1400" dirty="0">
+              <a:rPr lang="en-US" sz="3600" dirty="0">
+                <a:solidFill>
+                  <a:schemeClr val="accent1"/>
+                </a:solidFill>
+                <a:latin typeface="Arial Black" pitchFamily="34" charset="0"/>
+                <a:ea typeface="Arial Black" pitchFamily="34" charset="-122"/>
+                <a:cs typeface="Arial Black" pitchFamily="34" charset="-120"/>
+              </a:rPr>
+              <a:t>02</a:t>
+            </a:r>
+            <a:endParaRPr lang="en-US" sz="3600" dirty="0"/>
+          </a:p>
+        </p:txBody>
+      </p:sp>
+      <p:sp>
+        <p:nvSpPr>
+          <p:cNvPr id="13" name="Paso 2 círculo"/>
+          <p:cNvSpPr/>
+          <p:nvPr/>
+        </p:nvSpPr>
+        <p:spPr>
+          <a:xfrm>
+            <a:off x="5056632" y="1810512"/>
+            <a:ext cx="566928" cy="566928"/>
+          </a:xfrm>
+          <a:prstGeom prst="ellipse">
+            <a:avLst/>
+          </a:prstGeom>
+          <a:solidFill>
+            <a:schemeClr val="accent1"/>
+          </a:solidFill>
+          <a:ln/>
+        </p:spPr>
+      </p:sp>
+      <p:pic>
+        <p:nvPicPr>
+          <p:cNvPr id="14" name="Paso 2 ícono" descr="preencoded.png">    </p:cNvPr>
+          <p:cNvPicPr>
+            <a:picLocks noChangeAspect="1"/>
+          </p:cNvPicPr>
+          <p:nvPr/>
+        </p:nvPicPr>
+        <p:blipFill>
+          <a:blip r:embed="rId3"/>
+          <a:stretch>
+            <a:fillRect/>
+          </a:stretch>
+        </p:blipFill>
+        <p:spPr>
+          <a:xfrm>
+            <a:off x="5204033" y="1957913"/>
+            <a:ext cx="272125" cy="272125"/>
+          </a:xfrm>
+          <a:prstGeom prst="rect">
+            <a:avLst/>
+          </a:prstGeom>
+        </p:spPr>
+      </p:pic>
+      <p:sp>
+        <p:nvSpPr>
+          <p:cNvPr id="15" name="Título paso 2"/>
+          <p:cNvSpPr txBox="1"/>
+          <p:nvPr/>
+        </p:nvSpPr>
+        <p:spPr>
+          <a:xfrm>
+            <a:off x="3621024" y="2651760"/>
+            <a:ext cx="2057400" cy="457200"/>
+          </a:xfrm>
+          <a:prstGeom prst="rect">
+            <a:avLst/>
+          </a:prstGeom>
+          <a:noFill/>
+          <a:ln/>
+        </p:spPr>
+        <p:txBody>
+          <a:bodyPr wrap="square" lIns="0" tIns="0" rIns="0" bIns="0" rtlCol="0" anchor="ctr"/>
+          <a:lstStyle/>
+          <a:p>
+            <a:pPr indent="0" marL="0">
+              <a:buNone/>
+            </a:pPr>
+            <a:r>
+              <a:rPr lang="en-US" sz="1800" b="1" dirty="0">
                 <a:solidFill>
                   <a:schemeClr val="bg1"/>
                 </a:solidFill>
@@ -11751,22 +12602,22 @@
                 <a:ea typeface="Calibri" pitchFamily="34" charset="-122"/>
                 <a:cs typeface="Calibri" pitchFamily="34" charset="-120"/>
               </a:rPr>
-              <a:t>Entre 3 y 6 días</a:t>
-            </a:r>
-            <a:endParaRPr lang="en-US" sz="1400" dirty="0"/>
-          </a:p>
-        </p:txBody>
-      </p:sp>
-      <p:sp>
-        <p:nvSpPr>
-          <p:cNvPr id="27" name="Reembolso 2"/>
+              <a:t>Elige tu paquete</a:t>
+            </a:r>
+            <a:endParaRPr lang="en-US" sz="1800" dirty="0"/>
+          </a:p>
+        </p:txBody>
+      </p:sp>
+      <p:sp>
+        <p:nvSpPr>
+          <p:cNvPr id="16" name="Desc paso 2"/>
           <p:cNvSpPr txBox="1"/>
           <p:nvPr/>
         </p:nvSpPr>
         <p:spPr>
           <a:xfrm>
-            <a:off x="9235440" y="3081528"/>
-            <a:ext cx="1965960" cy="621792"/>
+            <a:off x="3621024" y="3154680"/>
+            <a:ext cx="2057400" cy="1463040"/>
           </a:xfrm>
           <a:prstGeom prst="rect">
             <a:avLst/>
@@ -11775,61 +12626,92 @@
           <a:ln/>
         </p:spPr>
         <p:txBody>
-          <a:bodyPr wrap="square" lIns="0" tIns="0" rIns="0" bIns="0" rtlCol="0" anchor="ctr"/>
-          <a:lstStyle/>
-          <a:p>
-            <a:pPr algn="r" indent="0" marL="0">
+          <a:bodyPr wrap="square" lIns="0" tIns="0" rIns="0" bIns="0" rtlCol="0" anchor="t"/>
+          <a:lstStyle/>
+          <a:p>
+            <a:pPr indent="0" marL="0">
               <a:buNone/>
             </a:pPr>
             <a:r>
-              <a:rPr lang="en-US" sz="1400" b="1" dirty="0">
-                <a:solidFill>
-                  <a:schemeClr val="accent4"/>
+              <a:rPr lang="en-US" sz="1400" dirty="0">
+                <a:solidFill>
+                  <a:schemeClr val="bg2"/>
                 </a:solidFill>
                 <a:latin typeface="Calibri" pitchFamily="34" charset="0"/>
                 <a:ea typeface="Calibri" pitchFamily="34" charset="-122"/>
                 <a:cs typeface="Calibri" pitchFamily="34" charset="-120"/>
               </a:rPr>
-              <a:t>30% del anticipo</a:t>
+              <a:t>Ajusta personas, porciones, sabores, proteínas, tequila y extras.</a:t>
             </a:r>
             <a:endParaRPr lang="en-US" sz="1400" dirty="0"/>
           </a:p>
         </p:txBody>
       </p:sp>
-      <p:sp>
-        <p:nvSpPr>
-          <p:cNvPr id="28" name="Fila canc 3"/>
+      <p:pic>
+        <p:nvPicPr>
+          <p:cNvPr id="17" name="Flecha 2" descr="preencoded.png">    </p:cNvPr>
+          <p:cNvPicPr>
+            <a:picLocks noChangeAspect="1"/>
+          </p:cNvPicPr>
+          <p:nvPr/>
+        </p:nvPicPr>
+        <p:blipFill>
+          <a:blip r:embed="rId4"/>
+          <a:stretch>
+            <a:fillRect/>
+          </a:stretch>
+        </p:blipFill>
+        <p:spPr>
+          <a:xfrm>
+            <a:off x="5916168" y="3017520"/>
+            <a:ext cx="237744" cy="237744"/>
+          </a:xfrm>
+          <a:prstGeom prst="rect">
+            <a:avLst/>
+          </a:prstGeom>
+        </p:spPr>
+      </p:pic>
+      <p:sp>
+        <p:nvSpPr>
+          <p:cNvPr id="18" name="Paso 3"/>
           <p:cNvSpPr/>
           <p:nvPr/>
         </p:nvSpPr>
         <p:spPr>
           <a:xfrm>
-            <a:off x="6858000" y="3831336"/>
-            <a:ext cx="4480560" cy="621792"/>
+            <a:off x="6181344" y="1554480"/>
+            <a:ext cx="2514600" cy="2834640"/>
           </a:xfrm>
           <a:prstGeom prst="roundRect">
             <a:avLst>
-              <a:gd name="adj" fmla="val 14706"/>
+              <a:gd name="adj" fmla="val 5091"/>
             </a:avLst>
           </a:prstGeom>
           <a:solidFill>
-            <a:schemeClr val="bg1">
-              <a:alpha val="6000"/>
+            <a:schemeClr val="tx2">
+              <a:alpha val="82000"/>
             </a:schemeClr>
           </a:solidFill>
-          <a:ln/>
-        </p:spPr>
-      </p:sp>
-      <p:sp>
-        <p:nvSpPr>
-          <p:cNvPr id="29" name="Plazo 3"/>
+          <a:ln w="12700">
+            <a:solidFill>
+              <a:schemeClr val="accent1">
+                <a:alpha val="55000"/>
+              </a:schemeClr>
+            </a:solidFill>
+            <a:prstDash val="solid"/>
+          </a:ln>
+        </p:spPr>
+      </p:sp>
+      <p:sp>
+        <p:nvSpPr>
+          <p:cNvPr id="19" name="Número paso 3"/>
           <p:cNvSpPr txBox="1"/>
           <p:nvPr/>
         </p:nvSpPr>
         <p:spPr>
           <a:xfrm>
-            <a:off x="7040880" y="3831336"/>
-            <a:ext cx="2286000" cy="621792"/>
+            <a:off x="6437376" y="1783080"/>
+            <a:ext cx="1097280" cy="685800"/>
           </a:xfrm>
           <a:prstGeom prst="rect">
             <a:avLst/>
@@ -11845,7 +12727,90 @@
               <a:buNone/>
             </a:pPr>
             <a:r>
-              <a:rPr lang="en-US" sz="1400" dirty="0">
+              <a:rPr lang="en-US" sz="3600" dirty="0">
+                <a:solidFill>
+                  <a:schemeClr val="accent1"/>
+                </a:solidFill>
+                <a:latin typeface="Arial Black" pitchFamily="34" charset="0"/>
+                <a:ea typeface="Arial Black" pitchFamily="34" charset="-122"/>
+                <a:cs typeface="Arial Black" pitchFamily="34" charset="-120"/>
+              </a:rPr>
+              <a:t>03</a:t>
+            </a:r>
+            <a:endParaRPr lang="en-US" sz="3600" dirty="0"/>
+          </a:p>
+        </p:txBody>
+      </p:sp>
+      <p:sp>
+        <p:nvSpPr>
+          <p:cNvPr id="20" name="Paso 3 círculo"/>
+          <p:cNvSpPr/>
+          <p:nvPr/>
+        </p:nvSpPr>
+        <p:spPr>
+          <a:xfrm>
+            <a:off x="7872984" y="1810512"/>
+            <a:ext cx="566928" cy="566928"/>
+          </a:xfrm>
+          <a:prstGeom prst="ellipse">
+            <a:avLst/>
+          </a:prstGeom>
+          <a:solidFill>
+            <a:schemeClr val="accent1"/>
+          </a:solidFill>
+          <a:ln/>
+        </p:spPr>
+      </p:sp>
+      <p:pic>
+        <p:nvPicPr>
+          <p:cNvPr id="21" name="Paso 3 ícono" descr="preencoded.png">    </p:cNvPr>
+          <p:cNvPicPr>
+            <a:picLocks noChangeAspect="1"/>
+          </p:cNvPicPr>
+          <p:nvPr/>
+        </p:nvPicPr>
+        <p:blipFill>
+          <a:blip r:embed="rId5"/>
+          <a:stretch>
+            <a:fillRect/>
+          </a:stretch>
+        </p:blipFill>
+        <p:spPr>
+          <a:xfrm>
+            <a:off x="8020385" y="1957913"/>
+            <a:ext cx="272125" cy="272125"/>
+          </a:xfrm>
+          <a:prstGeom prst="rect">
+            <a:avLst/>
+          </a:prstGeom>
+        </p:spPr>
+      </p:pic>
+      <p:sp>
+        <p:nvSpPr>
+          <p:cNvPr id="22" name="Título paso 3"/>
+          <p:cNvSpPr txBox="1"/>
+          <p:nvPr/>
+        </p:nvSpPr>
+        <p:spPr>
+          <a:xfrm>
+            <a:off x="6437376" y="2651760"/>
+            <a:ext cx="2057400" cy="457200"/>
+          </a:xfrm>
+          <a:prstGeom prst="rect">
+            <a:avLst/>
+          </a:prstGeom>
+          <a:noFill/>
+          <a:ln/>
+        </p:spPr>
+        <p:txBody>
+          <a:bodyPr wrap="square" lIns="0" tIns="0" rIns="0" bIns="0" rtlCol="0" anchor="ctr"/>
+          <a:lstStyle/>
+          <a:p>
+            <a:pPr indent="0" marL="0">
+              <a:buNone/>
+            </a:pPr>
+            <a:r>
+              <a:rPr lang="en-US" sz="1800" b="1" dirty="0">
                 <a:solidFill>
                   <a:schemeClr val="bg1"/>
                 </a:solidFill>
@@ -11853,22 +12818,22 @@
                 <a:ea typeface="Calibri" pitchFamily="34" charset="-122"/>
                 <a:cs typeface="Calibri" pitchFamily="34" charset="-120"/>
               </a:rPr>
-              <a:t>Menos de 3 días</a:t>
-            </a:r>
-            <a:endParaRPr lang="en-US" sz="1400" dirty="0"/>
-          </a:p>
-        </p:txBody>
-      </p:sp>
-      <p:sp>
-        <p:nvSpPr>
-          <p:cNvPr id="30" name="Reembolso 3"/>
+              <a:t>Fecha y datos</a:t>
+            </a:r>
+            <a:endParaRPr lang="en-US" sz="1800" dirty="0"/>
+          </a:p>
+        </p:txBody>
+      </p:sp>
+      <p:sp>
+        <p:nvSpPr>
+          <p:cNvPr id="23" name="Desc paso 3"/>
           <p:cNvSpPr txBox="1"/>
           <p:nvPr/>
         </p:nvSpPr>
         <p:spPr>
           <a:xfrm>
-            <a:off x="9235440" y="3831336"/>
-            <a:ext cx="1965960" cy="621792"/>
+            <a:off x="6437376" y="3154680"/>
+            <a:ext cx="2057400" cy="1463040"/>
           </a:xfrm>
           <a:prstGeom prst="rect">
             <a:avLst/>
@@ -11877,14 +12842,14 @@
           <a:ln/>
         </p:spPr>
         <p:txBody>
-          <a:bodyPr wrap="square" lIns="0" tIns="0" rIns="0" bIns="0" rtlCol="0" anchor="ctr"/>
-          <a:lstStyle/>
-          <a:p>
-            <a:pPr algn="r" indent="0" marL="0">
+          <a:bodyPr wrap="square" lIns="0" tIns="0" rIns="0" bIns="0" rtlCol="0" anchor="t"/>
+          <a:lstStyle/>
+          <a:p>
+            <a:pPr indent="0" marL="0">
               <a:buNone/>
             </a:pPr>
             <a:r>
-              <a:rPr lang="en-US" sz="1400" b="1" dirty="0">
+              <a:rPr lang="en-US" sz="1400" dirty="0">
                 <a:solidFill>
                   <a:schemeClr val="bg2"/>
                 </a:solidFill>
@@ -11892,46 +12857,77 @@
                 <a:ea typeface="Calibri" pitchFamily="34" charset="-122"/>
                 <a:cs typeface="Calibri" pitchFamily="34" charset="-120"/>
               </a:rPr>
-              <a:t>Sin reembolso</a:t>
+              <a:t>El calendario te muestra los días disponibles: viernes, sábado y domingo.</a:t>
             </a:r>
             <a:endParaRPr lang="en-US" sz="1400" dirty="0"/>
           </a:p>
         </p:txBody>
       </p:sp>
-      <p:sp>
-        <p:nvSpPr>
-          <p:cNvPr id="31" name="Fila canc 4"/>
+      <p:pic>
+        <p:nvPicPr>
+          <p:cNvPr id="24" name="Flecha 3" descr="preencoded.png">    </p:cNvPr>
+          <p:cNvPicPr>
+            <a:picLocks noChangeAspect="1"/>
+          </p:cNvPicPr>
+          <p:nvPr/>
+        </p:nvPicPr>
+        <p:blipFill>
+          <a:blip r:embed="rId6"/>
+          <a:stretch>
+            <a:fillRect/>
+          </a:stretch>
+        </p:blipFill>
+        <p:spPr>
+          <a:xfrm>
+            <a:off x="8732520" y="3017520"/>
+            <a:ext cx="237744" cy="237744"/>
+          </a:xfrm>
+          <a:prstGeom prst="rect">
+            <a:avLst/>
+          </a:prstGeom>
+        </p:spPr>
+      </p:pic>
+      <p:sp>
+        <p:nvSpPr>
+          <p:cNvPr id="25" name="Paso 4"/>
           <p:cNvSpPr/>
           <p:nvPr/>
         </p:nvSpPr>
         <p:spPr>
           <a:xfrm>
-            <a:off x="6858000" y="4581144"/>
-            <a:ext cx="4480560" cy="621792"/>
+            <a:off x="8997696" y="1554480"/>
+            <a:ext cx="2514600" cy="2834640"/>
           </a:xfrm>
           <a:prstGeom prst="roundRect">
             <a:avLst>
-              <a:gd name="adj" fmla="val 14706"/>
+              <a:gd name="adj" fmla="val 5091"/>
             </a:avLst>
           </a:prstGeom>
           <a:solidFill>
-            <a:schemeClr val="bg1">
-              <a:alpha val="6000"/>
+            <a:schemeClr val="tx2">
+              <a:alpha val="82000"/>
             </a:schemeClr>
           </a:solidFill>
-          <a:ln/>
-        </p:spPr>
-      </p:sp>
-      <p:sp>
-        <p:nvSpPr>
-          <p:cNvPr id="32" name="Plazo 4"/>
+          <a:ln w="12700">
+            <a:solidFill>
+              <a:schemeClr val="accent1">
+                <a:alpha val="55000"/>
+              </a:schemeClr>
+            </a:solidFill>
+            <a:prstDash val="solid"/>
+          </a:ln>
+        </p:spPr>
+      </p:sp>
+      <p:sp>
+        <p:nvSpPr>
+          <p:cNvPr id="26" name="Número paso 4"/>
           <p:cNvSpPr txBox="1"/>
           <p:nvPr/>
         </p:nvSpPr>
         <p:spPr>
           <a:xfrm>
-            <a:off x="7040880" y="4581144"/>
-            <a:ext cx="2286000" cy="621792"/>
+            <a:off x="9253728" y="1783080"/>
+            <a:ext cx="1097280" cy="685800"/>
           </a:xfrm>
           <a:prstGeom prst="rect">
             <a:avLst/>
@@ -11947,7 +12943,90 @@
               <a:buNone/>
             </a:pPr>
             <a:r>
-              <a:rPr lang="en-US" sz="1400" dirty="0">
+              <a:rPr lang="en-US" sz="3600" dirty="0">
+                <a:solidFill>
+                  <a:schemeClr val="accent1"/>
+                </a:solidFill>
+                <a:latin typeface="Arial Black" pitchFamily="34" charset="0"/>
+                <a:ea typeface="Arial Black" pitchFamily="34" charset="-122"/>
+                <a:cs typeface="Arial Black" pitchFamily="34" charset="-120"/>
+              </a:rPr>
+              <a:t>04</a:t>
+            </a:r>
+            <a:endParaRPr lang="en-US" sz="3600" dirty="0"/>
+          </a:p>
+        </p:txBody>
+      </p:sp>
+      <p:sp>
+        <p:nvSpPr>
+          <p:cNvPr id="27" name="Paso 4 círculo"/>
+          <p:cNvSpPr/>
+          <p:nvPr/>
+        </p:nvSpPr>
+        <p:spPr>
+          <a:xfrm>
+            <a:off x="10689336" y="1810512"/>
+            <a:ext cx="566928" cy="566928"/>
+          </a:xfrm>
+          <a:prstGeom prst="ellipse">
+            <a:avLst/>
+          </a:prstGeom>
+          <a:solidFill>
+            <a:schemeClr val="accent1"/>
+          </a:solidFill>
+          <a:ln/>
+        </p:spPr>
+      </p:sp>
+      <p:pic>
+        <p:nvPicPr>
+          <p:cNvPr id="28" name="Paso 4 ícono" descr="preencoded.png">    </p:cNvPr>
+          <p:cNvPicPr>
+            <a:picLocks noChangeAspect="1"/>
+          </p:cNvPicPr>
+          <p:nvPr/>
+        </p:nvPicPr>
+        <p:blipFill>
+          <a:blip r:embed="rId7"/>
+          <a:stretch>
+            <a:fillRect/>
+          </a:stretch>
+        </p:blipFill>
+        <p:spPr>
+          <a:xfrm>
+            <a:off x="10836737" y="1957913"/>
+            <a:ext cx="272125" cy="272125"/>
+          </a:xfrm>
+          <a:prstGeom prst="rect">
+            <a:avLst/>
+          </a:prstGeom>
+        </p:spPr>
+      </p:pic>
+      <p:sp>
+        <p:nvSpPr>
+          <p:cNvPr id="29" name="Título paso 4"/>
+          <p:cNvSpPr txBox="1"/>
+          <p:nvPr/>
+        </p:nvSpPr>
+        <p:spPr>
+          <a:xfrm>
+            <a:off x="9253728" y="2651760"/>
+            <a:ext cx="2057400" cy="457200"/>
+          </a:xfrm>
+          <a:prstGeom prst="rect">
+            <a:avLst/>
+          </a:prstGeom>
+          <a:noFill/>
+          <a:ln/>
+        </p:spPr>
+        <p:txBody>
+          <a:bodyPr wrap="square" lIns="0" tIns="0" rIns="0" bIns="0" rtlCol="0" anchor="ctr"/>
+          <a:lstStyle/>
+          <a:p>
+            <a:pPr indent="0" marL="0">
+              <a:buNone/>
+            </a:pPr>
+            <a:r>
+              <a:rPr lang="en-US" sz="1800" b="1" dirty="0">
                 <a:solidFill>
                   <a:schemeClr val="bg1"/>
                 </a:solidFill>
@@ -11955,22 +13034,22 @@
                 <a:ea typeface="Calibri" pitchFamily="34" charset="-122"/>
                 <a:cs typeface="Calibri" pitchFamily="34" charset="-120"/>
               </a:rPr>
-              <a:t>Si cancelamos nosotros</a:t>
-            </a:r>
-            <a:endParaRPr lang="en-US" sz="1400" dirty="0"/>
-          </a:p>
-        </p:txBody>
-      </p:sp>
-      <p:sp>
-        <p:nvSpPr>
-          <p:cNvPr id="33" name="Reembolso 4"/>
+              <a:t>Recibe tu PDF</a:t>
+            </a:r>
+            <a:endParaRPr lang="en-US" sz="1800" dirty="0"/>
+          </a:p>
+        </p:txBody>
+      </p:sp>
+      <p:sp>
+        <p:nvSpPr>
+          <p:cNvPr id="30" name="Desc paso 4"/>
           <p:cNvSpPr txBox="1"/>
           <p:nvPr/>
         </p:nvSpPr>
         <p:spPr>
           <a:xfrm>
-            <a:off x="9235440" y="4581144"/>
-            <a:ext cx="1965960" cy="621792"/>
+            <a:off x="9253728" y="3154680"/>
+            <a:ext cx="2057400" cy="1463040"/>
           </a:xfrm>
           <a:prstGeom prst="rect">
             <a:avLst/>
@@ -11979,22 +13058,22 @@
           <a:ln/>
         </p:spPr>
         <p:txBody>
-          <a:bodyPr wrap="square" lIns="0" tIns="0" rIns="0" bIns="0" rtlCol="0" anchor="ctr"/>
-          <a:lstStyle/>
-          <a:p>
-            <a:pPr algn="r" indent="0" marL="0">
+          <a:bodyPr wrap="square" lIns="0" tIns="0" rIns="0" bIns="0" rtlCol="0" anchor="t"/>
+          <a:lstStyle/>
+          <a:p>
+            <a:pPr indent="0" marL="0">
               <a:buNone/>
             </a:pPr>
             <a:r>
-              <a:rPr lang="en-US" sz="1400" b="1" dirty="0">
-                <a:solidFill>
-                  <a:schemeClr val="accent4"/>
+              <a:rPr lang="en-US" sz="1400" dirty="0">
+                <a:solidFill>
+                  <a:schemeClr val="bg2"/>
                 </a:solidFill>
                 <a:latin typeface="Calibri" pitchFamily="34" charset="0"/>
                 <a:ea typeface="Calibri" pitchFamily="34" charset="-122"/>
                 <a:cs typeface="Calibri" pitchFamily="34" charset="-120"/>
               </a:rPr>
-              <a:t>100% del anticipo</a:t>
+              <a:t>Te llega tu cotización con folio. Síguela en "Rastrea tu cotización".</a:t>
             </a:r>
             <a:endParaRPr lang="en-US" sz="1400" dirty="0"/>
           </a:p>
@@ -12002,14 +13081,89 @@
       </p:sp>
       <p:sp>
         <p:nvSpPr>
-          <p:cNvPr id="34" name="Fuerza mayor"/>
+          <p:cNvPr id="31" name="Aparta tu fecha"/>
+          <p:cNvSpPr/>
+          <p:nvPr/>
+        </p:nvSpPr>
+        <p:spPr>
+          <a:xfrm>
+            <a:off x="548640" y="4709160"/>
+            <a:ext cx="11064240" cy="1005840"/>
+          </a:xfrm>
+          <a:prstGeom prst="roundRect">
+            <a:avLst>
+              <a:gd name="adj" fmla="val 12727"/>
+            </a:avLst>
+          </a:prstGeom>
+          <a:solidFill>
+            <a:schemeClr val="accent1">
+              <a:alpha val="30000"/>
+            </a:schemeClr>
+          </a:solidFill>
+          <a:ln w="12700">
+            <a:solidFill>
+              <a:schemeClr val="accent1">
+                <a:alpha val="80000"/>
+              </a:schemeClr>
+            </a:solidFill>
+            <a:prstDash val="solid"/>
+          </a:ln>
+        </p:spPr>
+      </p:sp>
+      <p:sp>
+        <p:nvSpPr>
+          <p:cNvPr id="32" name="Aparta círculo"/>
+          <p:cNvSpPr/>
+          <p:nvPr/>
+        </p:nvSpPr>
+        <p:spPr>
+          <a:xfrm>
+            <a:off x="777240" y="4910328"/>
+            <a:ext cx="594360" cy="594360"/>
+          </a:xfrm>
+          <a:prstGeom prst="ellipse">
+            <a:avLst/>
+          </a:prstGeom>
+          <a:solidFill>
+            <a:schemeClr val="bg1"/>
+          </a:solidFill>
+          <a:ln/>
+        </p:spPr>
+      </p:sp>
+      <p:pic>
+        <p:nvPicPr>
+          <p:cNvPr id="33" name="Aparta ícono" descr="preencoded.png">    </p:cNvPr>
+          <p:cNvPicPr>
+            <a:picLocks noChangeAspect="1"/>
+          </p:cNvPicPr>
+          <p:nvPr/>
+        </p:nvPicPr>
+        <p:blipFill>
+          <a:blip r:embed="rId8"/>
+          <a:stretch>
+            <a:fillRect/>
+          </a:stretch>
+        </p:blipFill>
+        <p:spPr>
+          <a:xfrm>
+            <a:off x="931774" y="5064862"/>
+            <a:ext cx="285293" cy="285293"/>
+          </a:xfrm>
+          <a:prstGeom prst="rect">
+            <a:avLst/>
+          </a:prstGeom>
+        </p:spPr>
+      </p:pic>
+      <p:sp>
+        <p:nvSpPr>
+          <p:cNvPr id="34" name="Texto aparta"/>
           <p:cNvSpPr txBox="1"/>
           <p:nvPr/>
         </p:nvSpPr>
         <p:spPr>
           <a:xfrm>
-            <a:off x="6858000" y="5349240"/>
-            <a:ext cx="4480560" cy="457200"/>
+            <a:off x="1600200" y="4709160"/>
+            <a:ext cx="9784080" cy="1005840"/>
           </a:xfrm>
           <a:prstGeom prst="rect">
             <a:avLst/>
@@ -12025,17 +13179,31 @@
               <a:buNone/>
             </a:pPr>
             <a:r>
-              <a:rPr lang="en-US" sz="1200" i="1" dirty="0">
-                <a:solidFill>
-                  <a:schemeClr val="bg2"/>
+              <a:rPr lang="en-US" sz="1600" b="1" dirty="0">
+                <a:solidFill>
+                  <a:schemeClr val="bg1"/>
                 </a:solidFill>
                 <a:latin typeface="Calibri" pitchFamily="34" charset="0"/>
                 <a:ea typeface="Calibri" pitchFamily="34" charset="-122"/>
                 <a:cs typeface="Calibri" pitchFamily="34" charset="-120"/>
               </a:rPr>
-              <a:t>Por clima extremo u otra causa de fuerza mayor, reagendamos sin costo.</a:t>
-            </a:r>
-            <a:endParaRPr lang="en-US" sz="1200" dirty="0"/>
+              <a:t>Aparta tu fecha con el 50% de anticipo. </a:t>
+            </a:r>
+            <a:pPr indent="0" marL="0">
+              <a:buNone/>
+            </a:pPr>
+            <a:r>
+              <a:rPr lang="en-US" sz="1600" dirty="0">
+                <a:solidFill>
+                  <a:schemeClr val="bg1"/>
+                </a:solidFill>
+                <a:latin typeface="Calibri" pitchFamily="34" charset="0"/>
+                <a:ea typeface="Calibri" pitchFamily="34" charset="-122"/>
+                <a:cs typeface="Calibri" pitchFamily="34" charset="-120"/>
+              </a:rPr>
+              <a:t>El resto se liquida el día del evento. Cotiza en la web o por WhatsApp al 55 7190 1664.</a:t>
+            </a:r>
+            <a:endParaRPr lang="en-US" sz="1600" dirty="0"/>
           </a:p>
         </p:txBody>
       </p:sp>
@@ -12109,9 +13277,108 @@
           <a:chExt cx="0" cy="0"/>
         </a:xfrm>
       </p:grpSpPr>
+      <p:sp>
+        <p:nvSpPr>
+          <p:cNvPr id="2" name="Text 1"/>
+          <p:cNvSpPr/>
+          <p:nvPr>
+            <p:ph idx="103" type="body" hasCustomPrompt="1"/>
+          </p:nvPr>
+        </p:nvSpPr>
+        <p:spPr>
+          <a:xfrm>
+            <a:off x="548640" y="384048"/>
+            <a:ext cx="7315200" cy="274320"/>
+          </a:xfrm>
+          <a:prstGeom prst="rect">
+            <a:avLst/>
+          </a:prstGeom>
+          <a:noFill/>
+          <a:ln/>
+        </p:spPr>
+        <p:txBody>
+          <a:bodyPr wrap="square" lIns="0" tIns="0" rIns="0" bIns="0" rtlCol="0"/>
+          <a:lstStyle/>
+          <a:p>
+            <a:pPr algn="l" indent="0" marL="0">
+              <a:buNone/>
+            </a:pPr>
+            <a:r>
+              <a:rPr lang="en-US" sz="1100" b="1" spc="400" kern="0" dirty="0">
+                <a:solidFill>
+                  <a:schemeClr val="accent6"/>
+                </a:solidFill>
+              </a:rPr>
+              <a:t>ANTES DE RESERVAR</a:t>
+            </a:r>
+            <a:endParaRPr lang="en-US" sz="1100" dirty="0"/>
+          </a:p>
+        </p:txBody>
+      </p:sp>
+      <p:sp>
+        <p:nvSpPr>
+          <p:cNvPr id="3" name="Text 1"/>
+          <p:cNvSpPr/>
+          <p:nvPr>
+            <p:ph idx="102" type="title" hasCustomPrompt="1"/>
+          </p:nvPr>
+        </p:nvSpPr>
+        <p:spPr>
+          <a:xfrm>
+            <a:off x="548640" y="676656"/>
+            <a:ext cx="9692640" cy="658368"/>
+          </a:xfrm>
+          <a:prstGeom prst="rect">
+            <a:avLst/>
+          </a:prstGeom>
+          <a:noFill/>
+          <a:ln/>
+        </p:spPr>
+        <p:txBody>
+          <a:bodyPr wrap="square" lIns="0" tIns="0" rIns="0" bIns="0" rtlCol="0" anchor="ctr"/>
+          <a:lstStyle/>
+          <a:p>
+            <a:pPr algn="l" indent="0" marL="0">
+              <a:buNone/>
+            </a:pPr>
+            <a:r>
+              <a:rPr lang="en-US" sz="3000" dirty="0">
+                <a:solidFill>
+                  <a:schemeClr val="bg1"/>
+                </a:solidFill>
+                <a:latin typeface="Arial Black" pitchFamily="34" charset="0"/>
+                <a:ea typeface="Arial Black" pitchFamily="34" charset="-122"/>
+                <a:cs typeface="Arial Black" pitchFamily="34" charset="-120"/>
+              </a:rPr>
+              <a:t>Lo que tienes que saber</a:t>
+            </a:r>
+            <a:endParaRPr lang="en-US" sz="3000" dirty="0"/>
+          </a:p>
+        </p:txBody>
+      </p:sp>
+      <p:sp>
+        <p:nvSpPr>
+          <p:cNvPr id="4" name="Condición 1 círculo"/>
+          <p:cNvSpPr/>
+          <p:nvPr/>
+        </p:nvSpPr>
+        <p:spPr>
+          <a:xfrm>
+            <a:off x="548640" y="1600200"/>
+            <a:ext cx="566928" cy="566928"/>
+          </a:xfrm>
+          <a:prstGeom prst="ellipse">
+            <a:avLst/>
+          </a:prstGeom>
+          <a:solidFill>
+            <a:schemeClr val="accent1"/>
+          </a:solidFill>
+          <a:ln/>
+        </p:spPr>
+      </p:sp>
       <p:pic>
         <p:nvPicPr>
-          <p:cNvPr id="2" name="Logo cierre" descr="/home/claude/assets/logo_720.png">    </p:cNvPr>
+          <p:cNvPr id="5" name="Condición 1 ícono" descr="preencoded.png">    </p:cNvPr>
           <p:cNvPicPr>
             <a:picLocks noChangeAspect="1"/>
           </p:cNvPicPr>
@@ -12125,8 +13392,8 @@
         </p:blipFill>
         <p:spPr>
           <a:xfrm>
-            <a:off x="731520" y="777240"/>
-            <a:ext cx="1828800" cy="1828800"/>
+            <a:off x="696041" y="1747601"/>
+            <a:ext cx="272125" cy="272125"/>
           </a:xfrm>
           <a:prstGeom prst="rect">
             <a:avLst/>
@@ -12135,14 +13402,14 @@
       </p:pic>
       <p:sp>
         <p:nvSpPr>
-          <p:cNvPr id="3" name="Cierre 1"/>
+          <p:cNvPr id="6" name="Título cond 1"/>
           <p:cNvSpPr txBox="1"/>
           <p:nvPr/>
         </p:nvSpPr>
         <p:spPr>
           <a:xfrm>
-            <a:off x="731520" y="2788920"/>
-            <a:ext cx="6400800" cy="868680"/>
+            <a:off x="1325880" y="1508760"/>
+            <a:ext cx="4754880" cy="384048"/>
           </a:xfrm>
           <a:prstGeom prst="rect">
             <a:avLst/>
@@ -12158,30 +13425,30 @@
               <a:buNone/>
             </a:pPr>
             <a:r>
-              <a:rPr lang="en-US" sz="4800" dirty="0">
+              <a:rPr lang="en-US" sz="1700" b="1" dirty="0">
                 <a:solidFill>
                   <a:schemeClr val="bg1"/>
                 </a:solidFill>
-                <a:latin typeface="Arial Black" pitchFamily="34" charset="0"/>
-                <a:ea typeface="Arial Black" pitchFamily="34" charset="-122"/>
-                <a:cs typeface="Arial Black" pitchFamily="34" charset="-120"/>
-              </a:rPr>
-              <a:t>¿LISTO PARA</a:t>
-            </a:r>
-            <a:endParaRPr lang="en-US" sz="4800" dirty="0"/>
-          </a:p>
-        </p:txBody>
-      </p:sp>
-      <p:sp>
-        <p:nvSpPr>
-          <p:cNvPr id="4" name="Cierre 2"/>
+                <a:latin typeface="Calibri" pitchFamily="34" charset="0"/>
+                <a:ea typeface="Calibri" pitchFamily="34" charset="-122"/>
+                <a:cs typeface="Calibri" pitchFamily="34" charset="-120"/>
+              </a:rPr>
+              <a:t>Horario de servicio</a:t>
+            </a:r>
+            <a:endParaRPr lang="en-US" sz="1700" dirty="0"/>
+          </a:p>
+        </p:txBody>
+      </p:sp>
+      <p:sp>
+        <p:nvSpPr>
+          <p:cNvPr id="7" name="Desc cond 1"/>
           <p:cNvSpPr txBox="1"/>
           <p:nvPr/>
         </p:nvSpPr>
         <p:spPr>
           <a:xfrm>
-            <a:off x="731520" y="3566160"/>
-            <a:ext cx="6400800" cy="868680"/>
+            <a:off x="1325880" y="1892808"/>
+            <a:ext cx="4754880" cy="594360"/>
           </a:xfrm>
           <a:prstGeom prst="rect">
             <a:avLst/>
@@ -12190,30 +13457,50 @@
           <a:ln/>
         </p:spPr>
         <p:txBody>
-          <a:bodyPr wrap="square" lIns="0" tIns="0" rIns="0" bIns="0" rtlCol="0" anchor="ctr"/>
+          <a:bodyPr wrap="square" lIns="0" tIns="0" rIns="0" bIns="0" rtlCol="0" anchor="t"/>
           <a:lstStyle/>
           <a:p>
             <a:pPr indent="0" marL="0">
               <a:buNone/>
             </a:pPr>
             <a:r>
-              <a:rPr lang="en-US" sz="4800" dirty="0">
-                <a:solidFill>
-                  <a:schemeClr val="accent1"/>
-                </a:solidFill>
-                <a:latin typeface="Arial Black" pitchFamily="34" charset="0"/>
-                <a:ea typeface="Arial Black" pitchFamily="34" charset="-122"/>
-                <a:cs typeface="Arial Black" pitchFamily="34" charset="-120"/>
-              </a:rPr>
-              <a:t>EL BAJÓN?</a:t>
-            </a:r>
-            <a:endParaRPr lang="en-US" sz="4800" dirty="0"/>
-          </a:p>
-        </p:txBody>
+              <a:rPr lang="en-US" sz="1400" dirty="0">
+                <a:solidFill>
+                  <a:schemeClr val="bg2"/>
+                </a:solidFill>
+                <a:latin typeface="Calibri" pitchFamily="34" charset="0"/>
+                <a:ea typeface="Calibri" pitchFamily="34" charset="-122"/>
+                <a:cs typeface="Calibri" pitchFamily="34" charset="-120"/>
+              </a:rPr>
+              <a:t>Vie desde 8 PM, sábado a cualquier hora y domingo hasta 4 AM. Cotizaciones 24/7.</a:t>
+            </a:r>
+            <a:endParaRPr lang="en-US" sz="1400" dirty="0"/>
+          </a:p>
+        </p:txBody>
+      </p:sp>
+      <p:sp>
+        <p:nvSpPr>
+          <p:cNvPr id="8" name="Condición 2 círculo"/>
+          <p:cNvSpPr/>
+          <p:nvPr/>
+        </p:nvSpPr>
+        <p:spPr>
+          <a:xfrm>
+            <a:off x="548640" y="2715768"/>
+            <a:ext cx="566928" cy="566928"/>
+          </a:xfrm>
+          <a:prstGeom prst="ellipse">
+            <a:avLst/>
+          </a:prstGeom>
+          <a:solidFill>
+            <a:schemeClr val="accent1"/>
+          </a:solidFill>
+          <a:ln/>
+        </p:spPr>
       </p:sp>
       <p:pic>
         <p:nvPicPr>
-          <p:cNvPr id="5" name="Image 1" descr="preencoded.png">    </p:cNvPr>
+          <p:cNvPr id="9" name="Condición 2 ícono" descr="preencoded.png">    </p:cNvPr>
           <p:cNvPicPr>
             <a:picLocks noChangeAspect="1"/>
           </p:cNvPicPr>
@@ -12227,8 +13514,8 @@
         </p:blipFill>
         <p:spPr>
           <a:xfrm>
-            <a:off x="731520" y="4681728"/>
-            <a:ext cx="274320" cy="274320"/>
+            <a:off x="696041" y="2863169"/>
+            <a:ext cx="272125" cy="272125"/>
           </a:xfrm>
           <a:prstGeom prst="rect">
             <a:avLst/>
@@ -12237,16 +13524,14 @@
       </p:pic>
       <p:sp>
         <p:nvSpPr>
-          <p:cNvPr id="6" name="Contacto 1">
-            <a:hlinkClick r:id="rId3" tooltip=""/>
-          </p:cNvPr>
+          <p:cNvPr id="10" name="Título cond 2"/>
           <p:cNvSpPr txBox="1"/>
           <p:nvPr/>
         </p:nvSpPr>
         <p:spPr>
           <a:xfrm>
-            <a:off x="1143000" y="4617720"/>
-            <a:ext cx="5943600" cy="402336"/>
+            <a:off x="1325880" y="2624328"/>
+            <a:ext cx="4754880" cy="384048"/>
           </a:xfrm>
           <a:prstGeom prst="rect">
             <a:avLst/>
@@ -12262,30 +13547,204 @@
               <a:buNone/>
             </a:pPr>
             <a:r>
-              <a:rPr lang="en-US" sz="1600" u="sng" dirty="0">
+              <a:rPr lang="en-US" sz="1700" b="1" dirty="0">
                 <a:solidFill>
                   <a:schemeClr val="bg1"/>
                 </a:solidFill>
                 <a:latin typeface="Calibri" pitchFamily="34" charset="0"/>
                 <a:ea typeface="Calibri" pitchFamily="34" charset="-122"/>
                 <a:cs typeface="Calibri" pitchFamily="34" charset="-120"/>
-                <a:hlinkClick r:id="rId3" invalidUrl="" action="" tgtFrame="" tooltip="" history="1" highlightClick="0" endSnd="0">
-                  <a:extLst>
-                    <a:ext uri="{A12FA001-AC4F-418D-AE19-62706E023703}">
-                      <ahyp:hlinkClr xmlns:ahyp="http://schemas.microsoft.com/office/drawing/2018/hyperlinkcolor" val="tx"/>
-                    </a:ext>
-                  </a:extLst>
-                </a:hlinkClick>
-              </a:rPr>
-              <a:t>55 7190 1664</a:t>
-            </a:r>
-            <a:endParaRPr lang="en-US" sz="1600" dirty="0"/>
-          </a:p>
-        </p:txBody>
+              </a:rPr>
+              <a:t>Anticipación</a:t>
+            </a:r>
+            <a:endParaRPr lang="en-US" sz="1700" dirty="0"/>
+          </a:p>
+        </p:txBody>
+      </p:sp>
+      <p:sp>
+        <p:nvSpPr>
+          <p:cNvPr id="11" name="Desc cond 2"/>
+          <p:cNvSpPr txBox="1"/>
+          <p:nvPr/>
+        </p:nvSpPr>
+        <p:spPr>
+          <a:xfrm>
+            <a:off x="1325880" y="3008376"/>
+            <a:ext cx="4754880" cy="594360"/>
+          </a:xfrm>
+          <a:prstGeom prst="rect">
+            <a:avLst/>
+          </a:prstGeom>
+          <a:noFill/>
+          <a:ln/>
+        </p:spPr>
+        <p:txBody>
+          <a:bodyPr wrap="square" lIns="0" tIns="0" rIns="0" bIns="0" rtlCol="0" anchor="t"/>
+          <a:lstStyle/>
+          <a:p>
+            <a:pPr indent="0" marL="0">
+              <a:buNone/>
+            </a:pPr>
+            <a:r>
+              <a:rPr lang="en-US" sz="1400" dirty="0">
+                <a:solidFill>
+                  <a:schemeClr val="bg2"/>
+                </a:solidFill>
+                <a:latin typeface="Calibri" pitchFamily="34" charset="0"/>
+                <a:ea typeface="Calibri" pitchFamily="34" charset="-122"/>
+                <a:cs typeface="Calibri" pitchFamily="34" charset="-120"/>
+              </a:rPr>
+              <a:t>Reserva con mínimo 3 días de anticipación. Fechas sujetas a disponibilidad.</a:t>
+            </a:r>
+            <a:endParaRPr lang="en-US" sz="1400" dirty="0"/>
+          </a:p>
+        </p:txBody>
+      </p:sp>
+      <p:sp>
+        <p:nvSpPr>
+          <p:cNvPr id="12" name="Condición 3 círculo"/>
+          <p:cNvSpPr/>
+          <p:nvPr/>
+        </p:nvSpPr>
+        <p:spPr>
+          <a:xfrm>
+            <a:off x="548640" y="3831336"/>
+            <a:ext cx="566928" cy="566928"/>
+          </a:xfrm>
+          <a:prstGeom prst="ellipse">
+            <a:avLst/>
+          </a:prstGeom>
+          <a:solidFill>
+            <a:schemeClr val="accent1"/>
+          </a:solidFill>
+          <a:ln/>
+        </p:spPr>
       </p:sp>
       <p:pic>
         <p:nvPicPr>
-          <p:cNvPr id="7" name="Image 2" descr="preencoded.png">    </p:cNvPr>
+          <p:cNvPr id="13" name="Condición 3 ícono" descr="preencoded.png">    </p:cNvPr>
+          <p:cNvPicPr>
+            <a:picLocks noChangeAspect="1"/>
+          </p:cNvPicPr>
+          <p:nvPr/>
+        </p:nvPicPr>
+        <p:blipFill>
+          <a:blip r:embed="rId3"/>
+          <a:stretch>
+            <a:fillRect/>
+          </a:stretch>
+        </p:blipFill>
+        <p:spPr>
+          <a:xfrm>
+            <a:off x="696041" y="3978737"/>
+            <a:ext cx="272125" cy="272125"/>
+          </a:xfrm>
+          <a:prstGeom prst="rect">
+            <a:avLst/>
+          </a:prstGeom>
+        </p:spPr>
+      </p:pic>
+      <p:sp>
+        <p:nvSpPr>
+          <p:cNvPr id="14" name="Título cond 3"/>
+          <p:cNvSpPr txBox="1"/>
+          <p:nvPr/>
+        </p:nvSpPr>
+        <p:spPr>
+          <a:xfrm>
+            <a:off x="1325880" y="3739896"/>
+            <a:ext cx="4754880" cy="384048"/>
+          </a:xfrm>
+          <a:prstGeom prst="rect">
+            <a:avLst/>
+          </a:prstGeom>
+          <a:noFill/>
+          <a:ln/>
+        </p:spPr>
+        <p:txBody>
+          <a:bodyPr wrap="square" lIns="0" tIns="0" rIns="0" bIns="0" rtlCol="0" anchor="ctr"/>
+          <a:lstStyle/>
+          <a:p>
+            <a:pPr indent="0" marL="0">
+              <a:buNone/>
+            </a:pPr>
+            <a:r>
+              <a:rPr lang="en-US" sz="1700" b="1" dirty="0">
+                <a:solidFill>
+                  <a:schemeClr val="bg1"/>
+                </a:solidFill>
+                <a:latin typeface="Calibri" pitchFamily="34" charset="0"/>
+                <a:ea typeface="Calibri" pitchFamily="34" charset="-122"/>
+                <a:cs typeface="Calibri" pitchFamily="34" charset="-120"/>
+              </a:rPr>
+              <a:t>Cobertura</a:t>
+            </a:r>
+            <a:endParaRPr lang="en-US" sz="1700" dirty="0"/>
+          </a:p>
+        </p:txBody>
+      </p:sp>
+      <p:sp>
+        <p:nvSpPr>
+          <p:cNvPr id="15" name="Desc cond 3"/>
+          <p:cNvSpPr txBox="1"/>
+          <p:nvPr/>
+        </p:nvSpPr>
+        <p:spPr>
+          <a:xfrm>
+            <a:off x="1325880" y="4123944"/>
+            <a:ext cx="4754880" cy="594360"/>
+          </a:xfrm>
+          <a:prstGeom prst="rect">
+            <a:avLst/>
+          </a:prstGeom>
+          <a:noFill/>
+          <a:ln/>
+        </p:spPr>
+        <p:txBody>
+          <a:bodyPr wrap="square" lIns="0" tIns="0" rIns="0" bIns="0" rtlCol="0" anchor="t"/>
+          <a:lstStyle/>
+          <a:p>
+            <a:pPr indent="0" marL="0">
+              <a:buNone/>
+            </a:pPr>
+            <a:r>
+              <a:rPr lang="en-US" sz="1400" dirty="0">
+                <a:solidFill>
+                  <a:schemeClr val="bg2"/>
+                </a:solidFill>
+                <a:latin typeface="Calibri" pitchFamily="34" charset="0"/>
+                <a:ea typeface="Calibri" pitchFamily="34" charset="-122"/>
+                <a:cs typeface="Calibri" pitchFamily="34" charset="-120"/>
+              </a:rPr>
+              <a:t>CDMX y Estado de México, traslado $200. Fuera de esta zona, el traslado se cotiza aparte.</a:t>
+            </a:r>
+            <a:endParaRPr lang="en-US" sz="1400" dirty="0"/>
+          </a:p>
+        </p:txBody>
+      </p:sp>
+      <p:sp>
+        <p:nvSpPr>
+          <p:cNvPr id="16" name="Condición 4 círculo"/>
+          <p:cNvSpPr/>
+          <p:nvPr/>
+        </p:nvSpPr>
+        <p:spPr>
+          <a:xfrm>
+            <a:off x="548640" y="4946904"/>
+            <a:ext cx="566928" cy="566928"/>
+          </a:xfrm>
+          <a:prstGeom prst="ellipse">
+            <a:avLst/>
+          </a:prstGeom>
+          <a:solidFill>
+            <a:schemeClr val="accent1"/>
+          </a:solidFill>
+          <a:ln/>
+        </p:spPr>
+      </p:sp>
+      <p:pic>
+        <p:nvPicPr>
+          <p:cNvPr id="17" name="Condición 4 ícono" descr="preencoded.png">    </p:cNvPr>
           <p:cNvPicPr>
             <a:picLocks noChangeAspect="1"/>
           </p:cNvPicPr>
@@ -12299,8 +13758,8 @@
         </p:blipFill>
         <p:spPr>
           <a:xfrm>
-            <a:off x="731520" y="5138928"/>
-            <a:ext cx="274320" cy="274320"/>
+            <a:off x="696041" y="5094305"/>
+            <a:ext cx="272125" cy="272125"/>
           </a:xfrm>
           <a:prstGeom prst="rect">
             <a:avLst/>
@@ -12309,14 +13768,14 @@
       </p:pic>
       <p:sp>
         <p:nvSpPr>
-          <p:cNvPr id="8" name="Contacto 2"/>
+          <p:cNvPr id="18" name="Título cond 4"/>
           <p:cNvSpPr txBox="1"/>
           <p:nvPr/>
         </p:nvSpPr>
         <p:spPr>
           <a:xfrm>
-            <a:off x="1143000" y="5074920"/>
-            <a:ext cx="5943600" cy="402336"/>
+            <a:off x="1325880" y="4855464"/>
+            <a:ext cx="4754880" cy="384048"/>
           </a:xfrm>
           <a:prstGeom prst="rect">
             <a:avLst/>
@@ -12332,7 +13791,7 @@
               <a:buNone/>
             </a:pPr>
             <a:r>
-              <a:rPr lang="en-US" sz="1600" dirty="0">
+              <a:rPr lang="en-US" sz="1700" b="1" dirty="0">
                 <a:solidFill>
                   <a:schemeClr val="bg1"/>
                 </a:solidFill>
@@ -12340,46 +13799,22 @@
                 <a:ea typeface="Calibri" pitchFamily="34" charset="-122"/>
                 <a:cs typeface="Calibri" pitchFamily="34" charset="-120"/>
               </a:rPr>
-              <a:t>@bajon_lunar</a:t>
-            </a:r>
-            <a:endParaRPr lang="en-US" sz="1600" dirty="0"/>
-          </a:p>
-        </p:txBody>
-      </p:sp>
-      <p:pic>
-        <p:nvPicPr>
-          <p:cNvPr id="9" name="Image 3" descr="preencoded.png">    </p:cNvPr>
-          <p:cNvPicPr>
-            <a:picLocks noChangeAspect="1"/>
-          </p:cNvPicPr>
-          <p:nvPr/>
-        </p:nvPicPr>
-        <p:blipFill>
-          <a:blip r:embed="rId5"/>
-          <a:stretch>
-            <a:fillRect/>
-          </a:stretch>
-        </p:blipFill>
-        <p:spPr>
-          <a:xfrm>
-            <a:off x="731520" y="5596128"/>
-            <a:ext cx="274320" cy="274320"/>
-          </a:xfrm>
-          <a:prstGeom prst="rect">
-            <a:avLst/>
-          </a:prstGeom>
-        </p:spPr>
-      </p:pic>
-      <p:sp>
-        <p:nvSpPr>
-          <p:cNvPr id="10" name="Contacto 3"/>
+              <a:t>Facturación</a:t>
+            </a:r>
+            <a:endParaRPr lang="en-US" sz="1700" dirty="0"/>
+          </a:p>
+        </p:txBody>
+      </p:sp>
+      <p:sp>
+        <p:nvSpPr>
+          <p:cNvPr id="19" name="Desc cond 4"/>
           <p:cNvSpPr txBox="1"/>
           <p:nvPr/>
         </p:nvSpPr>
         <p:spPr>
           <a:xfrm>
-            <a:off x="1143000" y="5532120"/>
-            <a:ext cx="5943600" cy="402336"/>
+            <a:off x="1325880" y="5239512"/>
+            <a:ext cx="4754880" cy="594360"/>
           </a:xfrm>
           <a:prstGeom prst="rect">
             <a:avLst/>
@@ -12388,63 +13823,68 @@
           <a:ln/>
         </p:spPr>
         <p:txBody>
-          <a:bodyPr wrap="square" lIns="0" tIns="0" rIns="0" bIns="0" rtlCol="0" anchor="ctr"/>
+          <a:bodyPr wrap="square" lIns="0" tIns="0" rIns="0" bIns="0" rtlCol="0" anchor="t"/>
           <a:lstStyle/>
           <a:p>
             <a:pPr indent="0" marL="0">
               <a:buNone/>
             </a:pPr>
             <a:r>
-              <a:rPr lang="en-US" sz="1600" dirty="0">
-                <a:solidFill>
-                  <a:schemeClr val="bg1"/>
+              <a:rPr lang="en-US" sz="1400" dirty="0">
+                <a:solidFill>
+                  <a:schemeClr val="bg2"/>
                 </a:solidFill>
                 <a:latin typeface="Calibri" pitchFamily="34" charset="0"/>
                 <a:ea typeface="Calibri" pitchFamily="34" charset="-122"/>
                 <a:cs typeface="Calibri" pitchFamily="34" charset="-120"/>
               </a:rPr>
-              <a:t>bajonlunar@gmail.com</a:t>
-            </a:r>
-            <a:endParaRPr lang="en-US" sz="1600" dirty="0"/>
-          </a:p>
-        </p:txBody>
-      </p:sp>
-      <p:pic>
-        <p:nvPicPr>
-          <p:cNvPr id="11" name="Image 4" descr="preencoded.png">    </p:cNvPr>
-          <p:cNvPicPr>
-            <a:picLocks noChangeAspect="1"/>
-          </p:cNvPicPr>
-          <p:nvPr/>
-        </p:nvPicPr>
-        <p:blipFill>
-          <a:blip r:embed="rId6"/>
-          <a:stretch>
-            <a:fillRect/>
-          </a:stretch>
-        </p:blipFill>
-        <p:spPr>
-          <a:xfrm>
-            <a:off x="731520" y="6053328"/>
-            <a:ext cx="274320" cy="274320"/>
-          </a:xfrm>
-          <a:prstGeom prst="rect">
-            <a:avLst/>
-          </a:prstGeom>
-        </p:spPr>
-      </p:pic>
-      <p:sp>
-        <p:nvSpPr>
-          <p:cNvPr id="12" name="Contacto 4">
-            <a:hlinkClick r:id="rId7" tooltip=""/>
-          </p:cNvPr>
+              <a:t>Emitimos factura (CFDI). Comparte tus datos fiscales al cotizar.</a:t>
+            </a:r>
+            <a:endParaRPr lang="en-US" sz="1400" dirty="0"/>
+          </a:p>
+        </p:txBody>
+      </p:sp>
+      <p:sp>
+        <p:nvSpPr>
+          <p:cNvPr id="20" name="Cancelaciones"/>
+          <p:cNvSpPr/>
+          <p:nvPr/>
+        </p:nvSpPr>
+        <p:spPr>
+          <a:xfrm>
+            <a:off x="6583680" y="1508760"/>
+            <a:ext cx="5029200" cy="4434840"/>
+          </a:xfrm>
+          <a:prstGeom prst="roundRect">
+            <a:avLst>
+              <a:gd name="adj" fmla="val 2887"/>
+            </a:avLst>
+          </a:prstGeom>
+          <a:solidFill>
+            <a:schemeClr val="tx2">
+              <a:alpha val="82000"/>
+            </a:schemeClr>
+          </a:solidFill>
+          <a:ln w="12700">
+            <a:solidFill>
+              <a:schemeClr val="accent1">
+                <a:alpha val="55000"/>
+              </a:schemeClr>
+            </a:solidFill>
+            <a:prstDash val="solid"/>
+          </a:ln>
+        </p:spPr>
+      </p:sp>
+      <p:sp>
+        <p:nvSpPr>
+          <p:cNvPr id="21" name="Título cancelaciones"/>
           <p:cNvSpPr txBox="1"/>
           <p:nvPr/>
         </p:nvSpPr>
         <p:spPr>
           <a:xfrm>
-            <a:off x="1143000" y="5989320"/>
-            <a:ext cx="5943600" cy="402336"/>
+            <a:off x="6858000" y="1737360"/>
+            <a:ext cx="4480560" cy="411480"/>
           </a:xfrm>
           <a:prstGeom prst="rect">
             <a:avLst/>
@@ -12460,83 +13900,93 @@
               <a:buNone/>
             </a:pPr>
             <a:r>
-              <a:rPr lang="en-US" sz="1600" u="sng" dirty="0">
+              <a:rPr lang="en-US" sz="1600" dirty="0">
+                <a:solidFill>
+                  <a:schemeClr val="bg1"/>
+                </a:solidFill>
+                <a:latin typeface="Arial Black" pitchFamily="34" charset="0"/>
+                <a:ea typeface="Arial Black" pitchFamily="34" charset="-122"/>
+                <a:cs typeface="Arial Black" pitchFamily="34" charset="-120"/>
+              </a:rPr>
+              <a:t>CANCELACIONES</a:t>
+            </a:r>
+            <a:endParaRPr lang="en-US" sz="1600" dirty="0"/>
+          </a:p>
+        </p:txBody>
+      </p:sp>
+      <p:sp>
+        <p:nvSpPr>
+          <p:cNvPr id="22" name="Fila canc 1"/>
+          <p:cNvSpPr/>
+          <p:nvPr/>
+        </p:nvSpPr>
+        <p:spPr>
+          <a:xfrm>
+            <a:off x="6858000" y="2331720"/>
+            <a:ext cx="4480560" cy="621792"/>
+          </a:xfrm>
+          <a:prstGeom prst="roundRect">
+            <a:avLst>
+              <a:gd name="adj" fmla="val 14706"/>
+            </a:avLst>
+          </a:prstGeom>
+          <a:solidFill>
+            <a:schemeClr val="bg1">
+              <a:alpha val="6000"/>
+            </a:schemeClr>
+          </a:solidFill>
+          <a:ln/>
+        </p:spPr>
+      </p:sp>
+      <p:sp>
+        <p:nvSpPr>
+          <p:cNvPr id="23" name="Plazo 1"/>
+          <p:cNvSpPr txBox="1"/>
+          <p:nvPr/>
+        </p:nvSpPr>
+        <p:spPr>
+          <a:xfrm>
+            <a:off x="7040880" y="2331720"/>
+            <a:ext cx="2286000" cy="621792"/>
+          </a:xfrm>
+          <a:prstGeom prst="rect">
+            <a:avLst/>
+          </a:prstGeom>
+          <a:noFill/>
+          <a:ln/>
+        </p:spPr>
+        <p:txBody>
+          <a:bodyPr wrap="square" lIns="0" tIns="0" rIns="0" bIns="0" rtlCol="0" anchor="ctr"/>
+          <a:lstStyle/>
+          <a:p>
+            <a:pPr indent="0" marL="0">
+              <a:buNone/>
+            </a:pPr>
+            <a:r>
+              <a:rPr lang="en-US" sz="1400" dirty="0">
                 <a:solidFill>
                   <a:schemeClr val="bg1"/>
                 </a:solidFill>
                 <a:latin typeface="Calibri" pitchFamily="34" charset="0"/>
                 <a:ea typeface="Calibri" pitchFamily="34" charset="-122"/>
                 <a:cs typeface="Calibri" pitchFamily="34" charset="-120"/>
-                <a:hlinkClick r:id="rId7" invalidUrl="" action="" tgtFrame="" tooltip="" history="1" highlightClick="0" endSnd="0">
-                  <a:extLst>
-                    <a:ext uri="{A12FA001-AC4F-418D-AE19-62706E023703}">
-                      <ahyp:hlinkClr xmlns:ahyp="http://schemas.microsoft.com/office/drawing/2018/hyperlinkcolor" val="tx"/>
-                    </a:ext>
-                  </a:extLst>
-                </a:hlinkClick>
-              </a:rPr>
-              <a:t>ingalejandrofh01-boop.github.io/Bajon-Lunar</a:t>
-            </a:r>
-            <a:endParaRPr lang="en-US" sz="1600" dirty="0"/>
-          </a:p>
-        </p:txBody>
-      </p:sp>
-      <p:sp>
-        <p:nvSpPr>
-          <p:cNvPr id="13" name="Fondo QR 1"/>
-          <p:cNvSpPr/>
-          <p:nvPr/>
-        </p:nvSpPr>
-        <p:spPr>
-          <a:xfrm>
-            <a:off x="7498080" y="2514600"/>
-            <a:ext cx="2011680" cy="2011680"/>
-          </a:xfrm>
-          <a:prstGeom prst="roundRect">
-            <a:avLst>
-              <a:gd name="adj" fmla="val 6364"/>
-            </a:avLst>
-          </a:prstGeom>
-          <a:solidFill>
-            <a:srgbClr val="FFFFFF"/>
-          </a:solidFill>
-          <a:ln/>
-        </p:spPr>
-      </p:sp>
-      <p:pic>
-        <p:nvPicPr>
-          <p:cNvPr id="14" name="QR 1" descr="/home/claude/assets/qr_site.png">    </p:cNvPr>
-          <p:cNvPicPr>
-            <a:picLocks noChangeAspect="1"/>
-          </p:cNvPicPr>
-          <p:nvPr/>
-        </p:nvPicPr>
-        <p:blipFill>
-          <a:blip r:embed="rId8"/>
-          <a:stretch>
-            <a:fillRect/>
-          </a:stretch>
-        </p:blipFill>
-        <p:spPr>
-          <a:xfrm>
-            <a:off x="7635240" y="2651760"/>
-            <a:ext cx="1737360" cy="1737360"/>
-          </a:xfrm>
-          <a:prstGeom prst="rect">
-            <a:avLst/>
-          </a:prstGeom>
-        </p:spPr>
-      </p:pic>
-      <p:sp>
-        <p:nvSpPr>
-          <p:cNvPr id="15" name="Texto QR 1"/>
+              </a:rPr>
+              <a:t>7 días o más</a:t>
+            </a:r>
+            <a:endParaRPr lang="en-US" sz="1400" dirty="0"/>
+          </a:p>
+        </p:txBody>
+      </p:sp>
+      <p:sp>
+        <p:nvSpPr>
+          <p:cNvPr id="24" name="Reembolso 1"/>
           <p:cNvSpPr txBox="1"/>
           <p:nvPr/>
         </p:nvSpPr>
         <p:spPr>
           <a:xfrm>
-            <a:off x="7406640" y="4663440"/>
-            <a:ext cx="2194560" cy="457200"/>
+            <a:off x="9235440" y="2331720"/>
+            <a:ext cx="1965960" cy="621792"/>
           </a:xfrm>
           <a:prstGeom prst="rect">
             <a:avLst/>
@@ -12548,19 +13998,19 @@
           <a:bodyPr wrap="square" lIns="0" tIns="0" rIns="0" bIns="0" rtlCol="0" anchor="ctr"/>
           <a:lstStyle/>
           <a:p>
-            <a:pPr algn="ctr" indent="0" marL="0">
+            <a:pPr algn="r" indent="0" marL="0">
               <a:buNone/>
             </a:pPr>
             <a:r>
               <a:rPr lang="en-US" sz="1400" b="1" dirty="0">
                 <a:solidFill>
-                  <a:schemeClr val="bg1"/>
+                  <a:schemeClr val="accent4"/>
                 </a:solidFill>
                 <a:latin typeface="Calibri" pitchFamily="34" charset="0"/>
                 <a:ea typeface="Calibri" pitchFamily="34" charset="-122"/>
                 <a:cs typeface="Calibri" pitchFamily="34" charset="-120"/>
               </a:rPr>
-              <a:t>Cotiza en línea</a:t>
+              <a:t>70% del anticipo</a:t>
             </a:r>
             <a:endParaRPr lang="en-US" sz="1400" dirty="0"/>
           </a:p>
@@ -12568,60 +14018,38 @@
       </p:sp>
       <p:sp>
         <p:nvSpPr>
-          <p:cNvPr id="16" name="Fondo QR 2"/>
+          <p:cNvPr id="25" name="Fila canc 2"/>
           <p:cNvSpPr/>
           <p:nvPr/>
         </p:nvSpPr>
         <p:spPr>
           <a:xfrm>
-            <a:off x="9784080" y="2514600"/>
-            <a:ext cx="2011680" cy="2011680"/>
+            <a:off x="6858000" y="3081528"/>
+            <a:ext cx="4480560" cy="621792"/>
           </a:xfrm>
           <a:prstGeom prst="roundRect">
             <a:avLst>
-              <a:gd name="adj" fmla="val 6364"/>
+              <a:gd name="adj" fmla="val 14706"/>
             </a:avLst>
           </a:prstGeom>
           <a:solidFill>
-            <a:srgbClr val="FFFFFF"/>
+            <a:schemeClr val="bg1">
+              <a:alpha val="6000"/>
+            </a:schemeClr>
           </a:solidFill>
           <a:ln/>
         </p:spPr>
       </p:sp>
-      <p:pic>
-        <p:nvPicPr>
-          <p:cNvPr id="17" name="QR 2" descr="/home/claude/assets/qr_wa.png">    </p:cNvPr>
-          <p:cNvPicPr>
-            <a:picLocks noChangeAspect="1"/>
-          </p:cNvPicPr>
-          <p:nvPr/>
-        </p:nvPicPr>
-        <p:blipFill>
-          <a:blip r:embed="rId9"/>
-          <a:stretch>
-            <a:fillRect/>
-          </a:stretch>
-        </p:blipFill>
-        <p:spPr>
-          <a:xfrm>
-            <a:off x="9921240" y="2651760"/>
-            <a:ext cx="1737360" cy="1737360"/>
-          </a:xfrm>
-          <a:prstGeom prst="rect">
-            <a:avLst/>
-          </a:prstGeom>
-        </p:spPr>
-      </p:pic>
-      <p:sp>
-        <p:nvSpPr>
-          <p:cNvPr id="18" name="Texto QR 2"/>
+      <p:sp>
+        <p:nvSpPr>
+          <p:cNvPr id="26" name="Plazo 2"/>
           <p:cNvSpPr txBox="1"/>
           <p:nvPr/>
         </p:nvSpPr>
         <p:spPr>
           <a:xfrm>
-            <a:off x="9692640" y="4663440"/>
-            <a:ext cx="2194560" cy="457200"/>
+            <a:off x="7040880" y="3081528"/>
+            <a:ext cx="2286000" cy="621792"/>
           </a:xfrm>
           <a:prstGeom prst="rect">
             <a:avLst/>
@@ -12633,11 +14061,11 @@
           <a:bodyPr wrap="square" lIns="0" tIns="0" rIns="0" bIns="0" rtlCol="0" anchor="ctr"/>
           <a:lstStyle/>
           <a:p>
-            <a:pPr algn="ctr" indent="0" marL="0">
+            <a:pPr indent="0" marL="0">
               <a:buNone/>
             </a:pPr>
             <a:r>
-              <a:rPr lang="en-US" sz="1400" b="1" dirty="0">
+              <a:rPr lang="en-US" sz="1400" dirty="0">
                 <a:solidFill>
                   <a:schemeClr val="bg1"/>
                 </a:solidFill>
@@ -12645,7 +14073,7 @@
                 <a:ea typeface="Calibri" pitchFamily="34" charset="-122"/>
                 <a:cs typeface="Calibri" pitchFamily="34" charset="-120"/>
               </a:rPr>
-              <a:t>Escríbenos por WhatsApp</a:t>
+              <a:t>Entre 3 y 6 días</a:t>
             </a:r>
             <a:endParaRPr lang="en-US" sz="1400" dirty="0"/>
           </a:p>
@@ -12653,14 +14081,14 @@
       </p:sp>
       <p:sp>
         <p:nvSpPr>
-          <p:cNvPr id="19" name="Invitación QR"/>
+          <p:cNvPr id="27" name="Reembolso 2"/>
           <p:cNvSpPr txBox="1"/>
           <p:nvPr/>
         </p:nvSpPr>
         <p:spPr>
           <a:xfrm>
-            <a:off x="7498080" y="1874520"/>
-            <a:ext cx="4297680" cy="457200"/>
+            <a:off x="9235440" y="3081528"/>
+            <a:ext cx="1965960" cy="621792"/>
           </a:xfrm>
           <a:prstGeom prst="rect">
             <a:avLst/>
@@ -12672,21 +14100,309 @@
           <a:bodyPr wrap="square" lIns="0" tIns="0" rIns="0" bIns="0" rtlCol="0" anchor="ctr"/>
           <a:lstStyle/>
           <a:p>
-            <a:pPr algn="ctr" indent="0" marL="0">
+            <a:pPr algn="r" indent="0" marL="0">
               <a:buNone/>
             </a:pPr>
             <a:r>
-              <a:rPr lang="en-US" sz="1800" i="1" dirty="0">
-                <a:solidFill>
-                  <a:schemeClr val="bg2"/>
+              <a:rPr lang="en-US" sz="1400" b="1" dirty="0">
+                <a:solidFill>
+                  <a:schemeClr val="accent4"/>
                 </a:solidFill>
                 <a:latin typeface="Calibri" pitchFamily="34" charset="0"/>
                 <a:ea typeface="Calibri" pitchFamily="34" charset="-122"/>
                 <a:cs typeface="Calibri" pitchFamily="34" charset="-120"/>
               </a:rPr>
-              <a:t>Escanea y arma tu paquete</a:t>
-            </a:r>
-            <a:endParaRPr lang="en-US" sz="1800" dirty="0"/>
+              <a:t>30% del anticipo</a:t>
+            </a:r>
+            <a:endParaRPr lang="en-US" sz="1400" dirty="0"/>
+          </a:p>
+        </p:txBody>
+      </p:sp>
+      <p:sp>
+        <p:nvSpPr>
+          <p:cNvPr id="28" name="Fila canc 3"/>
+          <p:cNvSpPr/>
+          <p:nvPr/>
+        </p:nvSpPr>
+        <p:spPr>
+          <a:xfrm>
+            <a:off x="6858000" y="3831336"/>
+            <a:ext cx="4480560" cy="621792"/>
+          </a:xfrm>
+          <a:prstGeom prst="roundRect">
+            <a:avLst>
+              <a:gd name="adj" fmla="val 14706"/>
+            </a:avLst>
+          </a:prstGeom>
+          <a:solidFill>
+            <a:schemeClr val="bg1">
+              <a:alpha val="6000"/>
+            </a:schemeClr>
+          </a:solidFill>
+          <a:ln/>
+        </p:spPr>
+      </p:sp>
+      <p:sp>
+        <p:nvSpPr>
+          <p:cNvPr id="29" name="Plazo 3"/>
+          <p:cNvSpPr txBox="1"/>
+          <p:nvPr/>
+        </p:nvSpPr>
+        <p:spPr>
+          <a:xfrm>
+            <a:off x="7040880" y="3831336"/>
+            <a:ext cx="2286000" cy="621792"/>
+          </a:xfrm>
+          <a:prstGeom prst="rect">
+            <a:avLst/>
+          </a:prstGeom>
+          <a:noFill/>
+          <a:ln/>
+        </p:spPr>
+        <p:txBody>
+          <a:bodyPr wrap="square" lIns="0" tIns="0" rIns="0" bIns="0" rtlCol="0" anchor="ctr"/>
+          <a:lstStyle/>
+          <a:p>
+            <a:pPr indent="0" marL="0">
+              <a:buNone/>
+            </a:pPr>
+            <a:r>
+              <a:rPr lang="en-US" sz="1400" dirty="0">
+                <a:solidFill>
+                  <a:schemeClr val="bg1"/>
+                </a:solidFill>
+                <a:latin typeface="Calibri" pitchFamily="34" charset="0"/>
+                <a:ea typeface="Calibri" pitchFamily="34" charset="-122"/>
+                <a:cs typeface="Calibri" pitchFamily="34" charset="-120"/>
+              </a:rPr>
+              <a:t>Menos de 3 días</a:t>
+            </a:r>
+            <a:endParaRPr lang="en-US" sz="1400" dirty="0"/>
+          </a:p>
+        </p:txBody>
+      </p:sp>
+      <p:sp>
+        <p:nvSpPr>
+          <p:cNvPr id="30" name="Reembolso 3"/>
+          <p:cNvSpPr txBox="1"/>
+          <p:nvPr/>
+        </p:nvSpPr>
+        <p:spPr>
+          <a:xfrm>
+            <a:off x="9235440" y="3831336"/>
+            <a:ext cx="1965960" cy="621792"/>
+          </a:xfrm>
+          <a:prstGeom prst="rect">
+            <a:avLst/>
+          </a:prstGeom>
+          <a:noFill/>
+          <a:ln/>
+        </p:spPr>
+        <p:txBody>
+          <a:bodyPr wrap="square" lIns="0" tIns="0" rIns="0" bIns="0" rtlCol="0" anchor="ctr"/>
+          <a:lstStyle/>
+          <a:p>
+            <a:pPr algn="r" indent="0" marL="0">
+              <a:buNone/>
+            </a:pPr>
+            <a:r>
+              <a:rPr lang="en-US" sz="1400" b="1" dirty="0">
+                <a:solidFill>
+                  <a:schemeClr val="bg2"/>
+                </a:solidFill>
+                <a:latin typeface="Calibri" pitchFamily="34" charset="0"/>
+                <a:ea typeface="Calibri" pitchFamily="34" charset="-122"/>
+                <a:cs typeface="Calibri" pitchFamily="34" charset="-120"/>
+              </a:rPr>
+              <a:t>Sin reembolso</a:t>
+            </a:r>
+            <a:endParaRPr lang="en-US" sz="1400" dirty="0"/>
+          </a:p>
+        </p:txBody>
+      </p:sp>
+      <p:sp>
+        <p:nvSpPr>
+          <p:cNvPr id="31" name="Fila canc 4"/>
+          <p:cNvSpPr/>
+          <p:nvPr/>
+        </p:nvSpPr>
+        <p:spPr>
+          <a:xfrm>
+            <a:off x="6858000" y="4581144"/>
+            <a:ext cx="4480560" cy="621792"/>
+          </a:xfrm>
+          <a:prstGeom prst="roundRect">
+            <a:avLst>
+              <a:gd name="adj" fmla="val 14706"/>
+            </a:avLst>
+          </a:prstGeom>
+          <a:solidFill>
+            <a:schemeClr val="bg1">
+              <a:alpha val="6000"/>
+            </a:schemeClr>
+          </a:solidFill>
+          <a:ln/>
+        </p:spPr>
+      </p:sp>
+      <p:sp>
+        <p:nvSpPr>
+          <p:cNvPr id="32" name="Plazo 4"/>
+          <p:cNvSpPr txBox="1"/>
+          <p:nvPr/>
+        </p:nvSpPr>
+        <p:spPr>
+          <a:xfrm>
+            <a:off x="7040880" y="4581144"/>
+            <a:ext cx="2286000" cy="621792"/>
+          </a:xfrm>
+          <a:prstGeom prst="rect">
+            <a:avLst/>
+          </a:prstGeom>
+          <a:noFill/>
+          <a:ln/>
+        </p:spPr>
+        <p:txBody>
+          <a:bodyPr wrap="square" lIns="0" tIns="0" rIns="0" bIns="0" rtlCol="0" anchor="ctr"/>
+          <a:lstStyle/>
+          <a:p>
+            <a:pPr indent="0" marL="0">
+              <a:buNone/>
+            </a:pPr>
+            <a:r>
+              <a:rPr lang="en-US" sz="1400" dirty="0">
+                <a:solidFill>
+                  <a:schemeClr val="bg1"/>
+                </a:solidFill>
+                <a:latin typeface="Calibri" pitchFamily="34" charset="0"/>
+                <a:ea typeface="Calibri" pitchFamily="34" charset="-122"/>
+                <a:cs typeface="Calibri" pitchFamily="34" charset="-120"/>
+              </a:rPr>
+              <a:t>Si cancelamos nosotros</a:t>
+            </a:r>
+            <a:endParaRPr lang="en-US" sz="1400" dirty="0"/>
+          </a:p>
+        </p:txBody>
+      </p:sp>
+      <p:sp>
+        <p:nvSpPr>
+          <p:cNvPr id="33" name="Reembolso 4"/>
+          <p:cNvSpPr txBox="1"/>
+          <p:nvPr/>
+        </p:nvSpPr>
+        <p:spPr>
+          <a:xfrm>
+            <a:off x="9235440" y="4581144"/>
+            <a:ext cx="1965960" cy="621792"/>
+          </a:xfrm>
+          <a:prstGeom prst="rect">
+            <a:avLst/>
+          </a:prstGeom>
+          <a:noFill/>
+          <a:ln/>
+        </p:spPr>
+        <p:txBody>
+          <a:bodyPr wrap="square" lIns="0" tIns="0" rIns="0" bIns="0" rtlCol="0" anchor="ctr"/>
+          <a:lstStyle/>
+          <a:p>
+            <a:pPr algn="r" indent="0" marL="0">
+              <a:buNone/>
+            </a:pPr>
+            <a:r>
+              <a:rPr lang="en-US" sz="1400" b="1" dirty="0">
+                <a:solidFill>
+                  <a:schemeClr val="accent4"/>
+                </a:solidFill>
+                <a:latin typeface="Calibri" pitchFamily="34" charset="0"/>
+                <a:ea typeface="Calibri" pitchFamily="34" charset="-122"/>
+                <a:cs typeface="Calibri" pitchFamily="34" charset="-120"/>
+              </a:rPr>
+              <a:t>100% del anticipo</a:t>
+            </a:r>
+            <a:endParaRPr lang="en-US" sz="1400" dirty="0"/>
+          </a:p>
+        </p:txBody>
+      </p:sp>
+      <p:sp>
+        <p:nvSpPr>
+          <p:cNvPr id="34" name="Fuerza mayor"/>
+          <p:cNvSpPr txBox="1"/>
+          <p:nvPr/>
+        </p:nvSpPr>
+        <p:spPr>
+          <a:xfrm>
+            <a:off x="6858000" y="5349240"/>
+            <a:ext cx="4480560" cy="457200"/>
+          </a:xfrm>
+          <a:prstGeom prst="rect">
+            <a:avLst/>
+          </a:prstGeom>
+          <a:noFill/>
+          <a:ln/>
+        </p:spPr>
+        <p:txBody>
+          <a:bodyPr wrap="square" lIns="0" tIns="0" rIns="0" bIns="0" rtlCol="0" anchor="ctr"/>
+          <a:lstStyle/>
+          <a:p>
+            <a:pPr indent="0" marL="0">
+              <a:buNone/>
+            </a:pPr>
+            <a:r>
+              <a:rPr lang="en-US" sz="1200" i="1" dirty="0">
+                <a:solidFill>
+                  <a:schemeClr val="bg2"/>
+                </a:solidFill>
+                <a:latin typeface="Calibri" pitchFamily="34" charset="0"/>
+                <a:ea typeface="Calibri" pitchFamily="34" charset="-122"/>
+                <a:cs typeface="Calibri" pitchFamily="34" charset="-120"/>
+              </a:rPr>
+              <a:t>Por clima extremo u otra causa de fuerza mayor, reagendamos sin costo.</a:t>
+            </a:r>
+            <a:endParaRPr lang="en-US" sz="1200" dirty="0"/>
+          </a:p>
+        </p:txBody>
+      </p:sp>
+      <p:sp>
+        <p:nvSpPr>
+          <p:cNvPr id="25" name="Slide Number Placeholder 0"/>
+          <p:cNvSpPr>
+            <a:spLocks noGrp="1"/>
+          </p:cNvSpPr>
+          <p:nvPr>
+            <p:ph type="sldNum" sz="quarter" idx="4294967295"/>
+          </p:nvPr>
+        </p:nvSpPr>
+        <p:spPr>
+          <a:xfrm>
+            <a:off x="11277295" y="6327648"/>
+            <a:ext cx="457200" cy="274320"/>
+          </a:xfrm>
+          <a:prstGeom prst="rect">
+            <a:avLst/>
+          </a:prstGeom>
+          <a:extLst>
+            <a:ext uri="{C572A759-6A51-4108-AA02-DFA0A04FC94B}">
+              <ma14:wrappingTextBoxFlag xmlns:ma14="http://schemas.microsoft.com/office/mac/drawingml/2011/main" val="0"/>
+            </a:ext>
+          </a:extLst>
+        </p:spPr>
+        <p:txBody>
+          <a:bodyPr/>
+          <a:lstStyle>
+            <a:lvl1pPr>
+              <a:defRPr sz="900">
+                <a:solidFill>
+                  <a:schemeClr val="bg2"/>
+                </a:solidFill>
+              </a:defRPr>
+            </a:lvl1pPr>
+          </a:lstStyle>
+          <a:p>
+            <a:pPr algn="r"/>
+            <a:fld id="{F7021451-1387-4CA6-816F-3879F97B5CBC}" type="slidenum">
+              <a:rPr b="0" lang="en-US"/>
+              <a:t>9</a:t>
+            </a:fld>
+            <a:endParaRPr lang="en-US"/>
           </a:p>
         </p:txBody>
       </p:sp>

--- a/bajon-lunar-presentacion.pptx
+++ b/bajon-lunar-presentacion.pptx
@@ -116,36 +116,36 @@
   <p:extLst>
     <p:ext uri="{521415D9-36F7-43E2-AB2F-B90AF26B5E84}">
       <p14:sectionLst xmlns:p14="http://schemas.microsoft.com/office/powerpoint/2010/main">
-        <p14:section name="Portada" id="{4a260fa9-2a51-ddda-18e9-237c0b98fdf5}">
+        <p14:section name="Portada" id="{09f941a1-e5e4-5437-e228-2e98d26a9822}">
           <p14:sldIdLst>
             <p14:sldId id="256"/>
           </p14:sldIdLst>
         </p14:section>
-        <p14:section name="Nosotros" id="{2f2bbacf-dbe4-0dd5-31d7-c59b280d8e6e}">
+        <p14:section name="Nosotros" id="{e1344a7b-afea-121f-2937-cca5463c9f41}">
           <p14:sldIdLst>
             <p14:sldId id="257"/>
           </p14:sldIdLst>
         </p14:section>
-        <p14:section name="Servicios" id="{c57521c4-765e-c194-2ed2-d2a2f63b738a}">
+        <p14:section name="Servicios" id="{5f48478c-d955-6cef-d12a-c3e0f3212773}">
           <p14:sldIdLst>
             <p14:sldId id="258"/>
             <p14:sldId id="259"/>
           </p14:sldIdLst>
         </p14:section>
-        <p14:section name="Paquetes y precios" id="{a2f8daeb-a81f-80b1-0c21-b9282766ee66}">
+        <p14:section name="Paquetes y precios" id="{b022b299-a63c-4407-73f1-2e4526c17417}">
           <p14:sldIdLst>
             <p14:sldId id="260"/>
             <p14:sldId id="261"/>
             <p14:sldId id="262"/>
           </p14:sldIdLst>
         </p14:section>
-        <p14:section name="Cómo cotizar" id="{1fe2456d-232d-4845-70ee-95f5a0588056}">
+        <p14:section name="Cómo cotizar" id="{83e5a6e3-135f-59bc-5c32-038a395dc660}">
           <p14:sldIdLst>
             <p14:sldId id="263"/>
             <p14:sldId id="264"/>
           </p14:sldIdLst>
         </p14:section>
-        <p14:section name="Contacto" id="{884d79b2-8889-b0a3-6fa1-9ef943f34a52}">
+        <p14:section name="Contacto" id="{04c7aa7b-a608-4279-1975-67af5c81ef4e}">
           <p14:sldIdLst>
             <p14:sldId id="265"/>
           </p14:sldIdLst>

--- a/bajon-lunar-presentacion.pptx
+++ b/bajon-lunar-presentacion.pptx
@@ -116,36 +116,36 @@
   <p:extLst>
     <p:ext uri="{521415D9-36F7-43E2-AB2F-B90AF26B5E84}">
       <p14:sectionLst xmlns:p14="http://schemas.microsoft.com/office/powerpoint/2010/main">
-        <p14:section name="Portada" id="{09f941a1-e5e4-5437-e228-2e98d26a9822}">
+        <p14:section name="Portada" id="{714bd035-aa16-3e31-5d6e-29d65bda3578}">
           <p14:sldIdLst>
             <p14:sldId id="256"/>
           </p14:sldIdLst>
         </p14:section>
-        <p14:section name="Nosotros" id="{e1344a7b-afea-121f-2937-cca5463c9f41}">
+        <p14:section name="Nosotros" id="{2cd41466-1051-a205-0860-195732d795a5}">
           <p14:sldIdLst>
             <p14:sldId id="257"/>
           </p14:sldIdLst>
         </p14:section>
-        <p14:section name="Servicios" id="{5f48478c-d955-6cef-d12a-c3e0f3212773}">
+        <p14:section name="Servicios" id="{a78f9cd9-2c17-30f9-ee62-2f595422e9ba}">
           <p14:sldIdLst>
             <p14:sldId id="258"/>
             <p14:sldId id="259"/>
           </p14:sldIdLst>
         </p14:section>
-        <p14:section name="Paquetes y precios" id="{b022b299-a63c-4407-73f1-2e4526c17417}">
+        <p14:section name="Paquetes y precios" id="{db911b69-3bca-e341-6046-cf64dd9d4f0c}">
           <p14:sldIdLst>
             <p14:sldId id="260"/>
             <p14:sldId id="261"/>
             <p14:sldId id="262"/>
           </p14:sldIdLst>
         </p14:section>
-        <p14:section name="Cómo cotizar" id="{83e5a6e3-135f-59bc-5c32-038a395dc660}">
+        <p14:section name="Cómo cotizar" id="{8119c5ab-5f42-8fe4-f8ae-b6468b9df126}">
           <p14:sldIdLst>
             <p14:sldId id="263"/>
             <p14:sldId id="264"/>
           </p14:sldIdLst>
         </p14:section>
-        <p14:section name="Contacto" id="{04c7aa7b-a608-4279-1975-67af5c81ef4e}">
+        <p14:section name="Contacto" id="{949b573a-ca0a-888a-eabf-6d00fdf5ca89}">
           <p14:sldIdLst>
             <p14:sldId id="265"/>
           </p14:sldIdLst>
@@ -2065,7 +2065,7 @@
       </p:grpSpPr>
       <p:pic>
         <p:nvPicPr>
-          <p:cNvPr id="2" name="Logo Bajón Lunar" descr="/home/claude/assets/logo_720.png">    </p:cNvPr>
+          <p:cNvPr id="2" name="Foto barra Bajón Lunar" descr="/home/claude/assets/barra.jpg">    </p:cNvPr>
           <p:cNvPicPr>
             <a:picLocks noChangeAspect="1"/>
           </p:cNvPicPr>
@@ -2079,8 +2079,8 @@
         </p:blipFill>
         <p:spPr>
           <a:xfrm>
-            <a:off x="7086600" y="914400"/>
-            <a:ext cx="4572000" cy="4572000"/>
+            <a:off x="7360920" y="566928"/>
+            <a:ext cx="4206240" cy="5596128"/>
           </a:xfrm>
           <a:prstGeom prst="rect">
             <a:avLst/>
@@ -2089,13 +2089,59 @@
       </p:pic>
       <p:sp>
         <p:nvSpPr>
-          <p:cNvPr id="3" name="Etiqueta"/>
+          <p:cNvPr id="3" name="Marco foto"/>
+          <p:cNvSpPr/>
+          <p:nvPr/>
+        </p:nvSpPr>
+        <p:spPr>
+          <a:xfrm>
+            <a:off x="7360920" y="566928"/>
+            <a:ext cx="4206240" cy="5596128"/>
+          </a:xfrm>
+          <a:prstGeom prst="rect">
+            <a:avLst/>
+          </a:prstGeom>
+          <a:ln w="19050">
+            <a:solidFill>
+              <a:schemeClr val="accent1"/>
+            </a:solidFill>
+            <a:prstDash val="solid"/>
+          </a:ln>
+        </p:spPr>
+      </p:sp>
+      <p:pic>
+        <p:nvPicPr>
+          <p:cNvPr id="4" name="Logo Bajón Lunar" descr="/home/claude/assets/logo_720.png">    </p:cNvPr>
+          <p:cNvPicPr>
+            <a:picLocks noChangeAspect="1"/>
+          </p:cNvPicPr>
+          <p:nvPr/>
+        </p:nvPicPr>
+        <p:blipFill>
+          <a:blip r:embed="rId2"/>
+          <a:stretch>
+            <a:fillRect/>
+          </a:stretch>
+        </p:blipFill>
+        <p:spPr>
+          <a:xfrm>
+            <a:off x="731520" y="411480"/>
+            <a:ext cx="777240" cy="777240"/>
+          </a:xfrm>
+          <a:prstGeom prst="rect">
+            <a:avLst/>
+          </a:prstGeom>
+        </p:spPr>
+      </p:pic>
+      <p:sp>
+        <p:nvSpPr>
+          <p:cNvPr id="5" name="Etiqueta"/>
           <p:cNvSpPr txBox="1"/>
           <p:nvPr/>
         </p:nvSpPr>
         <p:spPr>
           <a:xfrm>
-            <a:off x="731520" y="1234440"/>
+            <a:off x="731520" y="1325880"/>
             <a:ext cx="5486400" cy="320040"/>
           </a:xfrm>
           <a:prstGeom prst="rect">
@@ -2128,7 +2174,7 @@
       </p:sp>
       <p:sp>
         <p:nvSpPr>
-          <p:cNvPr id="4" name="Título 1"/>
+          <p:cNvPr id="6" name="Título 1"/>
           <p:cNvSpPr txBox="1"/>
           <p:nvPr/>
         </p:nvSpPr>
@@ -2167,7 +2213,7 @@
       </p:sp>
       <p:sp>
         <p:nvSpPr>
-          <p:cNvPr id="5" name="Título 2"/>
+          <p:cNvPr id="7" name="Título 2"/>
           <p:cNvSpPr txBox="1"/>
           <p:nvPr/>
         </p:nvSpPr>
@@ -2206,7 +2252,7 @@
       </p:sp>
       <p:sp>
         <p:nvSpPr>
-          <p:cNvPr id="6" name="Subtítulo"/>
+          <p:cNvPr id="8" name="Subtítulo"/>
           <p:cNvSpPr txBox="1"/>
           <p:nvPr/>
         </p:nvSpPr>
@@ -2245,7 +2291,7 @@
       </p:sp>
       <p:sp>
         <p:nvSpPr>
-          <p:cNvPr id="7" name="Descripción"/>
+          <p:cNvPr id="9" name="Descripción"/>
           <p:cNvSpPr txBox="1"/>
           <p:nvPr/>
         </p:nvSpPr>
@@ -2284,7 +2330,7 @@
       </p:sp>
       <p:sp>
         <p:nvSpPr>
-          <p:cNvPr id="8" name="Chip zona"/>
+          <p:cNvPr id="10" name="Chip zona"/>
           <p:cNvSpPr/>
           <p:nvPr/>
         </p:nvSpPr>
@@ -2313,14 +2359,14 @@
       </p:sp>
       <p:pic>
         <p:nvPicPr>
-          <p:cNvPr id="9" name="Image 1" descr="preencoded.png">    </p:cNvPr>
+          <p:cNvPr id="11" name="Image 2" descr="preencoded.png">    </p:cNvPr>
           <p:cNvPicPr>
             <a:picLocks noChangeAspect="1"/>
           </p:cNvPicPr>
           <p:nvPr/>
         </p:nvPicPr>
         <p:blipFill>
-          <a:blip r:embed="rId2"/>
+          <a:blip r:embed="rId3"/>
           <a:stretch>
             <a:fillRect/>
           </a:stretch>
@@ -2337,7 +2383,7 @@
       </p:pic>
       <p:sp>
         <p:nvSpPr>
-          <p:cNvPr id="10" name="Zona"/>
+          <p:cNvPr id="12" name="Zona"/>
           <p:cNvSpPr txBox="1"/>
           <p:nvPr/>
         </p:nvSpPr>
@@ -5548,7 +5594,7 @@
       </p:sp>
       <p:pic>
         <p:nvPicPr>
-          <p:cNvPr id="4" name="Ilustración Cosmos" descr="/home/claude/assets/il_cosmos_1100.jpg">    </p:cNvPr>
+          <p:cNvPr id="4" name="Foto de la barra" descr="/home/claude/assets/barra_exp.jpg">    </p:cNvPr>
           <p:cNvPicPr>
             <a:picLocks noChangeAspect="1"/>
           </p:cNvPicPr>
@@ -5562,8 +5608,8 @@
         </p:blipFill>
         <p:spPr>
           <a:xfrm>
-            <a:off x="548640" y="1508760"/>
-            <a:ext cx="4937760" cy="3008376"/>
+            <a:off x="548640" y="1463040"/>
+            <a:ext cx="4206240" cy="3758184"/>
           </a:xfrm>
           <a:prstGeom prst="rect">
             <a:avLst/>
@@ -5578,12 +5624,12 @@
         </p:nvSpPr>
         <p:spPr>
           <a:xfrm>
-            <a:off x="548640" y="1508760"/>
-            <a:ext cx="4937760" cy="3008376"/>
-          </a:xfrm>
-          <a:prstGeom prst="roundRect">
+            <a:off x="548640" y="1463040"/>
+            <a:ext cx="4206240" cy="3758184"/>
+          </a:xfrm>
+          <a:prstGeom prst="rect">
             <a:avLst>
-              <a:gd name="adj" fmla="val 4255"/>
+              <a:gd name="adj" fmla="val 3406"/>
             </a:avLst>
           </a:prstGeom>
           <a:ln w="12700">
@@ -5604,8 +5650,8 @@
         </p:nvSpPr>
         <p:spPr>
           <a:xfrm>
-            <a:off x="548640" y="4709160"/>
-            <a:ext cx="4937760" cy="1188720"/>
+            <a:off x="548640" y="5349240"/>
+            <a:ext cx="5120640" cy="822960"/>
           </a:xfrm>
           <a:prstGeom prst="rect">
             <a:avLst/>
@@ -5621,7 +5667,7 @@
               <a:buNone/>
             </a:pPr>
             <a:r>
-              <a:rPr lang="en-US" sz="1600" dirty="0">
+              <a:rPr lang="en-US" sz="1300" dirty="0">
                 <a:solidFill>
                   <a:schemeClr val="bg2"/>
                 </a:solidFill>
@@ -5629,9 +5675,9 @@
                 <a:ea typeface="Calibri" pitchFamily="34" charset="-122"/>
                 <a:cs typeface="Calibri" pitchFamily="34" charset="-120"/>
               </a:rPr>
-              <a:t>No solo llevamos comida: montamos un espacio que se ve increíble en fotos y que hace que tus invitados regresen a la barra toda la noche.</a:t>
-            </a:r>
-            <a:endParaRPr lang="en-US" sz="1600" dirty="0"/>
+              <a:t>Así llega Bajón Lunar a tu evento: barra completa con letrero iluminado, insumos frescos y servicio. Un espacio que se ve increíble en fotos.</a:t>
+            </a:r>
+            <a:endParaRPr lang="en-US" sz="1300" dirty="0"/>
           </a:p>
         </p:txBody>
       </p:sp>

--- a/bajon-lunar-presentacion.pptx
+++ b/bajon-lunar-presentacion.pptx
@@ -116,36 +116,36 @@
   <p:extLst>
     <p:ext uri="{521415D9-36F7-43E2-AB2F-B90AF26B5E84}">
       <p14:sectionLst xmlns:p14="http://schemas.microsoft.com/office/powerpoint/2010/main">
-        <p14:section name="Portada" id="{714bd035-aa16-3e31-5d6e-29d65bda3578}">
+        <p14:section name="Portada" id="{b1e25526-3620-00ec-c557-9f60cc6e8537}">
           <p14:sldIdLst>
             <p14:sldId id="256"/>
           </p14:sldIdLst>
         </p14:section>
-        <p14:section name="Nosotros" id="{2cd41466-1051-a205-0860-195732d795a5}">
+        <p14:section name="Nosotros" id="{9c076181-2360-d709-c118-f7057ee8369b}">
           <p14:sldIdLst>
             <p14:sldId id="257"/>
           </p14:sldIdLst>
         </p14:section>
-        <p14:section name="Servicios" id="{a78f9cd9-2c17-30f9-ee62-2f595422e9ba}">
+        <p14:section name="Servicios" id="{392ebe20-2e2e-cd76-2812-a82b2331e646}">
           <p14:sldIdLst>
             <p14:sldId id="258"/>
             <p14:sldId id="259"/>
           </p14:sldIdLst>
         </p14:section>
-        <p14:section name="Paquetes y precios" id="{db911b69-3bca-e341-6046-cf64dd9d4f0c}">
+        <p14:section name="Paquetes y precios" id="{3c62cc15-3f61-9e64-857b-581f94317a15}">
           <p14:sldIdLst>
             <p14:sldId id="260"/>
             <p14:sldId id="261"/>
             <p14:sldId id="262"/>
           </p14:sldIdLst>
         </p14:section>
-        <p14:section name="Cómo cotizar" id="{8119c5ab-5f42-8fe4-f8ae-b6468b9df126}">
+        <p14:section name="Cómo cotizar" id="{fd14bdb4-0f21-2361-f1b3-b1bf19299624}">
           <p14:sldIdLst>
             <p14:sldId id="263"/>
             <p14:sldId id="264"/>
           </p14:sldIdLst>
         </p14:section>
-        <p14:section name="Contacto" id="{949b573a-ca0a-888a-eabf-6d00fdf5ca89}">
+        <p14:section name="Contacto" id="{15cee280-ea88-cb95-51c6-29f0abc2dcd6}">
           <p14:sldIdLst>
             <p14:sldId id="265"/>
           </p14:sldIdLst>
@@ -5352,7 +5352,7 @@
                 <a:ea typeface="Calibri" pitchFamily="34" charset="-122"/>
                 <a:cs typeface="Calibri" pitchFamily="34" charset="-120"/>
               </a:rPr>
-              <a:t>Tequila tradicional (Cuervo, Jimador)</a:t>
+              <a:t>Tequila económico (Cuervo Especial, Jimador)</a:t>
             </a:r>
             <a:endParaRPr lang="en-US" sz="1200" dirty="0"/>
           </a:p>
@@ -5395,7 +5395,7 @@
                 <a:ea typeface="Calibri" pitchFamily="34" charset="-122"/>
                 <a:cs typeface="Calibri" pitchFamily="34" charset="-120"/>
               </a:rPr>
-              <a:t>Don Julio 70: $950 por botella</a:t>
+              <a:t>Gama media: $650 (Cuervo Tradicional, Hornitos, 1800)</a:t>
             </a:r>
             <a:endParaRPr lang="en-US" sz="1400" dirty="0"/>
           </a:p>
@@ -5416,7 +5416,7 @@
                 <a:ea typeface="Calibri" pitchFamily="34" charset="-122"/>
                 <a:cs typeface="Calibri" pitchFamily="34" charset="-120"/>
               </a:rPr>
-              <a:t>Maestro Dobel Diamante: $1,050 por botella</a:t>
+              <a:t>Premium: $1,200 (Don Julio 70, Dobel Diamante)</a:t>
             </a:r>
             <a:endParaRPr lang="en-US" sz="1400" dirty="0"/>
           </a:p>
@@ -10001,7 +10001,7 @@
                 <a:ea typeface="Calibri" pitchFamily="34" charset="-122"/>
                 <a:cs typeface="Calibri" pitchFamily="34" charset="-120"/>
               </a:rPr>
-              <a:t>Precio de arranque con el mínimo de personas y 1 porción por persona (chilaquiles: bowl de 16 oz). Cantaritos: precio por botella; incluye el servicio y las botellas mínimas de tequila tradicional a $450 (4, 8, 14 o 22).</a:t>
+              <a:t>Precio de arranque con el mínimo de personas y 1 porción por persona (chilaquiles: bowl de 16 oz). Cantaritos: precio por botella; incluye el servicio y las botellas mínimas de tequila económico a $450 (4, 8, 14 o 22).</a:t>
             </a:r>
             <a:endParaRPr lang="en-US" sz="1200" dirty="0"/>
           </a:p>
@@ -11231,7 +11231,7 @@
                           <a:ea typeface="Calibri" pitchFamily="34" charset="-122"/>
                           <a:cs typeface="Calibri" pitchFamily="34" charset="-120"/>
                         </a:rPr>
-                        <a:t>1 botella tradicional</a:t>
+                        <a:t>1 botella de tequila económico</a:t>
                       </a:r>
                       <a:endParaRPr lang="en-US" sz="1250" dirty="0">
                         <a:latin typeface="Calibri" charset="0"/>
@@ -11437,7 +11437,7 @@
                           <a:ea typeface="Calibri" pitchFamily="34" charset="-122"/>
                           <a:cs typeface="Calibri" pitchFamily="34" charset="-120"/>
                         </a:rPr>
-                        <a:t>2 botellas tradicionales</a:t>
+                        <a:t>2 botellas de tequila económico</a:t>
                       </a:r>
                       <a:endParaRPr lang="en-US" sz="1250" dirty="0">
                         <a:latin typeface="Calibri" charset="0"/>
